--- a/main/chapter1/figures/chapter1.pptx
+++ b/main/chapter1/figures/chapter1.pptx
@@ -104,6 +104,11 @@
       </a:defRPr>
     </a:lvl9pPr>
   </p:defaultTextStyle>
+  <p:extLst>
+    <p:ext uri="{EFAFB233-063F-42B5-8137-9DF3F51BA10A}">
+      <p15:sldGuideLst xmlns:p15="http://schemas.microsoft.com/office/powerpoint/2012/main"/>
+    </p:ext>
+  </p:extLst>
 </p:presentation>
 </file>
 
@@ -254,7 +259,7 @@
           <a:p>
             <a:fld id="{C4469FB2-7BD2-D646-BFBD-5C1D555F6E84}" type="datetimeFigureOut">
               <a:rPr kumimoji="1" lang="zh-CN" altLang="en-US" smtClean="0"/>
-              <a:t>2026/3/3</a:t>
+              <a:t>2026/3/8</a:t>
             </a:fld>
             <a:endParaRPr kumimoji="1" lang="zh-CN" altLang="en-US"/>
           </a:p>
@@ -452,7 +457,7 @@
           <a:p>
             <a:fld id="{C4469FB2-7BD2-D646-BFBD-5C1D555F6E84}" type="datetimeFigureOut">
               <a:rPr kumimoji="1" lang="zh-CN" altLang="en-US" smtClean="0"/>
-              <a:t>2026/3/3</a:t>
+              <a:t>2026/3/8</a:t>
             </a:fld>
             <a:endParaRPr kumimoji="1" lang="zh-CN" altLang="en-US"/>
           </a:p>
@@ -660,7 +665,7 @@
           <a:p>
             <a:fld id="{C4469FB2-7BD2-D646-BFBD-5C1D555F6E84}" type="datetimeFigureOut">
               <a:rPr kumimoji="1" lang="zh-CN" altLang="en-US" smtClean="0"/>
-              <a:t>2026/3/3</a:t>
+              <a:t>2026/3/8</a:t>
             </a:fld>
             <a:endParaRPr kumimoji="1" lang="zh-CN" altLang="en-US"/>
           </a:p>
@@ -858,7 +863,7 @@
           <a:p>
             <a:fld id="{C4469FB2-7BD2-D646-BFBD-5C1D555F6E84}" type="datetimeFigureOut">
               <a:rPr kumimoji="1" lang="zh-CN" altLang="en-US" smtClean="0"/>
-              <a:t>2026/3/3</a:t>
+              <a:t>2026/3/8</a:t>
             </a:fld>
             <a:endParaRPr kumimoji="1" lang="zh-CN" altLang="en-US"/>
           </a:p>
@@ -1133,7 +1138,7 @@
           <a:p>
             <a:fld id="{C4469FB2-7BD2-D646-BFBD-5C1D555F6E84}" type="datetimeFigureOut">
               <a:rPr kumimoji="1" lang="zh-CN" altLang="en-US" smtClean="0"/>
-              <a:t>2026/3/3</a:t>
+              <a:t>2026/3/8</a:t>
             </a:fld>
             <a:endParaRPr kumimoji="1" lang="zh-CN" altLang="en-US"/>
           </a:p>
@@ -1398,7 +1403,7 @@
           <a:p>
             <a:fld id="{C4469FB2-7BD2-D646-BFBD-5C1D555F6E84}" type="datetimeFigureOut">
               <a:rPr kumimoji="1" lang="zh-CN" altLang="en-US" smtClean="0"/>
-              <a:t>2026/3/3</a:t>
+              <a:t>2026/3/8</a:t>
             </a:fld>
             <a:endParaRPr kumimoji="1" lang="zh-CN" altLang="en-US"/>
           </a:p>
@@ -1810,7 +1815,7 @@
           <a:p>
             <a:fld id="{C4469FB2-7BD2-D646-BFBD-5C1D555F6E84}" type="datetimeFigureOut">
               <a:rPr kumimoji="1" lang="zh-CN" altLang="en-US" smtClean="0"/>
-              <a:t>2026/3/3</a:t>
+              <a:t>2026/3/8</a:t>
             </a:fld>
             <a:endParaRPr kumimoji="1" lang="zh-CN" altLang="en-US"/>
           </a:p>
@@ -1951,7 +1956,7 @@
           <a:p>
             <a:fld id="{C4469FB2-7BD2-D646-BFBD-5C1D555F6E84}" type="datetimeFigureOut">
               <a:rPr kumimoji="1" lang="zh-CN" altLang="en-US" smtClean="0"/>
-              <a:t>2026/3/3</a:t>
+              <a:t>2026/3/8</a:t>
             </a:fld>
             <a:endParaRPr kumimoji="1" lang="zh-CN" altLang="en-US"/>
           </a:p>
@@ -2064,7 +2069,7 @@
           <a:p>
             <a:fld id="{C4469FB2-7BD2-D646-BFBD-5C1D555F6E84}" type="datetimeFigureOut">
               <a:rPr kumimoji="1" lang="zh-CN" altLang="en-US" smtClean="0"/>
-              <a:t>2026/3/3</a:t>
+              <a:t>2026/3/8</a:t>
             </a:fld>
             <a:endParaRPr kumimoji="1" lang="zh-CN" altLang="en-US"/>
           </a:p>
@@ -2375,7 +2380,7 @@
           <a:p>
             <a:fld id="{C4469FB2-7BD2-D646-BFBD-5C1D555F6E84}" type="datetimeFigureOut">
               <a:rPr kumimoji="1" lang="zh-CN" altLang="en-US" smtClean="0"/>
-              <a:t>2026/3/3</a:t>
+              <a:t>2026/3/8</a:t>
             </a:fld>
             <a:endParaRPr kumimoji="1" lang="zh-CN" altLang="en-US"/>
           </a:p>
@@ -2663,7 +2668,7 @@
           <a:p>
             <a:fld id="{C4469FB2-7BD2-D646-BFBD-5C1D555F6E84}" type="datetimeFigureOut">
               <a:rPr kumimoji="1" lang="zh-CN" altLang="en-US" smtClean="0"/>
-              <a:t>2026/3/3</a:t>
+              <a:t>2026/3/8</a:t>
             </a:fld>
             <a:endParaRPr kumimoji="1" lang="zh-CN" altLang="en-US"/>
           </a:p>
@@ -2904,7 +2909,7 @@
           <a:p>
             <a:fld id="{C4469FB2-7BD2-D646-BFBD-5C1D555F6E84}" type="datetimeFigureOut">
               <a:rPr kumimoji="1" lang="zh-CN" altLang="en-US" smtClean="0"/>
-              <a:t>2026/3/3</a:t>
+              <a:t>2026/3/8</a:t>
             </a:fld>
             <a:endParaRPr kumimoji="1" lang="zh-CN" altLang="en-US"/>
           </a:p>
@@ -3335,12 +3340,17 @@
         </p:nvSpPr>
         <p:spPr>
           <a:xfrm>
-            <a:off x="2852804" y="752312"/>
-            <a:ext cx="6756722" cy="529460"/>
+            <a:off x="2513273" y="729093"/>
+            <a:ext cx="6756722" cy="439260"/>
           </a:xfrm>
           <a:prstGeom prst="rect">
             <a:avLst/>
           </a:prstGeom>
+          <a:solidFill>
+            <a:schemeClr val="accent5">
+              <a:lumMod val="50000"/>
+            </a:schemeClr>
+          </a:solidFill>
         </p:spPr>
         <p:style>
           <a:lnRef idx="2">
@@ -3365,7 +3375,7 @@
             <a:pPr algn="ctr"/>
             <a:r>
               <a:rPr kumimoji="1" lang="zh-CN" altLang="en-US" dirty="0"/>
-              <a:t>基于人体几何先验的可驱动穿衣人重建研究</a:t>
+              <a:t>基于几何先验的三维人体与服装重建研究</a:t>
             </a:r>
           </a:p>
         </p:txBody>
@@ -3384,8 +3394,8 @@
         </p:nvSpPr>
         <p:spPr>
           <a:xfrm>
-            <a:off x="2852804" y="1424617"/>
-            <a:ext cx="3349379" cy="1133870"/>
+            <a:off x="2516627" y="1308076"/>
+            <a:ext cx="3349379" cy="956116"/>
           </a:xfrm>
           <a:prstGeom prst="rect">
             <a:avLst/>
@@ -3437,8 +3447,8 @@
         </p:nvSpPr>
         <p:spPr>
           <a:xfrm>
-            <a:off x="2171563" y="1606540"/>
-            <a:ext cx="646331" cy="646331"/>
+            <a:off x="1895852" y="1550036"/>
+            <a:ext cx="543739" cy="523220"/>
           </a:xfrm>
           <a:prstGeom prst="rect">
             <a:avLst/>
@@ -3452,14 +3462,26 @@
           <a:lstStyle/>
           <a:p>
             <a:r>
-              <a:rPr kumimoji="1" lang="zh-CN" altLang="en-US" dirty="0"/>
+              <a:rPr kumimoji="1" lang="zh-CN" altLang="en-US" sz="1400" dirty="0">
+                <a:solidFill>
+                  <a:srgbClr val="002060"/>
+                </a:solidFill>
+              </a:rPr>
               <a:t>问题</a:t>
             </a:r>
-            <a:endParaRPr kumimoji="1" lang="en-US" altLang="zh-CN" dirty="0"/>
-          </a:p>
-          <a:p>
-            <a:r>
-              <a:rPr kumimoji="1" lang="zh-CN" altLang="en-US" dirty="0"/>
+            <a:endParaRPr kumimoji="1" lang="en-US" altLang="zh-CN" sz="1400" dirty="0">
+              <a:solidFill>
+                <a:srgbClr val="002060"/>
+              </a:solidFill>
+            </a:endParaRPr>
+          </a:p>
+          <a:p>
+            <a:r>
+              <a:rPr kumimoji="1" lang="zh-CN" altLang="en-US" sz="1400" dirty="0">
+                <a:solidFill>
+                  <a:srgbClr val="002060"/>
+                </a:solidFill>
+              </a:rPr>
               <a:t>挑战</a:t>
             </a:r>
           </a:p>
@@ -3479,12 +3501,17 @@
         </p:nvSpPr>
         <p:spPr>
           <a:xfrm>
-            <a:off x="2852803" y="1424616"/>
-            <a:ext cx="3070247" cy="363849"/>
+            <a:off x="2516626" y="1308075"/>
+            <a:ext cx="3349379" cy="363849"/>
           </a:xfrm>
           <a:prstGeom prst="rect">
             <a:avLst/>
           </a:prstGeom>
+          <a:solidFill>
+            <a:schemeClr val="accent5">
+              <a:lumMod val="50000"/>
+            </a:schemeClr>
+          </a:solidFill>
         </p:spPr>
         <p:style>
           <a:lnRef idx="2">
@@ -3528,8 +3555,8 @@
         </p:nvSpPr>
         <p:spPr>
           <a:xfrm>
-            <a:off x="2975314" y="1855937"/>
-            <a:ext cx="2947736" cy="646331"/>
+            <a:off x="2623359" y="1708074"/>
+            <a:ext cx="3160410" cy="461665"/>
           </a:xfrm>
           <a:prstGeom prst="rect">
             <a:avLst/>
@@ -3544,7 +3571,11 @@
           <a:p>
             <a:r>
               <a:rPr lang="zh-CN" altLang="en-US" sz="1200" dirty="0"/>
-              <a:t>现有3DGS人体方法中高斯旋转/缩放为自由参数，与底层网格拓扑无关联，未见姿态下高斯脱离表面，产生几何伪影</a:t>
+              <a:t>现有3DGS人体方法中高斯为无约束优化，与底层网格拓扑无关联，导致</a:t>
+            </a:r>
+            <a:r>
+              <a:rPr lang="zh-CN" altLang="en-US" sz="1200" b="1" dirty="0"/>
+              <a:t>驱动泛化性差</a:t>
             </a:r>
           </a:p>
         </p:txBody>
@@ -3563,8 +3594,8 @@
         </p:nvSpPr>
         <p:spPr>
           <a:xfrm>
-            <a:off x="6324694" y="1426667"/>
-            <a:ext cx="3284834" cy="1133870"/>
+            <a:off x="5988517" y="1310126"/>
+            <a:ext cx="3284834" cy="956116"/>
           </a:xfrm>
           <a:prstGeom prst="rect">
             <a:avLst/>
@@ -3616,12 +3647,17 @@
         </p:nvSpPr>
         <p:spPr>
           <a:xfrm>
-            <a:off x="6431987" y="1424616"/>
-            <a:ext cx="3070247" cy="363849"/>
+            <a:off x="5988516" y="1308075"/>
+            <a:ext cx="3284833" cy="363849"/>
           </a:xfrm>
           <a:prstGeom prst="rect">
             <a:avLst/>
           </a:prstGeom>
+          <a:solidFill>
+            <a:schemeClr val="accent5">
+              <a:lumMod val="50000"/>
+            </a:schemeClr>
+          </a:solidFill>
         </p:spPr>
         <p:style>
           <a:lnRef idx="2">
@@ -3665,8 +3701,8 @@
         </p:nvSpPr>
         <p:spPr>
           <a:xfrm>
-            <a:off x="6394511" y="1852360"/>
-            <a:ext cx="3153760" cy="646331"/>
+            <a:off x="5973424" y="1751178"/>
+            <a:ext cx="3235470" cy="461665"/>
           </a:xfrm>
           <a:prstGeom prst="rect">
             <a:avLst/>
@@ -3681,56 +3717,11 @@
           <a:p>
             <a:r>
               <a:rPr lang="zh-CN" altLang="en-US" sz="1200" dirty="0"/>
-              <a:t>现有方法仅凭图像预测服装参数，缺乏对穿着者真实体型的显式感知，导致服装尺寸与体型失配</a:t>
-            </a:r>
-          </a:p>
-        </p:txBody>
-      </p:sp>
-      <p:sp>
-        <p:nvSpPr>
-          <p:cNvPr id="20" name="矩形 19">
-            <a:extLst>
-              <a:ext uri="{FF2B5EF4-FFF2-40B4-BE49-F238E27FC236}">
-                <a16:creationId xmlns:a16="http://schemas.microsoft.com/office/drawing/2014/main" id="{33CDBCBF-81F1-7B4F-ADE7-1B0E077F5BA6}"/>
-              </a:ext>
-            </a:extLst>
-          </p:cNvPr>
-          <p:cNvSpPr/>
-          <p:nvPr/>
-        </p:nvSpPr>
-        <p:spPr>
-          <a:xfrm>
-            <a:off x="2852803" y="2708400"/>
-            <a:ext cx="6771940" cy="363849"/>
-          </a:xfrm>
-          <a:prstGeom prst="rect">
-            <a:avLst/>
-          </a:prstGeom>
-        </p:spPr>
-        <p:style>
-          <a:lnRef idx="2">
-            <a:schemeClr val="accent1">
-              <a:shade val="50000"/>
-            </a:schemeClr>
-          </a:lnRef>
-          <a:fillRef idx="1">
-            <a:schemeClr val="accent1"/>
-          </a:fillRef>
-          <a:effectRef idx="0">
-            <a:schemeClr val="accent1"/>
-          </a:effectRef>
-          <a:fontRef idx="minor">
-            <a:schemeClr val="lt1"/>
-          </a:fontRef>
-        </p:style>
-        <p:txBody>
-          <a:bodyPr rtlCol="0" anchor="ctr"/>
-          <a:lstStyle/>
-          <a:p>
-            <a:pPr algn="ctr"/>
-            <a:r>
-              <a:rPr kumimoji="1" lang="zh-CN" altLang="en-US" sz="1400" dirty="0"/>
-              <a:t>引入参数化人体几何先验</a:t>
+              <a:t>现有方法仅凭图像预测服装参数，缺乏穿着者的显式几何约束，重建</a:t>
+            </a:r>
+            <a:r>
+              <a:rPr lang="zh-CN" altLang="en-US" sz="1200" b="1" dirty="0"/>
+              <a:t>服装几何保真度不足</a:t>
             </a:r>
           </a:p>
         </p:txBody>
@@ -3749,8 +3740,8 @@
         </p:nvSpPr>
         <p:spPr>
           <a:xfrm>
-            <a:off x="2145217" y="2558487"/>
-            <a:ext cx="646331" cy="646331"/>
+            <a:off x="1916793" y="2519175"/>
+            <a:ext cx="646331" cy="523220"/>
           </a:xfrm>
           <a:prstGeom prst="rect">
             <a:avLst/>
@@ -3764,7 +3755,11 @@
           <a:lstStyle/>
           <a:p>
             <a:r>
-              <a:rPr kumimoji="1" lang="zh-CN" altLang="en-US" dirty="0"/>
+              <a:rPr kumimoji="1" lang="zh-CN" altLang="en-US" sz="1400" dirty="0">
+                <a:solidFill>
+                  <a:srgbClr val="002060"/>
+                </a:solidFill>
+              </a:rPr>
               <a:t>研究思路</a:t>
             </a:r>
           </a:p>
@@ -3784,8 +3779,8 @@
         </p:nvSpPr>
         <p:spPr>
           <a:xfrm>
-            <a:off x="2127389" y="3631206"/>
-            <a:ext cx="646331" cy="646331"/>
+            <a:off x="1878721" y="3746950"/>
+            <a:ext cx="646331" cy="523220"/>
           </a:xfrm>
           <a:prstGeom prst="rect">
             <a:avLst/>
@@ -3799,7 +3794,11 @@
           <a:lstStyle/>
           <a:p>
             <a:r>
-              <a:rPr kumimoji="1" lang="zh-CN" altLang="en-US" dirty="0"/>
+              <a:rPr kumimoji="1" lang="zh-CN" altLang="en-US" sz="1400" dirty="0">
+                <a:solidFill>
+                  <a:srgbClr val="002060"/>
+                </a:solidFill>
+              </a:rPr>
               <a:t>研究内容</a:t>
             </a:r>
           </a:p>
@@ -3819,8 +3818,8 @@
         </p:nvSpPr>
         <p:spPr>
           <a:xfrm>
-            <a:off x="2145217" y="4950462"/>
-            <a:ext cx="646331" cy="369332"/>
+            <a:off x="1870565" y="4989765"/>
+            <a:ext cx="646331" cy="307777"/>
           </a:xfrm>
           <a:prstGeom prst="rect">
             <a:avLst/>
@@ -3834,7 +3833,11 @@
           <a:lstStyle/>
           <a:p>
             <a:r>
-              <a:rPr kumimoji="1" lang="zh-CN" altLang="en-US" dirty="0"/>
+              <a:rPr kumimoji="1" lang="zh-CN" altLang="en-US" sz="1400" dirty="0">
+                <a:solidFill>
+                  <a:srgbClr val="002060"/>
+                </a:solidFill>
+              </a:rPr>
               <a:t>目标</a:t>
             </a:r>
           </a:p>
@@ -3854,8 +3857,8 @@
         </p:nvSpPr>
         <p:spPr>
           <a:xfrm>
-            <a:off x="2852803" y="3347664"/>
-            <a:ext cx="3300052" cy="1313656"/>
+            <a:off x="2487581" y="3223032"/>
+            <a:ext cx="3370234" cy="1500971"/>
           </a:xfrm>
           <a:prstGeom prst="rect">
             <a:avLst/>
@@ -3907,12 +3910,17 @@
         </p:nvSpPr>
         <p:spPr>
           <a:xfrm>
-            <a:off x="2975314" y="3345613"/>
-            <a:ext cx="3070247" cy="363849"/>
+            <a:off x="2474798" y="3215857"/>
+            <a:ext cx="3387853" cy="363849"/>
           </a:xfrm>
           <a:prstGeom prst="rect">
             <a:avLst/>
           </a:prstGeom>
+          <a:solidFill>
+            <a:schemeClr val="accent5">
+              <a:lumMod val="50000"/>
+            </a:schemeClr>
+          </a:solidFill>
         </p:spPr>
         <p:style>
           <a:lnRef idx="2">
@@ -3956,8 +3964,8 @@
         </p:nvSpPr>
         <p:spPr>
           <a:xfrm>
-            <a:off x="6411640" y="3347663"/>
-            <a:ext cx="3223576" cy="1313657"/>
+            <a:off x="6046418" y="3223031"/>
+            <a:ext cx="3223576" cy="1500972"/>
           </a:xfrm>
           <a:prstGeom prst="rect">
             <a:avLst/>
@@ -4009,12 +4017,17 @@
         </p:nvSpPr>
         <p:spPr>
           <a:xfrm>
-            <a:off x="6411641" y="3345613"/>
+            <a:off x="6046419" y="3220981"/>
             <a:ext cx="3223576" cy="363849"/>
           </a:xfrm>
           <a:prstGeom prst="rect">
             <a:avLst/>
           </a:prstGeom>
+          <a:solidFill>
+            <a:schemeClr val="accent5">
+              <a:lumMod val="50000"/>
+            </a:schemeClr>
+          </a:solidFill>
         </p:spPr>
         <p:style>
           <a:lnRef idx="2">
@@ -4039,7 +4052,7 @@
             <a:pPr algn="ctr"/>
             <a:r>
               <a:rPr kumimoji="1" lang="zh-CN" altLang="en-US" sz="1400" dirty="0"/>
-              <a:t>基于人体几何先验的三维服装生成</a:t>
+              <a:t>基于人体几何先验的服装参数生成</a:t>
             </a:r>
           </a:p>
         </p:txBody>
@@ -4058,8 +4071,8 @@
         </p:nvSpPr>
         <p:spPr>
           <a:xfrm>
-            <a:off x="3027349" y="3772448"/>
-            <a:ext cx="2846373" cy="363849"/>
+            <a:off x="2599439" y="3980629"/>
+            <a:ext cx="3090107" cy="288300"/>
           </a:xfrm>
           <a:prstGeom prst="rect">
             <a:avLst/>
@@ -4069,7 +4082,7 @@
             <a:solidFill>
               <a:schemeClr val="tx1"/>
             </a:solidFill>
-            <a:prstDash val="lgDash"/>
+            <a:prstDash val="solid"/>
           </a:ln>
         </p:spPr>
         <p:style>
@@ -4094,7 +4107,7 @@
           <a:p>
             <a:pPr algn="ctr"/>
             <a:r>
-              <a:rPr kumimoji="1" lang="zh-CN" altLang="en-US" sz="1200" dirty="0">
+              <a:rPr kumimoji="1" lang="zh-CN" altLang="en-US" sz="1100" dirty="0">
                 <a:solidFill>
                   <a:schemeClr val="tx1"/>
                 </a:solidFill>
@@ -4118,8 +4131,8 @@
         </p:nvSpPr>
         <p:spPr>
           <a:xfrm>
-            <a:off x="2976667" y="4213034"/>
-            <a:ext cx="2846373" cy="363849"/>
+            <a:off x="2599440" y="4352316"/>
+            <a:ext cx="3090107" cy="288300"/>
           </a:xfrm>
           <a:prstGeom prst="rect">
             <a:avLst/>
@@ -4129,7 +4142,7 @@
             <a:solidFill>
               <a:schemeClr val="tx1"/>
             </a:solidFill>
-            <a:prstDash val="lgDash"/>
+            <a:prstDash val="solid"/>
           </a:ln>
         </p:spPr>
         <p:style>
@@ -4154,7 +4167,7 @@
           <a:p>
             <a:pPr algn="ctr"/>
             <a:r>
-              <a:rPr kumimoji="1" lang="zh-CN" altLang="en-US" sz="1200" dirty="0">
+              <a:rPr kumimoji="1" lang="zh-CN" altLang="en-US" sz="1100" dirty="0">
                 <a:solidFill>
                   <a:schemeClr val="tx1"/>
                 </a:solidFill>
@@ -4166,10 +4179,49 @@
       </p:sp>
       <p:sp>
         <p:nvSpPr>
-          <p:cNvPr id="35" name="矩形 34">
-            <a:extLst>
-              <a:ext uri="{FF2B5EF4-FFF2-40B4-BE49-F238E27FC236}">
-                <a16:creationId xmlns:a16="http://schemas.microsoft.com/office/drawing/2014/main" id="{08B3D4CE-2CCC-A34D-863B-0E3BC6617704}"/>
+          <p:cNvPr id="40" name="文本框 39">
+            <a:extLst>
+              <a:ext uri="{FF2B5EF4-FFF2-40B4-BE49-F238E27FC236}">
+                <a16:creationId xmlns:a16="http://schemas.microsoft.com/office/drawing/2014/main" id="{C86F6E39-1FED-6347-A818-34B706834A14}"/>
+              </a:ext>
+            </a:extLst>
+          </p:cNvPr>
+          <p:cNvSpPr txBox="1"/>
+          <p:nvPr/>
+        </p:nvSpPr>
+        <p:spPr>
+          <a:xfrm>
+            <a:off x="1870565" y="5561328"/>
+            <a:ext cx="646331" cy="307777"/>
+          </a:xfrm>
+          <a:prstGeom prst="rect">
+            <a:avLst/>
+          </a:prstGeom>
+          <a:noFill/>
+        </p:spPr>
+        <p:txBody>
+          <a:bodyPr wrap="square" rtlCol="0">
+            <a:spAutoFit/>
+          </a:bodyPr>
+          <a:lstStyle/>
+          <a:p>
+            <a:r>
+              <a:rPr kumimoji="1" lang="zh-CN" altLang="en-US" sz="1400" dirty="0">
+                <a:solidFill>
+                  <a:srgbClr val="002060"/>
+                </a:solidFill>
+              </a:rPr>
+              <a:t>应用</a:t>
+            </a:r>
+          </a:p>
+        </p:txBody>
+      </p:sp>
+      <p:sp>
+        <p:nvSpPr>
+          <p:cNvPr id="41" name="矩形 40">
+            <a:extLst>
+              <a:ext uri="{FF2B5EF4-FFF2-40B4-BE49-F238E27FC236}">
+                <a16:creationId xmlns:a16="http://schemas.microsoft.com/office/drawing/2014/main" id="{A9F3AFC4-DABA-F541-B97C-D4E0DD45FF6B}"/>
               </a:ext>
             </a:extLst>
           </p:cNvPr>
@@ -4178,8 +4230,8 @@
         </p:nvSpPr>
         <p:spPr>
           <a:xfrm>
-            <a:off x="6600241" y="3731648"/>
-            <a:ext cx="2846373" cy="404649"/>
+            <a:off x="2499495" y="4956295"/>
+            <a:ext cx="3300052" cy="363849"/>
           </a:xfrm>
           <a:prstGeom prst="rect">
             <a:avLst/>
@@ -4189,7 +4241,7 @@
             <a:solidFill>
               <a:schemeClr val="tx1"/>
             </a:solidFill>
-            <a:prstDash val="lgDash"/>
+            <a:prstDash val="solid"/>
           </a:ln>
         </p:spPr>
         <p:style>
@@ -4219,17 +4271,17 @@
                   <a:schemeClr val="tx1"/>
                 </a:solidFill>
               </a:rPr>
-              <a:t>参数化人体模型测量</a:t>
-            </a:r>
-          </a:p>
-        </p:txBody>
-      </p:sp>
-      <p:sp>
-        <p:nvSpPr>
-          <p:cNvPr id="37" name="矩形 36">
-            <a:extLst>
-              <a:ext uri="{FF2B5EF4-FFF2-40B4-BE49-F238E27FC236}">
-                <a16:creationId xmlns:a16="http://schemas.microsoft.com/office/drawing/2014/main" id="{DC8ADB58-2F65-484B-ABD8-368E1D37D1F5}"/>
+              <a:t>提升人体几何重建质量与驱动泛化性</a:t>
+            </a:r>
+          </a:p>
+        </p:txBody>
+      </p:sp>
+      <p:sp>
+        <p:nvSpPr>
+          <p:cNvPr id="44" name="矩形 43">
+            <a:extLst>
+              <a:ext uri="{FF2B5EF4-FFF2-40B4-BE49-F238E27FC236}">
+                <a16:creationId xmlns:a16="http://schemas.microsoft.com/office/drawing/2014/main" id="{6353E3A8-3A33-CB41-8B8F-95F8185207D7}"/>
               </a:ext>
             </a:extLst>
           </p:cNvPr>
@@ -4238,8 +4290,8 @@
         </p:nvSpPr>
         <p:spPr>
           <a:xfrm>
-            <a:off x="6600240" y="4204598"/>
-            <a:ext cx="2846373" cy="404649"/>
+            <a:off x="6078679" y="4947859"/>
+            <a:ext cx="3177539" cy="363849"/>
           </a:xfrm>
           <a:prstGeom prst="rect">
             <a:avLst/>
@@ -4249,7 +4301,7 @@
             <a:solidFill>
               <a:schemeClr val="tx1"/>
             </a:solidFill>
-            <a:prstDash val="lgDash"/>
+            <a:prstDash val="solid"/>
           </a:ln>
         </p:spPr>
         <p:style>
@@ -4279,52 +4331,66 @@
                   <a:schemeClr val="tx1"/>
                 </a:solidFill>
               </a:rPr>
-              <a:t>几何先验引导服装参数生成</a:t>
-            </a:r>
-          </a:p>
-        </p:txBody>
-      </p:sp>
-      <p:sp>
-        <p:nvSpPr>
-          <p:cNvPr id="40" name="文本框 39">
-            <a:extLst>
-              <a:ext uri="{FF2B5EF4-FFF2-40B4-BE49-F238E27FC236}">
-                <a16:creationId xmlns:a16="http://schemas.microsoft.com/office/drawing/2014/main" id="{C86F6E39-1FED-6347-A818-34B706834A14}"/>
-              </a:ext>
-            </a:extLst>
-          </p:cNvPr>
-          <p:cNvSpPr txBox="1"/>
+              <a:t>提升服装参数生成精度与推理效率</a:t>
+            </a:r>
+          </a:p>
+        </p:txBody>
+      </p:sp>
+      <p:sp>
+        <p:nvSpPr>
+          <p:cNvPr id="2" name="下箭头 1">
+            <a:extLst>
+              <a:ext uri="{FF2B5EF4-FFF2-40B4-BE49-F238E27FC236}">
+                <a16:creationId xmlns:a16="http://schemas.microsoft.com/office/drawing/2014/main" id="{B962EC26-32C1-FC42-8C36-D37DC5D8C4FF}"/>
+              </a:ext>
+            </a:extLst>
+          </p:cNvPr>
+          <p:cNvSpPr/>
           <p:nvPr/>
         </p:nvSpPr>
         <p:spPr>
           <a:xfrm>
-            <a:off x="2206472" y="5481055"/>
-            <a:ext cx="646331" cy="369332"/>
-          </a:xfrm>
-          <a:prstGeom prst="rect">
+            <a:off x="4019744" y="2294984"/>
+            <a:ext cx="259553" cy="269656"/>
+          </a:xfrm>
+          <a:prstGeom prst="downArrow">
             <a:avLst/>
           </a:prstGeom>
-          <a:noFill/>
-        </p:spPr>
-        <p:txBody>
-          <a:bodyPr wrap="square" rtlCol="0">
-            <a:spAutoFit/>
-          </a:bodyPr>
-          <a:lstStyle/>
-          <a:p>
-            <a:r>
-              <a:rPr kumimoji="1" lang="zh-CN" altLang="en-US" dirty="0"/>
-              <a:t>应用</a:t>
-            </a:r>
-          </a:p>
-        </p:txBody>
-      </p:sp>
-      <p:sp>
-        <p:nvSpPr>
-          <p:cNvPr id="41" name="矩形 40">
-            <a:extLst>
-              <a:ext uri="{FF2B5EF4-FFF2-40B4-BE49-F238E27FC236}">
-                <a16:creationId xmlns:a16="http://schemas.microsoft.com/office/drawing/2014/main" id="{A9F3AFC4-DABA-F541-B97C-D4E0DD45FF6B}"/>
+          <a:solidFill>
+            <a:srgbClr val="0070C0"/>
+          </a:solidFill>
+        </p:spPr>
+        <p:style>
+          <a:lnRef idx="2">
+            <a:schemeClr val="accent1">
+              <a:shade val="50000"/>
+            </a:schemeClr>
+          </a:lnRef>
+          <a:fillRef idx="1">
+            <a:schemeClr val="accent1"/>
+          </a:fillRef>
+          <a:effectRef idx="0">
+            <a:schemeClr val="accent1"/>
+          </a:effectRef>
+          <a:fontRef idx="minor">
+            <a:schemeClr val="lt1"/>
+          </a:fontRef>
+        </p:style>
+        <p:txBody>
+          <a:bodyPr rtlCol="0" anchor="ctr"/>
+          <a:lstStyle/>
+          <a:p>
+            <a:pPr algn="ctr"/>
+            <a:endParaRPr kumimoji="1" lang="zh-CN" altLang="en-US"/>
+          </a:p>
+        </p:txBody>
+      </p:sp>
+      <p:sp>
+        <p:nvSpPr>
+          <p:cNvPr id="29" name="下箭头 28">
+            <a:extLst>
+              <a:ext uri="{FF2B5EF4-FFF2-40B4-BE49-F238E27FC236}">
+                <a16:creationId xmlns:a16="http://schemas.microsoft.com/office/drawing/2014/main" id="{DEB98004-A16A-BC49-A85C-3E19B2EDB0AC}"/>
               </a:ext>
             </a:extLst>
           </p:cNvPr>
@@ -4333,8 +4399,155 @@
         </p:nvSpPr>
         <p:spPr>
           <a:xfrm>
-            <a:off x="2852803" y="4982967"/>
-            <a:ext cx="3300052" cy="363849"/>
+            <a:off x="7589089" y="2313339"/>
+            <a:ext cx="259553" cy="269656"/>
+          </a:xfrm>
+          <a:prstGeom prst="downArrow">
+            <a:avLst/>
+          </a:prstGeom>
+          <a:solidFill>
+            <a:srgbClr val="0070C0"/>
+          </a:solidFill>
+        </p:spPr>
+        <p:style>
+          <a:lnRef idx="2">
+            <a:schemeClr val="accent1">
+              <a:shade val="50000"/>
+            </a:schemeClr>
+          </a:lnRef>
+          <a:fillRef idx="1">
+            <a:schemeClr val="accent1"/>
+          </a:fillRef>
+          <a:effectRef idx="0">
+            <a:schemeClr val="accent1"/>
+          </a:effectRef>
+          <a:fontRef idx="minor">
+            <a:schemeClr val="lt1"/>
+          </a:fontRef>
+        </p:style>
+        <p:txBody>
+          <a:bodyPr rtlCol="0" anchor="ctr"/>
+          <a:lstStyle/>
+          <a:p>
+            <a:pPr algn="ctr"/>
+            <a:endParaRPr kumimoji="1" lang="zh-CN" altLang="en-US"/>
+          </a:p>
+        </p:txBody>
+      </p:sp>
+      <p:sp>
+        <p:nvSpPr>
+          <p:cNvPr id="31" name="下箭头 30">
+            <a:extLst>
+              <a:ext uri="{FF2B5EF4-FFF2-40B4-BE49-F238E27FC236}">
+                <a16:creationId xmlns:a16="http://schemas.microsoft.com/office/drawing/2014/main" id="{03EC22AE-378E-BD4E-8021-160D8A59F64E}"/>
+              </a:ext>
+            </a:extLst>
+          </p:cNvPr>
+          <p:cNvSpPr/>
+          <p:nvPr/>
+        </p:nvSpPr>
+        <p:spPr>
+          <a:xfrm>
+            <a:off x="4014718" y="2986497"/>
+            <a:ext cx="259553" cy="180790"/>
+          </a:xfrm>
+          <a:prstGeom prst="downArrow">
+            <a:avLst/>
+          </a:prstGeom>
+          <a:solidFill>
+            <a:srgbClr val="0070C0"/>
+          </a:solidFill>
+        </p:spPr>
+        <p:style>
+          <a:lnRef idx="2">
+            <a:schemeClr val="accent1">
+              <a:shade val="50000"/>
+            </a:schemeClr>
+          </a:lnRef>
+          <a:fillRef idx="1">
+            <a:schemeClr val="accent1"/>
+          </a:fillRef>
+          <a:effectRef idx="0">
+            <a:schemeClr val="accent1"/>
+          </a:effectRef>
+          <a:fontRef idx="minor">
+            <a:schemeClr val="lt1"/>
+          </a:fontRef>
+        </p:style>
+        <p:txBody>
+          <a:bodyPr rtlCol="0" anchor="ctr"/>
+          <a:lstStyle/>
+          <a:p>
+            <a:pPr algn="ctr"/>
+            <a:endParaRPr kumimoji="1" lang="zh-CN" altLang="en-US"/>
+          </a:p>
+        </p:txBody>
+      </p:sp>
+      <p:sp>
+        <p:nvSpPr>
+          <p:cNvPr id="32" name="下箭头 31">
+            <a:extLst>
+              <a:ext uri="{FF2B5EF4-FFF2-40B4-BE49-F238E27FC236}">
+                <a16:creationId xmlns:a16="http://schemas.microsoft.com/office/drawing/2014/main" id="{CB211465-BE7A-694E-9FCC-CCED075A0606}"/>
+              </a:ext>
+            </a:extLst>
+          </p:cNvPr>
+          <p:cNvSpPr/>
+          <p:nvPr/>
+        </p:nvSpPr>
+        <p:spPr>
+          <a:xfrm>
+            <a:off x="7592450" y="3013174"/>
+            <a:ext cx="259553" cy="180790"/>
+          </a:xfrm>
+          <a:prstGeom prst="downArrow">
+            <a:avLst/>
+          </a:prstGeom>
+          <a:solidFill>
+            <a:srgbClr val="0070C0"/>
+          </a:solidFill>
+        </p:spPr>
+        <p:style>
+          <a:lnRef idx="2">
+            <a:schemeClr val="accent1">
+              <a:shade val="50000"/>
+            </a:schemeClr>
+          </a:lnRef>
+          <a:fillRef idx="1">
+            <a:schemeClr val="accent1"/>
+          </a:fillRef>
+          <a:effectRef idx="0">
+            <a:schemeClr val="accent1"/>
+          </a:effectRef>
+          <a:fontRef idx="minor">
+            <a:schemeClr val="lt1"/>
+          </a:fontRef>
+        </p:style>
+        <p:txBody>
+          <a:bodyPr rtlCol="0" anchor="ctr"/>
+          <a:lstStyle/>
+          <a:p>
+            <a:pPr algn="ctr"/>
+            <a:endParaRPr kumimoji="1" lang="zh-CN" altLang="en-US"/>
+          </a:p>
+        </p:txBody>
+      </p:sp>
+      <p:sp>
+        <p:nvSpPr>
+          <p:cNvPr id="33" name="矩形 32">
+            <a:extLst>
+              <a:ext uri="{FF2B5EF4-FFF2-40B4-BE49-F238E27FC236}">
+                <a16:creationId xmlns:a16="http://schemas.microsoft.com/office/drawing/2014/main" id="{F479F3E2-E958-3D4D-93EE-923E1DEF5168}"/>
+              </a:ext>
+            </a:extLst>
+          </p:cNvPr>
+          <p:cNvSpPr/>
+          <p:nvPr/>
+        </p:nvSpPr>
+        <p:spPr>
+          <a:xfrm>
+            <a:off x="2513273" y="2595432"/>
+            <a:ext cx="3349379" cy="363849"/>
           </a:xfrm>
           <a:prstGeom prst="rect">
             <a:avLst/>
@@ -4344,7 +4557,7 @@
             <a:solidFill>
               <a:schemeClr val="tx1"/>
             </a:solidFill>
-            <a:prstDash val="lgDash"/>
+            <a:prstDash val="solid"/>
           </a:ln>
         </p:spPr>
         <p:style>
@@ -4374,17 +4587,17 @@
                   <a:schemeClr val="tx1"/>
                 </a:solidFill>
               </a:rPr>
-              <a:t>提升人体几何重建质量与驱动泛化性</a:t>
-            </a:r>
-          </a:p>
-        </p:txBody>
-      </p:sp>
-      <p:sp>
-        <p:nvSpPr>
-          <p:cNvPr id="42" name="矩形 41">
-            <a:extLst>
-              <a:ext uri="{FF2B5EF4-FFF2-40B4-BE49-F238E27FC236}">
-                <a16:creationId xmlns:a16="http://schemas.microsoft.com/office/drawing/2014/main" id="{BC8F6F8E-26C9-EB46-888B-DEB240B291CE}"/>
+              <a:t>人体网格先验提供拓扑结构约束</a:t>
+            </a:r>
+          </a:p>
+        </p:txBody>
+      </p:sp>
+      <p:sp>
+        <p:nvSpPr>
+          <p:cNvPr id="36" name="矩形 35">
+            <a:extLst>
+              <a:ext uri="{FF2B5EF4-FFF2-40B4-BE49-F238E27FC236}">
+                <a16:creationId xmlns:a16="http://schemas.microsoft.com/office/drawing/2014/main" id="{15DAFCAF-6247-3C4F-8EA7-DBECB725F6D7}"/>
               </a:ext>
             </a:extLst>
           </p:cNvPr>
@@ -4393,57 +4606,8 @@
         </p:nvSpPr>
         <p:spPr>
           <a:xfrm>
-            <a:off x="2852804" y="5486538"/>
-            <a:ext cx="6782412" cy="363849"/>
-          </a:xfrm>
-          <a:prstGeom prst="rect">
-            <a:avLst/>
-          </a:prstGeom>
-        </p:spPr>
-        <p:style>
-          <a:lnRef idx="2">
-            <a:schemeClr val="accent1">
-              <a:shade val="50000"/>
-            </a:schemeClr>
-          </a:lnRef>
-          <a:fillRef idx="1">
-            <a:schemeClr val="accent1"/>
-          </a:fillRef>
-          <a:effectRef idx="0">
-            <a:schemeClr val="accent1"/>
-          </a:effectRef>
-          <a:fontRef idx="minor">
-            <a:schemeClr val="lt1"/>
-          </a:fontRef>
-        </p:style>
-        <p:txBody>
-          <a:bodyPr rtlCol="0" anchor="ctr"/>
-          <a:lstStyle/>
-          <a:p>
-            <a:pPr algn="ctr"/>
-            <a:r>
-              <a:rPr kumimoji="1" lang="zh-CN" altLang="en-US" sz="1400" dirty="0"/>
-              <a:t>引入参数化人体几何先验</a:t>
-            </a:r>
-          </a:p>
-        </p:txBody>
-      </p:sp>
-      <p:sp>
-        <p:nvSpPr>
-          <p:cNvPr id="44" name="矩形 43">
-            <a:extLst>
-              <a:ext uri="{FF2B5EF4-FFF2-40B4-BE49-F238E27FC236}">
-                <a16:creationId xmlns:a16="http://schemas.microsoft.com/office/drawing/2014/main" id="{6353E3A8-3A33-CB41-8B8F-95F8185207D7}"/>
-              </a:ext>
-            </a:extLst>
-          </p:cNvPr>
-          <p:cNvSpPr/>
-          <p:nvPr/>
-        </p:nvSpPr>
-        <p:spPr>
-          <a:xfrm>
-            <a:off x="6431987" y="4974531"/>
-            <a:ext cx="3177539" cy="363849"/>
+            <a:off x="5985159" y="2607360"/>
+            <a:ext cx="3284834" cy="363849"/>
           </a:xfrm>
           <a:prstGeom prst="rect">
             <a:avLst/>
@@ -4453,7 +4617,7 @@
             <a:solidFill>
               <a:schemeClr val="tx1"/>
             </a:solidFill>
-            <a:prstDash val="lgDash"/>
+            <a:prstDash val="solid"/>
           </a:ln>
         </p:spPr>
         <p:style>
@@ -4483,8 +4647,538 @@
                   <a:schemeClr val="tx1"/>
                 </a:solidFill>
               </a:rPr>
-              <a:t>提升服装参数生成精度与生成效率</a:t>
-            </a:r>
+              <a:t>人体网格提供人体测量信息先验</a:t>
+            </a:r>
+          </a:p>
+        </p:txBody>
+      </p:sp>
+      <p:sp>
+        <p:nvSpPr>
+          <p:cNvPr id="39" name="文本框 38">
+            <a:extLst>
+              <a:ext uri="{FF2B5EF4-FFF2-40B4-BE49-F238E27FC236}">
+                <a16:creationId xmlns:a16="http://schemas.microsoft.com/office/drawing/2014/main" id="{C40A0DA6-A11F-5345-B458-6A425514CD44}"/>
+              </a:ext>
+            </a:extLst>
+          </p:cNvPr>
+          <p:cNvSpPr txBox="1"/>
+          <p:nvPr/>
+        </p:nvSpPr>
+        <p:spPr>
+          <a:xfrm>
+            <a:off x="4533899" y="2319307"/>
+            <a:ext cx="2600325" cy="276999"/>
+          </a:xfrm>
+          <a:prstGeom prst="rect">
+            <a:avLst/>
+          </a:prstGeom>
+          <a:noFill/>
+        </p:spPr>
+        <p:txBody>
+          <a:bodyPr wrap="square">
+            <a:spAutoFit/>
+          </a:bodyPr>
+          <a:lstStyle/>
+          <a:p>
+            <a:pPr algn="ctr"/>
+            <a:r>
+              <a:rPr kumimoji="1" lang="zh-CN" altLang="en-US" sz="1200" dirty="0">
+                <a:solidFill>
+                  <a:schemeClr val="tx1"/>
+                </a:solidFill>
+              </a:rPr>
+              <a:t>引入参数化人体网格先验</a:t>
+            </a:r>
+          </a:p>
+        </p:txBody>
+      </p:sp>
+      <p:sp>
+        <p:nvSpPr>
+          <p:cNvPr id="43" name="矩形 42">
+            <a:extLst>
+              <a:ext uri="{FF2B5EF4-FFF2-40B4-BE49-F238E27FC236}">
+                <a16:creationId xmlns:a16="http://schemas.microsoft.com/office/drawing/2014/main" id="{9BE688C9-CB83-F447-BD34-8337B465A7E3}"/>
+              </a:ext>
+            </a:extLst>
+          </p:cNvPr>
+          <p:cNvSpPr/>
+          <p:nvPr/>
+        </p:nvSpPr>
+        <p:spPr>
+          <a:xfrm>
+            <a:off x="2610908" y="3640342"/>
+            <a:ext cx="3090107" cy="288300"/>
+          </a:xfrm>
+          <a:prstGeom prst="rect">
+            <a:avLst/>
+          </a:prstGeom>
+          <a:noFill/>
+          <a:ln>
+            <a:solidFill>
+              <a:schemeClr val="tx1"/>
+            </a:solidFill>
+            <a:prstDash val="solid"/>
+          </a:ln>
+        </p:spPr>
+        <p:style>
+          <a:lnRef idx="2">
+            <a:schemeClr val="accent1">
+              <a:shade val="50000"/>
+            </a:schemeClr>
+          </a:lnRef>
+          <a:fillRef idx="1">
+            <a:schemeClr val="accent1"/>
+          </a:fillRef>
+          <a:effectRef idx="0">
+            <a:schemeClr val="accent1"/>
+          </a:effectRef>
+          <a:fontRef idx="minor">
+            <a:schemeClr val="lt1"/>
+          </a:fontRef>
+        </p:style>
+        <p:txBody>
+          <a:bodyPr rtlCol="0" anchor="ctr"/>
+          <a:lstStyle/>
+          <a:p>
+            <a:pPr algn="ctr"/>
+            <a:r>
+              <a:rPr kumimoji="1" lang="zh-CN" altLang="en-US" sz="1100" dirty="0">
+                <a:solidFill>
+                  <a:schemeClr val="tx1"/>
+                </a:solidFill>
+              </a:rPr>
+              <a:t>可变形穿衣人网格表示</a:t>
+            </a:r>
+          </a:p>
+        </p:txBody>
+      </p:sp>
+      <p:sp>
+        <p:nvSpPr>
+          <p:cNvPr id="45" name="矩形 44">
+            <a:extLst>
+              <a:ext uri="{FF2B5EF4-FFF2-40B4-BE49-F238E27FC236}">
+                <a16:creationId xmlns:a16="http://schemas.microsoft.com/office/drawing/2014/main" id="{826EB1D6-45D7-AD4A-BA39-71A097F42B91}"/>
+              </a:ext>
+            </a:extLst>
+          </p:cNvPr>
+          <p:cNvSpPr/>
+          <p:nvPr/>
+        </p:nvSpPr>
+        <p:spPr>
+          <a:xfrm>
+            <a:off x="6122394" y="3696621"/>
+            <a:ext cx="3090107" cy="288300"/>
+          </a:xfrm>
+          <a:prstGeom prst="rect">
+            <a:avLst/>
+          </a:prstGeom>
+          <a:noFill/>
+          <a:ln>
+            <a:solidFill>
+              <a:schemeClr val="tx1"/>
+            </a:solidFill>
+            <a:prstDash val="solid"/>
+          </a:ln>
+        </p:spPr>
+        <p:style>
+          <a:lnRef idx="2">
+            <a:schemeClr val="accent1">
+              <a:shade val="50000"/>
+            </a:schemeClr>
+          </a:lnRef>
+          <a:fillRef idx="1">
+            <a:schemeClr val="accent1"/>
+          </a:fillRef>
+          <a:effectRef idx="0">
+            <a:schemeClr val="accent1"/>
+          </a:effectRef>
+          <a:fontRef idx="minor">
+            <a:schemeClr val="lt1"/>
+          </a:fontRef>
+        </p:style>
+        <p:txBody>
+          <a:bodyPr rtlCol="0" anchor="ctr"/>
+          <a:lstStyle/>
+          <a:p>
+            <a:pPr algn="ctr"/>
+            <a:r>
+              <a:rPr kumimoji="1" lang="zh-CN" altLang="en-US" sz="1100" dirty="0">
+                <a:solidFill>
+                  <a:schemeClr val="tx1"/>
+                </a:solidFill>
+              </a:rPr>
+              <a:t>人体测量先验自动化提取</a:t>
+            </a:r>
+          </a:p>
+        </p:txBody>
+      </p:sp>
+      <p:sp>
+        <p:nvSpPr>
+          <p:cNvPr id="46" name="矩形 45">
+            <a:extLst>
+              <a:ext uri="{FF2B5EF4-FFF2-40B4-BE49-F238E27FC236}">
+                <a16:creationId xmlns:a16="http://schemas.microsoft.com/office/drawing/2014/main" id="{6324C99D-4B2D-8A4F-A578-76E120F84167}"/>
+              </a:ext>
+            </a:extLst>
+          </p:cNvPr>
+          <p:cNvSpPr/>
+          <p:nvPr/>
+        </p:nvSpPr>
+        <p:spPr>
+          <a:xfrm>
+            <a:off x="6122394" y="4022220"/>
+            <a:ext cx="3090107" cy="288300"/>
+          </a:xfrm>
+          <a:prstGeom prst="rect">
+            <a:avLst/>
+          </a:prstGeom>
+          <a:noFill/>
+          <a:ln>
+            <a:solidFill>
+              <a:schemeClr val="tx1"/>
+            </a:solidFill>
+            <a:prstDash val="solid"/>
+          </a:ln>
+        </p:spPr>
+        <p:style>
+          <a:lnRef idx="2">
+            <a:schemeClr val="accent1">
+              <a:shade val="50000"/>
+            </a:schemeClr>
+          </a:lnRef>
+          <a:fillRef idx="1">
+            <a:schemeClr val="accent1"/>
+          </a:fillRef>
+          <a:effectRef idx="0">
+            <a:schemeClr val="accent1"/>
+          </a:effectRef>
+          <a:fontRef idx="minor">
+            <a:schemeClr val="lt1"/>
+          </a:fontRef>
+        </p:style>
+        <p:txBody>
+          <a:bodyPr rtlCol="0" anchor="ctr"/>
+          <a:lstStyle/>
+          <a:p>
+            <a:pPr algn="ctr"/>
+            <a:r>
+              <a:rPr kumimoji="1" lang="zh-CN" altLang="en-US" sz="1100" dirty="0">
+                <a:solidFill>
+                  <a:schemeClr val="tx1"/>
+                </a:solidFill>
+              </a:rPr>
+              <a:t>服装设计参数重表示</a:t>
+            </a:r>
+          </a:p>
+        </p:txBody>
+      </p:sp>
+      <p:sp>
+        <p:nvSpPr>
+          <p:cNvPr id="47" name="矩形 46">
+            <a:extLst>
+              <a:ext uri="{FF2B5EF4-FFF2-40B4-BE49-F238E27FC236}">
+                <a16:creationId xmlns:a16="http://schemas.microsoft.com/office/drawing/2014/main" id="{5AD9FF3D-7151-544F-A5F6-33508FBBABF4}"/>
+              </a:ext>
+            </a:extLst>
+          </p:cNvPr>
+          <p:cNvSpPr/>
+          <p:nvPr/>
+        </p:nvSpPr>
+        <p:spPr>
+          <a:xfrm>
+            <a:off x="6122394" y="4373111"/>
+            <a:ext cx="3090107" cy="288300"/>
+          </a:xfrm>
+          <a:prstGeom prst="rect">
+            <a:avLst/>
+          </a:prstGeom>
+          <a:noFill/>
+          <a:ln>
+            <a:solidFill>
+              <a:schemeClr val="tx1"/>
+            </a:solidFill>
+            <a:prstDash val="solid"/>
+          </a:ln>
+        </p:spPr>
+        <p:style>
+          <a:lnRef idx="2">
+            <a:schemeClr val="accent1">
+              <a:shade val="50000"/>
+            </a:schemeClr>
+          </a:lnRef>
+          <a:fillRef idx="1">
+            <a:schemeClr val="accent1"/>
+          </a:fillRef>
+          <a:effectRef idx="0">
+            <a:schemeClr val="accent1"/>
+          </a:effectRef>
+          <a:fontRef idx="minor">
+            <a:schemeClr val="lt1"/>
+          </a:fontRef>
+        </p:style>
+        <p:txBody>
+          <a:bodyPr rtlCol="0" anchor="ctr"/>
+          <a:lstStyle/>
+          <a:p>
+            <a:pPr algn="ctr"/>
+            <a:r>
+              <a:rPr kumimoji="1" lang="zh-CN" altLang="en-US" sz="1100" dirty="0">
+                <a:solidFill>
+                  <a:schemeClr val="tx1"/>
+                </a:solidFill>
+              </a:rPr>
+              <a:t>几何先验驱动多模态推理</a:t>
+            </a:r>
+          </a:p>
+        </p:txBody>
+      </p:sp>
+      <p:sp>
+        <p:nvSpPr>
+          <p:cNvPr id="48" name="矩形 47">
+            <a:extLst>
+              <a:ext uri="{FF2B5EF4-FFF2-40B4-BE49-F238E27FC236}">
+                <a16:creationId xmlns:a16="http://schemas.microsoft.com/office/drawing/2014/main" id="{03804F8B-075A-9440-AC49-21C41680CC31}"/>
+              </a:ext>
+            </a:extLst>
+          </p:cNvPr>
+          <p:cNvSpPr/>
+          <p:nvPr/>
+        </p:nvSpPr>
+        <p:spPr>
+          <a:xfrm>
+            <a:off x="2508436" y="5544135"/>
+            <a:ext cx="6764913" cy="363849"/>
+          </a:xfrm>
+          <a:prstGeom prst="rect">
+            <a:avLst/>
+          </a:prstGeom>
+          <a:solidFill>
+            <a:schemeClr val="accent5">
+              <a:lumMod val="50000"/>
+            </a:schemeClr>
+          </a:solidFill>
+        </p:spPr>
+        <p:style>
+          <a:lnRef idx="2">
+            <a:schemeClr val="accent1">
+              <a:shade val="50000"/>
+            </a:schemeClr>
+          </a:lnRef>
+          <a:fillRef idx="1">
+            <a:schemeClr val="accent1"/>
+          </a:fillRef>
+          <a:effectRef idx="0">
+            <a:schemeClr val="accent1"/>
+          </a:effectRef>
+          <a:fontRef idx="minor">
+            <a:schemeClr val="lt1"/>
+          </a:fontRef>
+        </p:style>
+        <p:txBody>
+          <a:bodyPr rtlCol="0" anchor="ctr"/>
+          <a:lstStyle/>
+          <a:p>
+            <a:pPr algn="ctr"/>
+            <a:r>
+              <a:rPr kumimoji="1" lang="zh-CN" altLang="en-US" sz="1400" dirty="0"/>
+              <a:t>构建高保真、可驱动的虚拟数字人体化身</a:t>
+            </a:r>
+          </a:p>
+        </p:txBody>
+      </p:sp>
+      <p:sp>
+        <p:nvSpPr>
+          <p:cNvPr id="49" name="下箭头 48">
+            <a:extLst>
+              <a:ext uri="{FF2B5EF4-FFF2-40B4-BE49-F238E27FC236}">
+                <a16:creationId xmlns:a16="http://schemas.microsoft.com/office/drawing/2014/main" id="{CB99CAA4-603A-604D-BBEB-7494B44D7157}"/>
+              </a:ext>
+            </a:extLst>
+          </p:cNvPr>
+          <p:cNvSpPr/>
+          <p:nvPr/>
+        </p:nvSpPr>
+        <p:spPr>
+          <a:xfrm>
+            <a:off x="3954342" y="4750926"/>
+            <a:ext cx="259553" cy="180790"/>
+          </a:xfrm>
+          <a:prstGeom prst="downArrow">
+            <a:avLst/>
+          </a:prstGeom>
+          <a:solidFill>
+            <a:srgbClr val="0070C0"/>
+          </a:solidFill>
+        </p:spPr>
+        <p:style>
+          <a:lnRef idx="2">
+            <a:schemeClr val="accent1">
+              <a:shade val="50000"/>
+            </a:schemeClr>
+          </a:lnRef>
+          <a:fillRef idx="1">
+            <a:schemeClr val="accent1"/>
+          </a:fillRef>
+          <a:effectRef idx="0">
+            <a:schemeClr val="accent1"/>
+          </a:effectRef>
+          <a:fontRef idx="minor">
+            <a:schemeClr val="lt1"/>
+          </a:fontRef>
+        </p:style>
+        <p:txBody>
+          <a:bodyPr rtlCol="0" anchor="ctr"/>
+          <a:lstStyle/>
+          <a:p>
+            <a:pPr algn="ctr"/>
+            <a:endParaRPr kumimoji="1" lang="zh-CN" altLang="en-US"/>
+          </a:p>
+        </p:txBody>
+      </p:sp>
+      <p:sp>
+        <p:nvSpPr>
+          <p:cNvPr id="50" name="下箭头 49">
+            <a:extLst>
+              <a:ext uri="{FF2B5EF4-FFF2-40B4-BE49-F238E27FC236}">
+                <a16:creationId xmlns:a16="http://schemas.microsoft.com/office/drawing/2014/main" id="{9ACFCC82-2543-ED46-9198-5CD1B6ED7CD4}"/>
+              </a:ext>
+            </a:extLst>
+          </p:cNvPr>
+          <p:cNvSpPr/>
+          <p:nvPr/>
+        </p:nvSpPr>
+        <p:spPr>
+          <a:xfrm>
+            <a:off x="7589088" y="4754254"/>
+            <a:ext cx="259553" cy="180790"/>
+          </a:xfrm>
+          <a:prstGeom prst="downArrow">
+            <a:avLst/>
+          </a:prstGeom>
+          <a:solidFill>
+            <a:srgbClr val="0070C0"/>
+          </a:solidFill>
+        </p:spPr>
+        <p:style>
+          <a:lnRef idx="2">
+            <a:schemeClr val="accent1">
+              <a:shade val="50000"/>
+            </a:schemeClr>
+          </a:lnRef>
+          <a:fillRef idx="1">
+            <a:schemeClr val="accent1"/>
+          </a:fillRef>
+          <a:effectRef idx="0">
+            <a:schemeClr val="accent1"/>
+          </a:effectRef>
+          <a:fontRef idx="minor">
+            <a:schemeClr val="lt1"/>
+          </a:fontRef>
+        </p:style>
+        <p:txBody>
+          <a:bodyPr rtlCol="0" anchor="ctr"/>
+          <a:lstStyle/>
+          <a:p>
+            <a:pPr algn="ctr"/>
+            <a:endParaRPr kumimoji="1" lang="zh-CN" altLang="en-US"/>
+          </a:p>
+        </p:txBody>
+      </p:sp>
+      <p:sp>
+        <p:nvSpPr>
+          <p:cNvPr id="51" name="下箭头 50">
+            <a:extLst>
+              <a:ext uri="{FF2B5EF4-FFF2-40B4-BE49-F238E27FC236}">
+                <a16:creationId xmlns:a16="http://schemas.microsoft.com/office/drawing/2014/main" id="{D2DBD368-CF9A-2A40-9C72-9C7428E2A52E}"/>
+              </a:ext>
+            </a:extLst>
+          </p:cNvPr>
+          <p:cNvSpPr/>
+          <p:nvPr/>
+        </p:nvSpPr>
+        <p:spPr>
+          <a:xfrm>
+            <a:off x="7589088" y="5334845"/>
+            <a:ext cx="259553" cy="180790"/>
+          </a:xfrm>
+          <a:prstGeom prst="downArrow">
+            <a:avLst/>
+          </a:prstGeom>
+          <a:solidFill>
+            <a:srgbClr val="0070C0"/>
+          </a:solidFill>
+        </p:spPr>
+        <p:style>
+          <a:lnRef idx="2">
+            <a:schemeClr val="accent1">
+              <a:shade val="50000"/>
+            </a:schemeClr>
+          </a:lnRef>
+          <a:fillRef idx="1">
+            <a:schemeClr val="accent1"/>
+          </a:fillRef>
+          <a:effectRef idx="0">
+            <a:schemeClr val="accent1"/>
+          </a:effectRef>
+          <a:fontRef idx="minor">
+            <a:schemeClr val="lt1"/>
+          </a:fontRef>
+        </p:style>
+        <p:txBody>
+          <a:bodyPr rtlCol="0" anchor="ctr"/>
+          <a:lstStyle/>
+          <a:p>
+            <a:pPr algn="ctr"/>
+            <a:endParaRPr kumimoji="1" lang="zh-CN" altLang="en-US"/>
+          </a:p>
+        </p:txBody>
+      </p:sp>
+      <p:sp>
+        <p:nvSpPr>
+          <p:cNvPr id="52" name="下箭头 51">
+            <a:extLst>
+              <a:ext uri="{FF2B5EF4-FFF2-40B4-BE49-F238E27FC236}">
+                <a16:creationId xmlns:a16="http://schemas.microsoft.com/office/drawing/2014/main" id="{A5C10013-B906-AC45-8FC9-739175F77079}"/>
+              </a:ext>
+            </a:extLst>
+          </p:cNvPr>
+          <p:cNvSpPr/>
+          <p:nvPr/>
+        </p:nvSpPr>
+        <p:spPr>
+          <a:xfrm>
+            <a:off x="3954341" y="5347067"/>
+            <a:ext cx="259553" cy="180790"/>
+          </a:xfrm>
+          <a:prstGeom prst="downArrow">
+            <a:avLst/>
+          </a:prstGeom>
+          <a:solidFill>
+            <a:srgbClr val="0070C0"/>
+          </a:solidFill>
+        </p:spPr>
+        <p:style>
+          <a:lnRef idx="2">
+            <a:schemeClr val="accent1">
+              <a:shade val="50000"/>
+            </a:schemeClr>
+          </a:lnRef>
+          <a:fillRef idx="1">
+            <a:schemeClr val="accent1"/>
+          </a:fillRef>
+          <a:effectRef idx="0">
+            <a:schemeClr val="accent1"/>
+          </a:effectRef>
+          <a:fontRef idx="minor">
+            <a:schemeClr val="lt1"/>
+          </a:fontRef>
+        </p:style>
+        <p:txBody>
+          <a:bodyPr rtlCol="0" anchor="ctr"/>
+          <a:lstStyle/>
+          <a:p>
+            <a:pPr algn="ctr"/>
+            <a:endParaRPr kumimoji="1" lang="zh-CN" altLang="en-US"/>
           </a:p>
         </p:txBody>
       </p:sp>

--- a/main/chapter1/figures/chapter1.pptx
+++ b/main/chapter1/figures/chapter1.pptx
@@ -259,7 +259,7 @@
           <a:p>
             <a:fld id="{C4469FB2-7BD2-D646-BFBD-5C1D555F6E84}" type="datetimeFigureOut">
               <a:rPr kumimoji="1" lang="zh-CN" altLang="en-US" smtClean="0"/>
-              <a:t>2026/3/8</a:t>
+              <a:t>2026/3/29</a:t>
             </a:fld>
             <a:endParaRPr kumimoji="1" lang="zh-CN" altLang="en-US"/>
           </a:p>
@@ -457,7 +457,7 @@
           <a:p>
             <a:fld id="{C4469FB2-7BD2-D646-BFBD-5C1D555F6E84}" type="datetimeFigureOut">
               <a:rPr kumimoji="1" lang="zh-CN" altLang="en-US" smtClean="0"/>
-              <a:t>2026/3/8</a:t>
+              <a:t>2026/3/29</a:t>
             </a:fld>
             <a:endParaRPr kumimoji="1" lang="zh-CN" altLang="en-US"/>
           </a:p>
@@ -665,7 +665,7 @@
           <a:p>
             <a:fld id="{C4469FB2-7BD2-D646-BFBD-5C1D555F6E84}" type="datetimeFigureOut">
               <a:rPr kumimoji="1" lang="zh-CN" altLang="en-US" smtClean="0"/>
-              <a:t>2026/3/8</a:t>
+              <a:t>2026/3/29</a:t>
             </a:fld>
             <a:endParaRPr kumimoji="1" lang="zh-CN" altLang="en-US"/>
           </a:p>
@@ -863,7 +863,7 @@
           <a:p>
             <a:fld id="{C4469FB2-7BD2-D646-BFBD-5C1D555F6E84}" type="datetimeFigureOut">
               <a:rPr kumimoji="1" lang="zh-CN" altLang="en-US" smtClean="0"/>
-              <a:t>2026/3/8</a:t>
+              <a:t>2026/3/29</a:t>
             </a:fld>
             <a:endParaRPr kumimoji="1" lang="zh-CN" altLang="en-US"/>
           </a:p>
@@ -1138,7 +1138,7 @@
           <a:p>
             <a:fld id="{C4469FB2-7BD2-D646-BFBD-5C1D555F6E84}" type="datetimeFigureOut">
               <a:rPr kumimoji="1" lang="zh-CN" altLang="en-US" smtClean="0"/>
-              <a:t>2026/3/8</a:t>
+              <a:t>2026/3/29</a:t>
             </a:fld>
             <a:endParaRPr kumimoji="1" lang="zh-CN" altLang="en-US"/>
           </a:p>
@@ -1403,7 +1403,7 @@
           <a:p>
             <a:fld id="{C4469FB2-7BD2-D646-BFBD-5C1D555F6E84}" type="datetimeFigureOut">
               <a:rPr kumimoji="1" lang="zh-CN" altLang="en-US" smtClean="0"/>
-              <a:t>2026/3/8</a:t>
+              <a:t>2026/3/29</a:t>
             </a:fld>
             <a:endParaRPr kumimoji="1" lang="zh-CN" altLang="en-US"/>
           </a:p>
@@ -1815,7 +1815,7 @@
           <a:p>
             <a:fld id="{C4469FB2-7BD2-D646-BFBD-5C1D555F6E84}" type="datetimeFigureOut">
               <a:rPr kumimoji="1" lang="zh-CN" altLang="en-US" smtClean="0"/>
-              <a:t>2026/3/8</a:t>
+              <a:t>2026/3/29</a:t>
             </a:fld>
             <a:endParaRPr kumimoji="1" lang="zh-CN" altLang="en-US"/>
           </a:p>
@@ -1956,7 +1956,7 @@
           <a:p>
             <a:fld id="{C4469FB2-7BD2-D646-BFBD-5C1D555F6E84}" type="datetimeFigureOut">
               <a:rPr kumimoji="1" lang="zh-CN" altLang="en-US" smtClean="0"/>
-              <a:t>2026/3/8</a:t>
+              <a:t>2026/3/29</a:t>
             </a:fld>
             <a:endParaRPr kumimoji="1" lang="zh-CN" altLang="en-US"/>
           </a:p>
@@ -2069,7 +2069,7 @@
           <a:p>
             <a:fld id="{C4469FB2-7BD2-D646-BFBD-5C1D555F6E84}" type="datetimeFigureOut">
               <a:rPr kumimoji="1" lang="zh-CN" altLang="en-US" smtClean="0"/>
-              <a:t>2026/3/8</a:t>
+              <a:t>2026/3/29</a:t>
             </a:fld>
             <a:endParaRPr kumimoji="1" lang="zh-CN" altLang="en-US"/>
           </a:p>
@@ -2380,7 +2380,7 @@
           <a:p>
             <a:fld id="{C4469FB2-7BD2-D646-BFBD-5C1D555F6E84}" type="datetimeFigureOut">
               <a:rPr kumimoji="1" lang="zh-CN" altLang="en-US" smtClean="0"/>
-              <a:t>2026/3/8</a:t>
+              <a:t>2026/3/29</a:t>
             </a:fld>
             <a:endParaRPr kumimoji="1" lang="zh-CN" altLang="en-US"/>
           </a:p>
@@ -2668,7 +2668,7 @@
           <a:p>
             <a:fld id="{C4469FB2-7BD2-D646-BFBD-5C1D555F6E84}" type="datetimeFigureOut">
               <a:rPr kumimoji="1" lang="zh-CN" altLang="en-US" smtClean="0"/>
-              <a:t>2026/3/8</a:t>
+              <a:t>2026/3/29</a:t>
             </a:fld>
             <a:endParaRPr kumimoji="1" lang="zh-CN" altLang="en-US"/>
           </a:p>
@@ -2909,7 +2909,7 @@
           <a:p>
             <a:fld id="{C4469FB2-7BD2-D646-BFBD-5C1D555F6E84}" type="datetimeFigureOut">
               <a:rPr kumimoji="1" lang="zh-CN" altLang="en-US" smtClean="0"/>
-              <a:t>2026/3/8</a:t>
+              <a:t>2026/3/29</a:t>
             </a:fld>
             <a:endParaRPr kumimoji="1" lang="zh-CN" altLang="en-US"/>
           </a:p>
@@ -3375,7 +3375,7 @@
             <a:pPr algn="ctr"/>
             <a:r>
               <a:rPr kumimoji="1" lang="zh-CN" altLang="en-US" dirty="0"/>
-              <a:t>基于几何先验的三维人体与服装重建研究</a:t>
+              <a:t>基于几何先验的三维人体重建与服装生成方法研究</a:t>
             </a:r>
           </a:p>
         </p:txBody>
@@ -3396,683 +3396,6 @@
           <a:xfrm>
             <a:off x="2516627" y="1308076"/>
             <a:ext cx="3349379" cy="956116"/>
-          </a:xfrm>
-          <a:prstGeom prst="rect">
-            <a:avLst/>
-          </a:prstGeom>
-          <a:noFill/>
-          <a:ln>
-            <a:solidFill>
-              <a:schemeClr val="tx1"/>
-            </a:solidFill>
-            <a:prstDash val="lgDash"/>
-          </a:ln>
-        </p:spPr>
-        <p:style>
-          <a:lnRef idx="2">
-            <a:schemeClr val="accent1">
-              <a:shade val="50000"/>
-            </a:schemeClr>
-          </a:lnRef>
-          <a:fillRef idx="1">
-            <a:schemeClr val="accent1"/>
-          </a:fillRef>
-          <a:effectRef idx="0">
-            <a:schemeClr val="accent1"/>
-          </a:effectRef>
-          <a:fontRef idx="minor">
-            <a:schemeClr val="lt1"/>
-          </a:fontRef>
-        </p:style>
-        <p:txBody>
-          <a:bodyPr rtlCol="0" anchor="ctr"/>
-          <a:lstStyle/>
-          <a:p>
-            <a:pPr algn="ctr"/>
-            <a:endParaRPr kumimoji="1" lang="zh-CN" altLang="en-US"/>
-          </a:p>
-        </p:txBody>
-      </p:sp>
-      <p:sp>
-        <p:nvSpPr>
-          <p:cNvPr id="6" name="文本框 5">
-            <a:extLst>
-              <a:ext uri="{FF2B5EF4-FFF2-40B4-BE49-F238E27FC236}">
-                <a16:creationId xmlns:a16="http://schemas.microsoft.com/office/drawing/2014/main" id="{A84BE2BC-AAC4-3A49-B74B-0D1D2E7379DA}"/>
-              </a:ext>
-            </a:extLst>
-          </p:cNvPr>
-          <p:cNvSpPr txBox="1"/>
-          <p:nvPr/>
-        </p:nvSpPr>
-        <p:spPr>
-          <a:xfrm>
-            <a:off x="1895852" y="1550036"/>
-            <a:ext cx="543739" cy="523220"/>
-          </a:xfrm>
-          <a:prstGeom prst="rect">
-            <a:avLst/>
-          </a:prstGeom>
-          <a:noFill/>
-        </p:spPr>
-        <p:txBody>
-          <a:bodyPr wrap="none" rtlCol="0">
-            <a:spAutoFit/>
-          </a:bodyPr>
-          <a:lstStyle/>
-          <a:p>
-            <a:r>
-              <a:rPr kumimoji="1" lang="zh-CN" altLang="en-US" sz="1400" dirty="0">
-                <a:solidFill>
-                  <a:srgbClr val="002060"/>
-                </a:solidFill>
-              </a:rPr>
-              <a:t>问题</a:t>
-            </a:r>
-            <a:endParaRPr kumimoji="1" lang="en-US" altLang="zh-CN" sz="1400" dirty="0">
-              <a:solidFill>
-                <a:srgbClr val="002060"/>
-              </a:solidFill>
-            </a:endParaRPr>
-          </a:p>
-          <a:p>
-            <a:r>
-              <a:rPr kumimoji="1" lang="zh-CN" altLang="en-US" sz="1400" dirty="0">
-                <a:solidFill>
-                  <a:srgbClr val="002060"/>
-                </a:solidFill>
-              </a:rPr>
-              <a:t>挑战</a:t>
-            </a:r>
-          </a:p>
-        </p:txBody>
-      </p:sp>
-      <p:sp>
-        <p:nvSpPr>
-          <p:cNvPr id="13" name="矩形 12">
-            <a:extLst>
-              <a:ext uri="{FF2B5EF4-FFF2-40B4-BE49-F238E27FC236}">
-                <a16:creationId xmlns:a16="http://schemas.microsoft.com/office/drawing/2014/main" id="{6298392B-9571-374C-AD46-ED0709A7F7A2}"/>
-              </a:ext>
-            </a:extLst>
-          </p:cNvPr>
-          <p:cNvSpPr/>
-          <p:nvPr/>
-        </p:nvSpPr>
-        <p:spPr>
-          <a:xfrm>
-            <a:off x="2516626" y="1308075"/>
-            <a:ext cx="3349379" cy="363849"/>
-          </a:xfrm>
-          <a:prstGeom prst="rect">
-            <a:avLst/>
-          </a:prstGeom>
-          <a:solidFill>
-            <a:schemeClr val="accent5">
-              <a:lumMod val="50000"/>
-            </a:schemeClr>
-          </a:solidFill>
-        </p:spPr>
-        <p:style>
-          <a:lnRef idx="2">
-            <a:schemeClr val="accent1">
-              <a:shade val="50000"/>
-            </a:schemeClr>
-          </a:lnRef>
-          <a:fillRef idx="1">
-            <a:schemeClr val="accent1"/>
-          </a:fillRef>
-          <a:effectRef idx="0">
-            <a:schemeClr val="accent1"/>
-          </a:effectRef>
-          <a:fontRef idx="minor">
-            <a:schemeClr val="lt1"/>
-          </a:fontRef>
-        </p:style>
-        <p:txBody>
-          <a:bodyPr rtlCol="0" anchor="ctr"/>
-          <a:lstStyle/>
-          <a:p>
-            <a:pPr algn="ctr"/>
-            <a:r>
-              <a:rPr kumimoji="1" lang="zh-CN" altLang="en-US" sz="1400" dirty="0"/>
-              <a:t>高斯属性与网格拓扑解耦</a:t>
-            </a:r>
-          </a:p>
-        </p:txBody>
-      </p:sp>
-      <p:sp>
-        <p:nvSpPr>
-          <p:cNvPr id="15" name="文本框 14">
-            <a:extLst>
-              <a:ext uri="{FF2B5EF4-FFF2-40B4-BE49-F238E27FC236}">
-                <a16:creationId xmlns:a16="http://schemas.microsoft.com/office/drawing/2014/main" id="{BCB89BCB-96A7-F043-80A7-601B497E868C}"/>
-              </a:ext>
-            </a:extLst>
-          </p:cNvPr>
-          <p:cNvSpPr txBox="1"/>
-          <p:nvPr/>
-        </p:nvSpPr>
-        <p:spPr>
-          <a:xfrm>
-            <a:off x="2623359" y="1708074"/>
-            <a:ext cx="3160410" cy="461665"/>
-          </a:xfrm>
-          <a:prstGeom prst="rect">
-            <a:avLst/>
-          </a:prstGeom>
-          <a:noFill/>
-        </p:spPr>
-        <p:txBody>
-          <a:bodyPr wrap="square">
-            <a:spAutoFit/>
-          </a:bodyPr>
-          <a:lstStyle/>
-          <a:p>
-            <a:r>
-              <a:rPr lang="zh-CN" altLang="en-US" sz="1200" dirty="0"/>
-              <a:t>现有3DGS人体方法中高斯为无约束优化，与底层网格拓扑无关联，导致</a:t>
-            </a:r>
-            <a:r>
-              <a:rPr lang="zh-CN" altLang="en-US" sz="1200" b="1" dirty="0"/>
-              <a:t>驱动泛化性差</a:t>
-            </a:r>
-          </a:p>
-        </p:txBody>
-      </p:sp>
-      <p:sp>
-        <p:nvSpPr>
-          <p:cNvPr id="16" name="矩形 15">
-            <a:extLst>
-              <a:ext uri="{FF2B5EF4-FFF2-40B4-BE49-F238E27FC236}">
-                <a16:creationId xmlns:a16="http://schemas.microsoft.com/office/drawing/2014/main" id="{5157DD94-4954-BF43-B48A-41C650F63B56}"/>
-              </a:ext>
-            </a:extLst>
-          </p:cNvPr>
-          <p:cNvSpPr/>
-          <p:nvPr/>
-        </p:nvSpPr>
-        <p:spPr>
-          <a:xfrm>
-            <a:off x="5988517" y="1310126"/>
-            <a:ext cx="3284834" cy="956116"/>
-          </a:xfrm>
-          <a:prstGeom prst="rect">
-            <a:avLst/>
-          </a:prstGeom>
-          <a:noFill/>
-          <a:ln>
-            <a:solidFill>
-              <a:schemeClr val="tx1"/>
-            </a:solidFill>
-            <a:prstDash val="lgDash"/>
-          </a:ln>
-        </p:spPr>
-        <p:style>
-          <a:lnRef idx="2">
-            <a:schemeClr val="accent1">
-              <a:shade val="50000"/>
-            </a:schemeClr>
-          </a:lnRef>
-          <a:fillRef idx="1">
-            <a:schemeClr val="accent1"/>
-          </a:fillRef>
-          <a:effectRef idx="0">
-            <a:schemeClr val="accent1"/>
-          </a:effectRef>
-          <a:fontRef idx="minor">
-            <a:schemeClr val="lt1"/>
-          </a:fontRef>
-        </p:style>
-        <p:txBody>
-          <a:bodyPr rtlCol="0" anchor="ctr"/>
-          <a:lstStyle/>
-          <a:p>
-            <a:pPr algn="ctr"/>
-            <a:endParaRPr kumimoji="1" lang="zh-CN" altLang="en-US"/>
-          </a:p>
-        </p:txBody>
-      </p:sp>
-      <p:sp>
-        <p:nvSpPr>
-          <p:cNvPr id="17" name="矩形 16">
-            <a:extLst>
-              <a:ext uri="{FF2B5EF4-FFF2-40B4-BE49-F238E27FC236}">
-                <a16:creationId xmlns:a16="http://schemas.microsoft.com/office/drawing/2014/main" id="{C4A406CE-C199-8146-9772-97C416362250}"/>
-              </a:ext>
-            </a:extLst>
-          </p:cNvPr>
-          <p:cNvSpPr/>
-          <p:nvPr/>
-        </p:nvSpPr>
-        <p:spPr>
-          <a:xfrm>
-            <a:off x="5988516" y="1308075"/>
-            <a:ext cx="3284833" cy="363849"/>
-          </a:xfrm>
-          <a:prstGeom prst="rect">
-            <a:avLst/>
-          </a:prstGeom>
-          <a:solidFill>
-            <a:schemeClr val="accent5">
-              <a:lumMod val="50000"/>
-            </a:schemeClr>
-          </a:solidFill>
-        </p:spPr>
-        <p:style>
-          <a:lnRef idx="2">
-            <a:schemeClr val="accent1">
-              <a:shade val="50000"/>
-            </a:schemeClr>
-          </a:lnRef>
-          <a:fillRef idx="1">
-            <a:schemeClr val="accent1"/>
-          </a:fillRef>
-          <a:effectRef idx="0">
-            <a:schemeClr val="accent1"/>
-          </a:effectRef>
-          <a:fontRef idx="minor">
-            <a:schemeClr val="lt1"/>
-          </a:fontRef>
-        </p:style>
-        <p:txBody>
-          <a:bodyPr rtlCol="0" anchor="ctr"/>
-          <a:lstStyle/>
-          <a:p>
-            <a:pPr algn="ctr"/>
-            <a:r>
-              <a:rPr kumimoji="1" lang="zh-CN" altLang="en-US" sz="1400" dirty="0"/>
-              <a:t>服装参数生成缺乏人体几何感知</a:t>
-            </a:r>
-          </a:p>
-        </p:txBody>
-      </p:sp>
-      <p:sp>
-        <p:nvSpPr>
-          <p:cNvPr id="18" name="文本框 17">
-            <a:extLst>
-              <a:ext uri="{FF2B5EF4-FFF2-40B4-BE49-F238E27FC236}">
-                <a16:creationId xmlns:a16="http://schemas.microsoft.com/office/drawing/2014/main" id="{FC18C682-CA5B-3E4E-8FBB-9B3D8D8A8FDF}"/>
-              </a:ext>
-            </a:extLst>
-          </p:cNvPr>
-          <p:cNvSpPr txBox="1"/>
-          <p:nvPr/>
-        </p:nvSpPr>
-        <p:spPr>
-          <a:xfrm>
-            <a:off x="5973424" y="1751178"/>
-            <a:ext cx="3235470" cy="461665"/>
-          </a:xfrm>
-          <a:prstGeom prst="rect">
-            <a:avLst/>
-          </a:prstGeom>
-          <a:noFill/>
-        </p:spPr>
-        <p:txBody>
-          <a:bodyPr wrap="square">
-            <a:spAutoFit/>
-          </a:bodyPr>
-          <a:lstStyle/>
-          <a:p>
-            <a:r>
-              <a:rPr lang="zh-CN" altLang="en-US" sz="1200" dirty="0"/>
-              <a:t>现有方法仅凭图像预测服装参数，缺乏穿着者的显式几何约束，重建</a:t>
-            </a:r>
-            <a:r>
-              <a:rPr lang="zh-CN" altLang="en-US" sz="1200" b="1" dirty="0"/>
-              <a:t>服装几何保真度不足</a:t>
-            </a:r>
-          </a:p>
-        </p:txBody>
-      </p:sp>
-      <p:sp>
-        <p:nvSpPr>
-          <p:cNvPr id="21" name="文本框 20">
-            <a:extLst>
-              <a:ext uri="{FF2B5EF4-FFF2-40B4-BE49-F238E27FC236}">
-                <a16:creationId xmlns:a16="http://schemas.microsoft.com/office/drawing/2014/main" id="{D6F2C1C8-152A-4A4B-975E-0B0A305CDE75}"/>
-              </a:ext>
-            </a:extLst>
-          </p:cNvPr>
-          <p:cNvSpPr txBox="1"/>
-          <p:nvPr/>
-        </p:nvSpPr>
-        <p:spPr>
-          <a:xfrm>
-            <a:off x="1916793" y="2519175"/>
-            <a:ext cx="646331" cy="523220"/>
-          </a:xfrm>
-          <a:prstGeom prst="rect">
-            <a:avLst/>
-          </a:prstGeom>
-          <a:noFill/>
-        </p:spPr>
-        <p:txBody>
-          <a:bodyPr wrap="square" rtlCol="0">
-            <a:spAutoFit/>
-          </a:bodyPr>
-          <a:lstStyle/>
-          <a:p>
-            <a:r>
-              <a:rPr kumimoji="1" lang="zh-CN" altLang="en-US" sz="1400" dirty="0">
-                <a:solidFill>
-                  <a:srgbClr val="002060"/>
-                </a:solidFill>
-              </a:rPr>
-              <a:t>研究思路</a:t>
-            </a:r>
-          </a:p>
-        </p:txBody>
-      </p:sp>
-      <p:sp>
-        <p:nvSpPr>
-          <p:cNvPr id="22" name="文本框 21">
-            <a:extLst>
-              <a:ext uri="{FF2B5EF4-FFF2-40B4-BE49-F238E27FC236}">
-                <a16:creationId xmlns:a16="http://schemas.microsoft.com/office/drawing/2014/main" id="{AB436BA9-BD19-0D44-94E4-6CABAD57EF37}"/>
-              </a:ext>
-            </a:extLst>
-          </p:cNvPr>
-          <p:cNvSpPr txBox="1"/>
-          <p:nvPr/>
-        </p:nvSpPr>
-        <p:spPr>
-          <a:xfrm>
-            <a:off x="1878721" y="3746950"/>
-            <a:ext cx="646331" cy="523220"/>
-          </a:xfrm>
-          <a:prstGeom prst="rect">
-            <a:avLst/>
-          </a:prstGeom>
-          <a:noFill/>
-        </p:spPr>
-        <p:txBody>
-          <a:bodyPr wrap="square" rtlCol="0">
-            <a:spAutoFit/>
-          </a:bodyPr>
-          <a:lstStyle/>
-          <a:p>
-            <a:r>
-              <a:rPr kumimoji="1" lang="zh-CN" altLang="en-US" sz="1400" dirty="0">
-                <a:solidFill>
-                  <a:srgbClr val="002060"/>
-                </a:solidFill>
-              </a:rPr>
-              <a:t>研究内容</a:t>
-            </a:r>
-          </a:p>
-        </p:txBody>
-      </p:sp>
-      <p:sp>
-        <p:nvSpPr>
-          <p:cNvPr id="23" name="文本框 22">
-            <a:extLst>
-              <a:ext uri="{FF2B5EF4-FFF2-40B4-BE49-F238E27FC236}">
-                <a16:creationId xmlns:a16="http://schemas.microsoft.com/office/drawing/2014/main" id="{581880DE-CE26-C944-8830-B479173C0A17}"/>
-              </a:ext>
-            </a:extLst>
-          </p:cNvPr>
-          <p:cNvSpPr txBox="1"/>
-          <p:nvPr/>
-        </p:nvSpPr>
-        <p:spPr>
-          <a:xfrm>
-            <a:off x="1870565" y="4989765"/>
-            <a:ext cx="646331" cy="307777"/>
-          </a:xfrm>
-          <a:prstGeom prst="rect">
-            <a:avLst/>
-          </a:prstGeom>
-          <a:noFill/>
-        </p:spPr>
-        <p:txBody>
-          <a:bodyPr wrap="square" rtlCol="0">
-            <a:spAutoFit/>
-          </a:bodyPr>
-          <a:lstStyle/>
-          <a:p>
-            <a:r>
-              <a:rPr kumimoji="1" lang="zh-CN" altLang="en-US" sz="1400" dirty="0">
-                <a:solidFill>
-                  <a:srgbClr val="002060"/>
-                </a:solidFill>
-              </a:rPr>
-              <a:t>目标</a:t>
-            </a:r>
-          </a:p>
-        </p:txBody>
-      </p:sp>
-      <p:sp>
-        <p:nvSpPr>
-          <p:cNvPr id="24" name="矩形 23">
-            <a:extLst>
-              <a:ext uri="{FF2B5EF4-FFF2-40B4-BE49-F238E27FC236}">
-                <a16:creationId xmlns:a16="http://schemas.microsoft.com/office/drawing/2014/main" id="{989FAB68-41C5-F643-B9EC-D8A9F8D3BF11}"/>
-              </a:ext>
-            </a:extLst>
-          </p:cNvPr>
-          <p:cNvSpPr/>
-          <p:nvPr/>
-        </p:nvSpPr>
-        <p:spPr>
-          <a:xfrm>
-            <a:off x="2487581" y="3223032"/>
-            <a:ext cx="3370234" cy="1500971"/>
-          </a:xfrm>
-          <a:prstGeom prst="rect">
-            <a:avLst/>
-          </a:prstGeom>
-          <a:noFill/>
-          <a:ln>
-            <a:solidFill>
-              <a:schemeClr val="tx1"/>
-            </a:solidFill>
-            <a:prstDash val="lgDash"/>
-          </a:ln>
-        </p:spPr>
-        <p:style>
-          <a:lnRef idx="2">
-            <a:schemeClr val="accent1">
-              <a:shade val="50000"/>
-            </a:schemeClr>
-          </a:lnRef>
-          <a:fillRef idx="1">
-            <a:schemeClr val="accent1"/>
-          </a:fillRef>
-          <a:effectRef idx="0">
-            <a:schemeClr val="accent1"/>
-          </a:effectRef>
-          <a:fontRef idx="minor">
-            <a:schemeClr val="lt1"/>
-          </a:fontRef>
-        </p:style>
-        <p:txBody>
-          <a:bodyPr rtlCol="0" anchor="ctr"/>
-          <a:lstStyle/>
-          <a:p>
-            <a:pPr algn="ctr"/>
-            <a:endParaRPr kumimoji="1" lang="zh-CN" altLang="en-US"/>
-          </a:p>
-        </p:txBody>
-      </p:sp>
-      <p:sp>
-        <p:nvSpPr>
-          <p:cNvPr id="25" name="矩形 24">
-            <a:extLst>
-              <a:ext uri="{FF2B5EF4-FFF2-40B4-BE49-F238E27FC236}">
-                <a16:creationId xmlns:a16="http://schemas.microsoft.com/office/drawing/2014/main" id="{41C3218C-46B2-9E4D-B09A-FCEDD9869CB3}"/>
-              </a:ext>
-            </a:extLst>
-          </p:cNvPr>
-          <p:cNvSpPr/>
-          <p:nvPr/>
-        </p:nvSpPr>
-        <p:spPr>
-          <a:xfrm>
-            <a:off x="2474798" y="3215857"/>
-            <a:ext cx="3387853" cy="363849"/>
-          </a:xfrm>
-          <a:prstGeom prst="rect">
-            <a:avLst/>
-          </a:prstGeom>
-          <a:solidFill>
-            <a:schemeClr val="accent5">
-              <a:lumMod val="50000"/>
-            </a:schemeClr>
-          </a:solidFill>
-        </p:spPr>
-        <p:style>
-          <a:lnRef idx="2">
-            <a:schemeClr val="accent1">
-              <a:shade val="50000"/>
-            </a:schemeClr>
-          </a:lnRef>
-          <a:fillRef idx="1">
-            <a:schemeClr val="accent1"/>
-          </a:fillRef>
-          <a:effectRef idx="0">
-            <a:schemeClr val="accent1"/>
-          </a:effectRef>
-          <a:fontRef idx="minor">
-            <a:schemeClr val="lt1"/>
-          </a:fontRef>
-        </p:style>
-        <p:txBody>
-          <a:bodyPr rtlCol="0" anchor="ctr"/>
-          <a:lstStyle/>
-          <a:p>
-            <a:pPr algn="ctr"/>
-            <a:r>
-              <a:rPr kumimoji="1" lang="zh-CN" altLang="en-US" sz="1400" dirty="0"/>
-              <a:t>基于拓扑感知的三维高斯人体重建</a:t>
-            </a:r>
-          </a:p>
-        </p:txBody>
-      </p:sp>
-      <p:sp>
-        <p:nvSpPr>
-          <p:cNvPr id="27" name="矩形 26">
-            <a:extLst>
-              <a:ext uri="{FF2B5EF4-FFF2-40B4-BE49-F238E27FC236}">
-                <a16:creationId xmlns:a16="http://schemas.microsoft.com/office/drawing/2014/main" id="{B25D0B37-0A39-954A-B868-84049DCAE970}"/>
-              </a:ext>
-            </a:extLst>
-          </p:cNvPr>
-          <p:cNvSpPr/>
-          <p:nvPr/>
-        </p:nvSpPr>
-        <p:spPr>
-          <a:xfrm>
-            <a:off x="6046418" y="3223031"/>
-            <a:ext cx="3223576" cy="1500972"/>
-          </a:xfrm>
-          <a:prstGeom prst="rect">
-            <a:avLst/>
-          </a:prstGeom>
-          <a:noFill/>
-          <a:ln>
-            <a:solidFill>
-              <a:schemeClr val="tx1"/>
-            </a:solidFill>
-            <a:prstDash val="lgDash"/>
-          </a:ln>
-        </p:spPr>
-        <p:style>
-          <a:lnRef idx="2">
-            <a:schemeClr val="accent1">
-              <a:shade val="50000"/>
-            </a:schemeClr>
-          </a:lnRef>
-          <a:fillRef idx="1">
-            <a:schemeClr val="accent1"/>
-          </a:fillRef>
-          <a:effectRef idx="0">
-            <a:schemeClr val="accent1"/>
-          </a:effectRef>
-          <a:fontRef idx="minor">
-            <a:schemeClr val="lt1"/>
-          </a:fontRef>
-        </p:style>
-        <p:txBody>
-          <a:bodyPr rtlCol="0" anchor="ctr"/>
-          <a:lstStyle/>
-          <a:p>
-            <a:pPr algn="ctr"/>
-            <a:endParaRPr kumimoji="1" lang="zh-CN" altLang="en-US"/>
-          </a:p>
-        </p:txBody>
-      </p:sp>
-      <p:sp>
-        <p:nvSpPr>
-          <p:cNvPr id="28" name="矩形 27">
-            <a:extLst>
-              <a:ext uri="{FF2B5EF4-FFF2-40B4-BE49-F238E27FC236}">
-                <a16:creationId xmlns:a16="http://schemas.microsoft.com/office/drawing/2014/main" id="{107A842C-0FEF-9048-ABCF-9BF35EE6971B}"/>
-              </a:ext>
-            </a:extLst>
-          </p:cNvPr>
-          <p:cNvSpPr/>
-          <p:nvPr/>
-        </p:nvSpPr>
-        <p:spPr>
-          <a:xfrm>
-            <a:off x="6046419" y="3220981"/>
-            <a:ext cx="3223576" cy="363849"/>
-          </a:xfrm>
-          <a:prstGeom prst="rect">
-            <a:avLst/>
-          </a:prstGeom>
-          <a:solidFill>
-            <a:schemeClr val="accent5">
-              <a:lumMod val="50000"/>
-            </a:schemeClr>
-          </a:solidFill>
-        </p:spPr>
-        <p:style>
-          <a:lnRef idx="2">
-            <a:schemeClr val="accent1">
-              <a:shade val="50000"/>
-            </a:schemeClr>
-          </a:lnRef>
-          <a:fillRef idx="1">
-            <a:schemeClr val="accent1"/>
-          </a:fillRef>
-          <a:effectRef idx="0">
-            <a:schemeClr val="accent1"/>
-          </a:effectRef>
-          <a:fontRef idx="minor">
-            <a:schemeClr val="lt1"/>
-          </a:fontRef>
-        </p:style>
-        <p:txBody>
-          <a:bodyPr rtlCol="0" anchor="ctr"/>
-          <a:lstStyle/>
-          <a:p>
-            <a:pPr algn="ctr"/>
-            <a:r>
-              <a:rPr kumimoji="1" lang="zh-CN" altLang="en-US" sz="1400" dirty="0"/>
-              <a:t>基于人体几何先验的服装参数生成</a:t>
-            </a:r>
-          </a:p>
-        </p:txBody>
-      </p:sp>
-      <p:sp>
-        <p:nvSpPr>
-          <p:cNvPr id="30" name="矩形 29">
-            <a:extLst>
-              <a:ext uri="{FF2B5EF4-FFF2-40B4-BE49-F238E27FC236}">
-                <a16:creationId xmlns:a16="http://schemas.microsoft.com/office/drawing/2014/main" id="{3623837E-683C-A747-BCD5-B0CFAE970554}"/>
-              </a:ext>
-            </a:extLst>
-          </p:cNvPr>
-          <p:cNvSpPr/>
-          <p:nvPr/>
-        </p:nvSpPr>
-        <p:spPr>
-          <a:xfrm>
-            <a:off x="2599439" y="3980629"/>
-            <a:ext cx="3090107" cy="288300"/>
           </a:xfrm>
           <a:prstGeom prst="rect">
             <a:avLst/>
@@ -4106,23 +3429,70 @@
           <a:lstStyle/>
           <a:p>
             <a:pPr algn="ctr"/>
-            <a:r>
-              <a:rPr kumimoji="1" lang="zh-CN" altLang="en-US" sz="1100" dirty="0">
+            <a:endParaRPr kumimoji="1" lang="zh-CN" altLang="en-US"/>
+          </a:p>
+        </p:txBody>
+      </p:sp>
+      <p:sp>
+        <p:nvSpPr>
+          <p:cNvPr id="6" name="文本框 5">
+            <a:extLst>
+              <a:ext uri="{FF2B5EF4-FFF2-40B4-BE49-F238E27FC236}">
+                <a16:creationId xmlns:a16="http://schemas.microsoft.com/office/drawing/2014/main" id="{A84BE2BC-AAC4-3A49-B74B-0D1D2E7379DA}"/>
+              </a:ext>
+            </a:extLst>
+          </p:cNvPr>
+          <p:cNvSpPr txBox="1"/>
+          <p:nvPr/>
+        </p:nvSpPr>
+        <p:spPr>
+          <a:xfrm>
+            <a:off x="1917699" y="1446464"/>
+            <a:ext cx="543739" cy="523220"/>
+          </a:xfrm>
+          <a:prstGeom prst="rect">
+            <a:avLst/>
+          </a:prstGeom>
+          <a:noFill/>
+        </p:spPr>
+        <p:txBody>
+          <a:bodyPr wrap="square" rtlCol="0">
+            <a:spAutoFit/>
+          </a:bodyPr>
+          <a:lstStyle/>
+          <a:p>
+            <a:r>
+              <a:rPr kumimoji="1" lang="zh-CN" altLang="en-US" sz="1400" dirty="0">
                 <a:solidFill>
-                  <a:schemeClr val="tx1"/>
+                  <a:srgbClr val="002060"/>
                 </a:solidFill>
               </a:rPr>
-              <a:t>解析式三维高斯绑定策略</a:t>
-            </a:r>
-          </a:p>
-        </p:txBody>
-      </p:sp>
-      <p:sp>
-        <p:nvSpPr>
-          <p:cNvPr id="34" name="矩形 33">
-            <a:extLst>
-              <a:ext uri="{FF2B5EF4-FFF2-40B4-BE49-F238E27FC236}">
-                <a16:creationId xmlns:a16="http://schemas.microsoft.com/office/drawing/2014/main" id="{8309BC6A-202D-9146-939E-A6B7B1FEB7C9}"/>
+              <a:t>问题</a:t>
+            </a:r>
+            <a:endParaRPr kumimoji="1" lang="en-US" altLang="zh-CN" sz="1400" dirty="0">
+              <a:solidFill>
+                <a:srgbClr val="002060"/>
+              </a:solidFill>
+            </a:endParaRPr>
+          </a:p>
+          <a:p>
+            <a:r>
+              <a:rPr kumimoji="1" lang="zh-CN" altLang="en-US" sz="1400" dirty="0">
+                <a:solidFill>
+                  <a:srgbClr val="002060"/>
+                </a:solidFill>
+              </a:rPr>
+              <a:t>挑战</a:t>
+            </a:r>
+          </a:p>
+        </p:txBody>
+      </p:sp>
+      <p:sp>
+        <p:nvSpPr>
+          <p:cNvPr id="13" name="矩形 12">
+            <a:extLst>
+              <a:ext uri="{FF2B5EF4-FFF2-40B4-BE49-F238E27FC236}">
+                <a16:creationId xmlns:a16="http://schemas.microsoft.com/office/drawing/2014/main" id="{6298392B-9571-374C-AD46-ED0709A7F7A2}"/>
               </a:ext>
             </a:extLst>
           </p:cNvPr>
@@ -4131,8 +3501,101 @@
         </p:nvSpPr>
         <p:spPr>
           <a:xfrm>
-            <a:off x="2599440" y="4352316"/>
-            <a:ext cx="3090107" cy="288300"/>
+            <a:off x="2516626" y="1308075"/>
+            <a:ext cx="3349379" cy="363849"/>
+          </a:xfrm>
+          <a:prstGeom prst="rect">
+            <a:avLst/>
+          </a:prstGeom>
+          <a:solidFill>
+            <a:schemeClr val="accent5">
+              <a:lumMod val="50000"/>
+            </a:schemeClr>
+          </a:solidFill>
+        </p:spPr>
+        <p:style>
+          <a:lnRef idx="2">
+            <a:schemeClr val="accent1">
+              <a:shade val="50000"/>
+            </a:schemeClr>
+          </a:lnRef>
+          <a:fillRef idx="1">
+            <a:schemeClr val="accent1"/>
+          </a:fillRef>
+          <a:effectRef idx="0">
+            <a:schemeClr val="accent1"/>
+          </a:effectRef>
+          <a:fontRef idx="minor">
+            <a:schemeClr val="lt1"/>
+          </a:fontRef>
+        </p:style>
+        <p:txBody>
+          <a:bodyPr rtlCol="0" anchor="ctr"/>
+          <a:lstStyle/>
+          <a:p>
+            <a:pPr algn="ctr"/>
+            <a:r>
+              <a:rPr kumimoji="1" lang="zh-CN" altLang="en-US" sz="1400" dirty="0"/>
+              <a:t>人体驱动时存在几何不一致性</a:t>
+            </a:r>
+          </a:p>
+        </p:txBody>
+      </p:sp>
+      <p:sp>
+        <p:nvSpPr>
+          <p:cNvPr id="15" name="文本框 14">
+            <a:extLst>
+              <a:ext uri="{FF2B5EF4-FFF2-40B4-BE49-F238E27FC236}">
+                <a16:creationId xmlns:a16="http://schemas.microsoft.com/office/drawing/2014/main" id="{BCB89BCB-96A7-F043-80A7-601B497E868C}"/>
+              </a:ext>
+            </a:extLst>
+          </p:cNvPr>
+          <p:cNvSpPr txBox="1"/>
+          <p:nvPr/>
+        </p:nvSpPr>
+        <p:spPr>
+          <a:xfrm>
+            <a:off x="2605322" y="1725146"/>
+            <a:ext cx="3160410" cy="461665"/>
+          </a:xfrm>
+          <a:prstGeom prst="rect">
+            <a:avLst/>
+          </a:prstGeom>
+          <a:noFill/>
+        </p:spPr>
+        <p:txBody>
+          <a:bodyPr wrap="square">
+            <a:spAutoFit/>
+          </a:bodyPr>
+          <a:lstStyle/>
+          <a:p>
+            <a:r>
+              <a:rPr lang="zh-CN" altLang="en-US" sz="1200" dirty="0"/>
+              <a:t>现有3DGS人体方法中高斯为无约束优化，与底层网格拓扑无关联，导致</a:t>
+            </a:r>
+            <a:r>
+              <a:rPr lang="zh-CN" altLang="en-US" sz="1200" b="1" dirty="0"/>
+              <a:t>驱动泛化性差</a:t>
+            </a:r>
+          </a:p>
+        </p:txBody>
+      </p:sp>
+      <p:sp>
+        <p:nvSpPr>
+          <p:cNvPr id="16" name="矩形 15">
+            <a:extLst>
+              <a:ext uri="{FF2B5EF4-FFF2-40B4-BE49-F238E27FC236}">
+                <a16:creationId xmlns:a16="http://schemas.microsoft.com/office/drawing/2014/main" id="{5157DD94-4954-BF43-B48A-41C650F63B56}"/>
+              </a:ext>
+            </a:extLst>
+          </p:cNvPr>
+          <p:cNvSpPr/>
+          <p:nvPr/>
+        </p:nvSpPr>
+        <p:spPr>
+          <a:xfrm>
+            <a:off x="5988517" y="1310126"/>
+            <a:ext cx="3284834" cy="956116"/>
           </a:xfrm>
           <a:prstGeom prst="rect">
             <a:avLst/>
@@ -4166,23 +3629,70 @@
           <a:lstStyle/>
           <a:p>
             <a:pPr algn="ctr"/>
-            <a:r>
-              <a:rPr kumimoji="1" lang="zh-CN" altLang="en-US" sz="1100" dirty="0">
-                <a:solidFill>
-                  <a:schemeClr val="tx1"/>
-                </a:solidFill>
-              </a:rPr>
-              <a:t>三角等边正则约束项</a:t>
-            </a:r>
-          </a:p>
-        </p:txBody>
-      </p:sp>
-      <p:sp>
-        <p:nvSpPr>
-          <p:cNvPr id="40" name="文本框 39">
-            <a:extLst>
-              <a:ext uri="{FF2B5EF4-FFF2-40B4-BE49-F238E27FC236}">
-                <a16:creationId xmlns:a16="http://schemas.microsoft.com/office/drawing/2014/main" id="{C86F6E39-1FED-6347-A818-34B706834A14}"/>
+            <a:endParaRPr kumimoji="1" lang="zh-CN" altLang="en-US"/>
+          </a:p>
+        </p:txBody>
+      </p:sp>
+      <p:sp>
+        <p:nvSpPr>
+          <p:cNvPr id="17" name="矩形 16">
+            <a:extLst>
+              <a:ext uri="{FF2B5EF4-FFF2-40B4-BE49-F238E27FC236}">
+                <a16:creationId xmlns:a16="http://schemas.microsoft.com/office/drawing/2014/main" id="{C4A406CE-C199-8146-9772-97C416362250}"/>
+              </a:ext>
+            </a:extLst>
+          </p:cNvPr>
+          <p:cNvSpPr/>
+          <p:nvPr/>
+        </p:nvSpPr>
+        <p:spPr>
+          <a:xfrm>
+            <a:off x="5988516" y="1308075"/>
+            <a:ext cx="3284833" cy="363849"/>
+          </a:xfrm>
+          <a:prstGeom prst="rect">
+            <a:avLst/>
+          </a:prstGeom>
+          <a:solidFill>
+            <a:schemeClr val="accent5">
+              <a:lumMod val="50000"/>
+            </a:schemeClr>
+          </a:solidFill>
+        </p:spPr>
+        <p:style>
+          <a:lnRef idx="2">
+            <a:schemeClr val="accent1">
+              <a:shade val="50000"/>
+            </a:schemeClr>
+          </a:lnRef>
+          <a:fillRef idx="1">
+            <a:schemeClr val="accent1"/>
+          </a:fillRef>
+          <a:effectRef idx="0">
+            <a:schemeClr val="accent1"/>
+          </a:effectRef>
+          <a:fontRef idx="minor">
+            <a:schemeClr val="lt1"/>
+          </a:fontRef>
+        </p:style>
+        <p:txBody>
+          <a:bodyPr rtlCol="0" anchor="ctr"/>
+          <a:lstStyle/>
+          <a:p>
+            <a:pPr algn="ctr"/>
+            <a:r>
+              <a:rPr kumimoji="1" lang="zh-CN" altLang="en-US" sz="1400" dirty="0"/>
+              <a:t>服装生成缺乏人体几何感知</a:t>
+            </a:r>
+          </a:p>
+        </p:txBody>
+      </p:sp>
+      <p:sp>
+        <p:nvSpPr>
+          <p:cNvPr id="18" name="文本框 17">
+            <a:extLst>
+              <a:ext uri="{FF2B5EF4-FFF2-40B4-BE49-F238E27FC236}">
+                <a16:creationId xmlns:a16="http://schemas.microsoft.com/office/drawing/2014/main" id="{FC18C682-CA5B-3E4E-8FBB-9B3D8D8A8FDF}"/>
               </a:ext>
             </a:extLst>
           </p:cNvPr>
@@ -4191,8 +3701,47 @@
         </p:nvSpPr>
         <p:spPr>
           <a:xfrm>
-            <a:off x="1870565" y="5561328"/>
-            <a:ext cx="646331" cy="307777"/>
+            <a:off x="6023028" y="1752139"/>
+            <a:ext cx="3235470" cy="461665"/>
+          </a:xfrm>
+          <a:prstGeom prst="rect">
+            <a:avLst/>
+          </a:prstGeom>
+          <a:noFill/>
+        </p:spPr>
+        <p:txBody>
+          <a:bodyPr wrap="square">
+            <a:spAutoFit/>
+          </a:bodyPr>
+          <a:lstStyle/>
+          <a:p>
+            <a:r>
+              <a:rPr lang="zh-CN" altLang="en-US" sz="1200" dirty="0"/>
+              <a:t>现有方法仅凭图像预测服装参数，缺乏穿着者的显式几何约束，生成</a:t>
+            </a:r>
+            <a:r>
+              <a:rPr lang="zh-CN" altLang="en-US" sz="1200" b="1" dirty="0"/>
+              <a:t>服装几何结构失真</a:t>
+            </a:r>
+          </a:p>
+        </p:txBody>
+      </p:sp>
+      <p:sp>
+        <p:nvSpPr>
+          <p:cNvPr id="21" name="文本框 20">
+            <a:extLst>
+              <a:ext uri="{FF2B5EF4-FFF2-40B4-BE49-F238E27FC236}">
+                <a16:creationId xmlns:a16="http://schemas.microsoft.com/office/drawing/2014/main" id="{D6F2C1C8-152A-4A4B-975E-0B0A305CDE75}"/>
+              </a:ext>
+            </a:extLst>
+          </p:cNvPr>
+          <p:cNvSpPr txBox="1"/>
+          <p:nvPr/>
+        </p:nvSpPr>
+        <p:spPr>
+          <a:xfrm>
+            <a:off x="1895259" y="2474497"/>
+            <a:ext cx="543739" cy="523220"/>
           </a:xfrm>
           <a:prstGeom prst="rect">
             <a:avLst/>
@@ -4211,17 +3760,95 @@
                   <a:srgbClr val="002060"/>
                 </a:solidFill>
               </a:rPr>
-              <a:t>应用</a:t>
-            </a:r>
-          </a:p>
-        </p:txBody>
-      </p:sp>
-      <p:sp>
-        <p:nvSpPr>
-          <p:cNvPr id="41" name="矩形 40">
-            <a:extLst>
-              <a:ext uri="{FF2B5EF4-FFF2-40B4-BE49-F238E27FC236}">
-                <a16:creationId xmlns:a16="http://schemas.microsoft.com/office/drawing/2014/main" id="{A9F3AFC4-DABA-F541-B97C-D4E0DD45FF6B}"/>
+              <a:t>研究思路</a:t>
+            </a:r>
+          </a:p>
+        </p:txBody>
+      </p:sp>
+      <p:sp>
+        <p:nvSpPr>
+          <p:cNvPr id="22" name="文本框 21">
+            <a:extLst>
+              <a:ext uri="{FF2B5EF4-FFF2-40B4-BE49-F238E27FC236}">
+                <a16:creationId xmlns:a16="http://schemas.microsoft.com/office/drawing/2014/main" id="{AB436BA9-BD19-0D44-94E4-6CABAD57EF37}"/>
+              </a:ext>
+            </a:extLst>
+          </p:cNvPr>
+          <p:cNvSpPr txBox="1"/>
+          <p:nvPr/>
+        </p:nvSpPr>
+        <p:spPr>
+          <a:xfrm>
+            <a:off x="1895260" y="3643378"/>
+            <a:ext cx="543738" cy="523220"/>
+          </a:xfrm>
+          <a:prstGeom prst="rect">
+            <a:avLst/>
+          </a:prstGeom>
+          <a:noFill/>
+        </p:spPr>
+        <p:txBody>
+          <a:bodyPr wrap="square" rtlCol="0">
+            <a:spAutoFit/>
+          </a:bodyPr>
+          <a:lstStyle/>
+          <a:p>
+            <a:r>
+              <a:rPr kumimoji="1" lang="zh-CN" altLang="en-US" sz="1400" dirty="0">
+                <a:solidFill>
+                  <a:srgbClr val="002060"/>
+                </a:solidFill>
+              </a:rPr>
+              <a:t>研究内容</a:t>
+            </a:r>
+          </a:p>
+        </p:txBody>
+      </p:sp>
+      <p:sp>
+        <p:nvSpPr>
+          <p:cNvPr id="23" name="文本框 22">
+            <a:extLst>
+              <a:ext uri="{FF2B5EF4-FFF2-40B4-BE49-F238E27FC236}">
+                <a16:creationId xmlns:a16="http://schemas.microsoft.com/office/drawing/2014/main" id="{581880DE-CE26-C944-8830-B479173C0A17}"/>
+              </a:ext>
+            </a:extLst>
+          </p:cNvPr>
+          <p:cNvSpPr txBox="1"/>
+          <p:nvPr/>
+        </p:nvSpPr>
+        <p:spPr>
+          <a:xfrm>
+            <a:off x="1895259" y="4796569"/>
+            <a:ext cx="543739" cy="307777"/>
+          </a:xfrm>
+          <a:prstGeom prst="rect">
+            <a:avLst/>
+          </a:prstGeom>
+          <a:noFill/>
+        </p:spPr>
+        <p:txBody>
+          <a:bodyPr wrap="square" rtlCol="0">
+            <a:spAutoFit/>
+          </a:bodyPr>
+          <a:lstStyle/>
+          <a:p>
+            <a:r>
+              <a:rPr kumimoji="1" lang="zh-CN" altLang="en-US" sz="1400" dirty="0">
+                <a:solidFill>
+                  <a:srgbClr val="002060"/>
+                </a:solidFill>
+              </a:rPr>
+              <a:t>目标</a:t>
+            </a:r>
+          </a:p>
+        </p:txBody>
+      </p:sp>
+      <p:sp>
+        <p:nvSpPr>
+          <p:cNvPr id="24" name="矩形 23">
+            <a:extLst>
+              <a:ext uri="{FF2B5EF4-FFF2-40B4-BE49-F238E27FC236}">
+                <a16:creationId xmlns:a16="http://schemas.microsoft.com/office/drawing/2014/main" id="{989FAB68-41C5-F643-B9EC-D8A9F8D3BF11}"/>
               </a:ext>
             </a:extLst>
           </p:cNvPr>
@@ -4230,8 +3857,8 @@
         </p:nvSpPr>
         <p:spPr>
           <a:xfrm>
-            <a:off x="2499495" y="4956295"/>
-            <a:ext cx="3300052" cy="363849"/>
+            <a:off x="2513239" y="3223032"/>
+            <a:ext cx="3344576" cy="1332579"/>
           </a:xfrm>
           <a:prstGeom prst="rect">
             <a:avLst/>
@@ -4265,23 +3892,16 @@
           <a:lstStyle/>
           <a:p>
             <a:pPr algn="ctr"/>
-            <a:r>
-              <a:rPr kumimoji="1" lang="zh-CN" altLang="en-US" sz="1200" dirty="0">
-                <a:solidFill>
-                  <a:schemeClr val="tx1"/>
-                </a:solidFill>
-              </a:rPr>
-              <a:t>提升人体几何重建质量与驱动泛化性</a:t>
-            </a:r>
-          </a:p>
-        </p:txBody>
-      </p:sp>
-      <p:sp>
-        <p:nvSpPr>
-          <p:cNvPr id="44" name="矩形 43">
-            <a:extLst>
-              <a:ext uri="{FF2B5EF4-FFF2-40B4-BE49-F238E27FC236}">
-                <a16:creationId xmlns:a16="http://schemas.microsoft.com/office/drawing/2014/main" id="{6353E3A8-3A33-CB41-8B8F-95F8185207D7}"/>
+            <a:endParaRPr kumimoji="1" lang="zh-CN" altLang="en-US"/>
+          </a:p>
+        </p:txBody>
+      </p:sp>
+      <p:sp>
+        <p:nvSpPr>
+          <p:cNvPr id="25" name="矩形 24">
+            <a:extLst>
+              <a:ext uri="{FF2B5EF4-FFF2-40B4-BE49-F238E27FC236}">
+                <a16:creationId xmlns:a16="http://schemas.microsoft.com/office/drawing/2014/main" id="{41C3218C-46B2-9E4D-B09A-FCEDD9869CB3}"/>
               </a:ext>
             </a:extLst>
           </p:cNvPr>
@@ -4290,8 +3910,62 @@
         </p:nvSpPr>
         <p:spPr>
           <a:xfrm>
-            <a:off x="6078679" y="4947859"/>
-            <a:ext cx="3177539" cy="363849"/>
+            <a:off x="2513237" y="3215857"/>
+            <a:ext cx="3349414" cy="363849"/>
+          </a:xfrm>
+          <a:prstGeom prst="rect">
+            <a:avLst/>
+          </a:prstGeom>
+          <a:solidFill>
+            <a:schemeClr val="accent5">
+              <a:lumMod val="50000"/>
+            </a:schemeClr>
+          </a:solidFill>
+        </p:spPr>
+        <p:style>
+          <a:lnRef idx="2">
+            <a:schemeClr val="accent1">
+              <a:shade val="50000"/>
+            </a:schemeClr>
+          </a:lnRef>
+          <a:fillRef idx="1">
+            <a:schemeClr val="accent1"/>
+          </a:fillRef>
+          <a:effectRef idx="0">
+            <a:schemeClr val="accent1"/>
+          </a:effectRef>
+          <a:fontRef idx="minor">
+            <a:schemeClr val="lt1"/>
+          </a:fontRef>
+        </p:style>
+        <p:txBody>
+          <a:bodyPr rtlCol="0" anchor="ctr"/>
+          <a:lstStyle/>
+          <a:p>
+            <a:pPr algn="ctr"/>
+            <a:r>
+              <a:rPr kumimoji="1" lang="zh-CN" altLang="en-US" sz="1400" dirty="0"/>
+              <a:t>基于拓扑绑定的三维高斯人体重建</a:t>
+            </a:r>
+          </a:p>
+        </p:txBody>
+      </p:sp>
+      <p:sp>
+        <p:nvSpPr>
+          <p:cNvPr id="27" name="矩形 26">
+            <a:extLst>
+              <a:ext uri="{FF2B5EF4-FFF2-40B4-BE49-F238E27FC236}">
+                <a16:creationId xmlns:a16="http://schemas.microsoft.com/office/drawing/2014/main" id="{B25D0B37-0A39-954A-B868-84049DCAE970}"/>
+              </a:ext>
+            </a:extLst>
+          </p:cNvPr>
+          <p:cNvSpPr/>
+          <p:nvPr/>
+        </p:nvSpPr>
+        <p:spPr>
+          <a:xfrm>
+            <a:off x="6046418" y="3223031"/>
+            <a:ext cx="3223576" cy="1332579"/>
           </a:xfrm>
           <a:prstGeom prst="rect">
             <a:avLst/>
@@ -4325,23 +3999,16 @@
           <a:lstStyle/>
           <a:p>
             <a:pPr algn="ctr"/>
-            <a:r>
-              <a:rPr kumimoji="1" lang="zh-CN" altLang="en-US" sz="1200" dirty="0">
-                <a:solidFill>
-                  <a:schemeClr val="tx1"/>
-                </a:solidFill>
-              </a:rPr>
-              <a:t>提升服装参数生成精度与推理效率</a:t>
-            </a:r>
-          </a:p>
-        </p:txBody>
-      </p:sp>
-      <p:sp>
-        <p:nvSpPr>
-          <p:cNvPr id="2" name="下箭头 1">
-            <a:extLst>
-              <a:ext uri="{FF2B5EF4-FFF2-40B4-BE49-F238E27FC236}">
-                <a16:creationId xmlns:a16="http://schemas.microsoft.com/office/drawing/2014/main" id="{B962EC26-32C1-FC42-8C36-D37DC5D8C4FF}"/>
+            <a:endParaRPr kumimoji="1" lang="zh-CN" altLang="en-US"/>
+          </a:p>
+        </p:txBody>
+      </p:sp>
+      <p:sp>
+        <p:nvSpPr>
+          <p:cNvPr id="28" name="矩形 27">
+            <a:extLst>
+              <a:ext uri="{FF2B5EF4-FFF2-40B4-BE49-F238E27FC236}">
+                <a16:creationId xmlns:a16="http://schemas.microsoft.com/office/drawing/2014/main" id="{107A842C-0FEF-9048-ABCF-9BF35EE6971B}"/>
               </a:ext>
             </a:extLst>
           </p:cNvPr>
@@ -4350,14 +4017,16 @@
         </p:nvSpPr>
         <p:spPr>
           <a:xfrm>
-            <a:off x="4019744" y="2294984"/>
-            <a:ext cx="259553" cy="269656"/>
-          </a:xfrm>
-          <a:prstGeom prst="downArrow">
+            <a:off x="6046419" y="3220981"/>
+            <a:ext cx="3223576" cy="363849"/>
+          </a:xfrm>
+          <a:prstGeom prst="rect">
             <a:avLst/>
           </a:prstGeom>
           <a:solidFill>
-            <a:srgbClr val="0070C0"/>
+            <a:schemeClr val="accent5">
+              <a:lumMod val="50000"/>
+            </a:schemeClr>
           </a:solidFill>
         </p:spPr>
         <p:style>
@@ -4381,16 +4050,19 @@
           <a:lstStyle/>
           <a:p>
             <a:pPr algn="ctr"/>
-            <a:endParaRPr kumimoji="1" lang="zh-CN" altLang="en-US"/>
-          </a:p>
-        </p:txBody>
-      </p:sp>
-      <p:sp>
-        <p:nvSpPr>
-          <p:cNvPr id="29" name="下箭头 28">
-            <a:extLst>
-              <a:ext uri="{FF2B5EF4-FFF2-40B4-BE49-F238E27FC236}">
-                <a16:creationId xmlns:a16="http://schemas.microsoft.com/office/drawing/2014/main" id="{DEB98004-A16A-BC49-A85C-3E19B2EDB0AC}"/>
+            <a:r>
+              <a:rPr kumimoji="1" lang="zh-CN" altLang="en-US" sz="1400" dirty="0"/>
+              <a:t>基于人体测量先验的服装参数生成</a:t>
+            </a:r>
+          </a:p>
+        </p:txBody>
+      </p:sp>
+      <p:sp>
+        <p:nvSpPr>
+          <p:cNvPr id="30" name="矩形 29">
+            <a:extLst>
+              <a:ext uri="{FF2B5EF4-FFF2-40B4-BE49-F238E27FC236}">
+                <a16:creationId xmlns:a16="http://schemas.microsoft.com/office/drawing/2014/main" id="{3623837E-683C-A747-BCD5-B0CFAE970554}"/>
               </a:ext>
             </a:extLst>
           </p:cNvPr>
@@ -4399,15 +4071,17 @@
         </p:nvSpPr>
         <p:spPr>
           <a:xfrm>
-            <a:off x="7589089" y="2313339"/>
-            <a:ext cx="259553" cy="269656"/>
-          </a:xfrm>
-          <a:prstGeom prst="downArrow">
+            <a:off x="2599439" y="3930042"/>
+            <a:ext cx="3090107" cy="288300"/>
+          </a:xfrm>
+          <a:prstGeom prst="rect">
             <a:avLst/>
           </a:prstGeom>
-          <a:solidFill>
-            <a:srgbClr val="0070C0"/>
-          </a:solidFill>
+          <a:noFill/>
+          <a:ln>
+            <a:noFill/>
+            <a:prstDash val="solid"/>
+          </a:ln>
         </p:spPr>
         <p:style>
           <a:lnRef idx="2">
@@ -4430,16 +4104,23 @@
           <a:lstStyle/>
           <a:p>
             <a:pPr algn="ctr"/>
-            <a:endParaRPr kumimoji="1" lang="zh-CN" altLang="en-US"/>
-          </a:p>
-        </p:txBody>
-      </p:sp>
-      <p:sp>
-        <p:nvSpPr>
-          <p:cNvPr id="31" name="下箭头 30">
-            <a:extLst>
-              <a:ext uri="{FF2B5EF4-FFF2-40B4-BE49-F238E27FC236}">
-                <a16:creationId xmlns:a16="http://schemas.microsoft.com/office/drawing/2014/main" id="{03EC22AE-378E-BD4E-8021-160D8A59F64E}"/>
+            <a:r>
+              <a:rPr kumimoji="1" lang="zh-CN" altLang="en-US" sz="1100" dirty="0">
+                <a:solidFill>
+                  <a:schemeClr val="tx1"/>
+                </a:solidFill>
+              </a:rPr>
+              <a:t>解析式三维高斯绑定策略</a:t>
+            </a:r>
+          </a:p>
+        </p:txBody>
+      </p:sp>
+      <p:sp>
+        <p:nvSpPr>
+          <p:cNvPr id="34" name="矩形 33">
+            <a:extLst>
+              <a:ext uri="{FF2B5EF4-FFF2-40B4-BE49-F238E27FC236}">
+                <a16:creationId xmlns:a16="http://schemas.microsoft.com/office/drawing/2014/main" id="{8309BC6A-202D-9146-939E-A6B7B1FEB7C9}"/>
               </a:ext>
             </a:extLst>
           </p:cNvPr>
@@ -4448,15 +4129,17 @@
         </p:nvSpPr>
         <p:spPr>
           <a:xfrm>
-            <a:off x="4014718" y="2986497"/>
-            <a:ext cx="259553" cy="180790"/>
-          </a:xfrm>
-          <a:prstGeom prst="downArrow">
+            <a:off x="2599439" y="4215797"/>
+            <a:ext cx="3090107" cy="288300"/>
+          </a:xfrm>
+          <a:prstGeom prst="rect">
             <a:avLst/>
           </a:prstGeom>
-          <a:solidFill>
-            <a:srgbClr val="0070C0"/>
-          </a:solidFill>
+          <a:noFill/>
+          <a:ln>
+            <a:noFill/>
+            <a:prstDash val="solid"/>
+          </a:ln>
         </p:spPr>
         <p:style>
           <a:lnRef idx="2">
@@ -4479,16 +4162,62 @@
           <a:lstStyle/>
           <a:p>
             <a:pPr algn="ctr"/>
-            <a:endParaRPr kumimoji="1" lang="zh-CN" altLang="en-US"/>
-          </a:p>
-        </p:txBody>
-      </p:sp>
-      <p:sp>
-        <p:nvSpPr>
-          <p:cNvPr id="32" name="下箭头 31">
-            <a:extLst>
-              <a:ext uri="{FF2B5EF4-FFF2-40B4-BE49-F238E27FC236}">
-                <a16:creationId xmlns:a16="http://schemas.microsoft.com/office/drawing/2014/main" id="{CB211465-BE7A-694E-9FCC-CCED075A0606}"/>
+            <a:r>
+              <a:rPr kumimoji="1" lang="zh-CN" altLang="en-US" sz="1100" dirty="0">
+                <a:solidFill>
+                  <a:schemeClr val="tx1"/>
+                </a:solidFill>
+              </a:rPr>
+              <a:t>三角等边正则约束项</a:t>
+            </a:r>
+          </a:p>
+        </p:txBody>
+      </p:sp>
+      <p:sp>
+        <p:nvSpPr>
+          <p:cNvPr id="40" name="文本框 39">
+            <a:extLst>
+              <a:ext uri="{FF2B5EF4-FFF2-40B4-BE49-F238E27FC236}">
+                <a16:creationId xmlns:a16="http://schemas.microsoft.com/office/drawing/2014/main" id="{C86F6E39-1FED-6347-A818-34B706834A14}"/>
+              </a:ext>
+            </a:extLst>
+          </p:cNvPr>
+          <p:cNvSpPr txBox="1"/>
+          <p:nvPr/>
+        </p:nvSpPr>
+        <p:spPr>
+          <a:xfrm>
+            <a:off x="1895259" y="5398265"/>
+            <a:ext cx="543739" cy="307777"/>
+          </a:xfrm>
+          <a:prstGeom prst="rect">
+            <a:avLst/>
+          </a:prstGeom>
+          <a:noFill/>
+        </p:spPr>
+        <p:txBody>
+          <a:bodyPr wrap="square" rtlCol="0">
+            <a:spAutoFit/>
+          </a:bodyPr>
+          <a:lstStyle/>
+          <a:p>
+            <a:r>
+              <a:rPr kumimoji="1" lang="zh-CN" altLang="en-US" sz="1400" dirty="0">
+                <a:solidFill>
+                  <a:srgbClr val="002060"/>
+                </a:solidFill>
+              </a:rPr>
+              <a:t>应用</a:t>
+            </a:r>
+          </a:p>
+        </p:txBody>
+      </p:sp>
+      <p:sp>
+        <p:nvSpPr>
+          <p:cNvPr id="41" name="矩形 40">
+            <a:extLst>
+              <a:ext uri="{FF2B5EF4-FFF2-40B4-BE49-F238E27FC236}">
+                <a16:creationId xmlns:a16="http://schemas.microsoft.com/office/drawing/2014/main" id="{A9F3AFC4-DABA-F541-B97C-D4E0DD45FF6B}"/>
               </a:ext>
             </a:extLst>
           </p:cNvPr>
@@ -4497,57 +4226,8 @@
         </p:nvSpPr>
         <p:spPr>
           <a:xfrm>
-            <a:off x="7592450" y="3013174"/>
-            <a:ext cx="259553" cy="180790"/>
-          </a:xfrm>
-          <a:prstGeom prst="downArrow">
-            <a:avLst/>
-          </a:prstGeom>
-          <a:solidFill>
-            <a:srgbClr val="0070C0"/>
-          </a:solidFill>
-        </p:spPr>
-        <p:style>
-          <a:lnRef idx="2">
-            <a:schemeClr val="accent1">
-              <a:shade val="50000"/>
-            </a:schemeClr>
-          </a:lnRef>
-          <a:fillRef idx="1">
-            <a:schemeClr val="accent1"/>
-          </a:fillRef>
-          <a:effectRef idx="0">
-            <a:schemeClr val="accent1"/>
-          </a:effectRef>
-          <a:fontRef idx="minor">
-            <a:schemeClr val="lt1"/>
-          </a:fontRef>
-        </p:style>
-        <p:txBody>
-          <a:bodyPr rtlCol="0" anchor="ctr"/>
-          <a:lstStyle/>
-          <a:p>
-            <a:pPr algn="ctr"/>
-            <a:endParaRPr kumimoji="1" lang="zh-CN" altLang="en-US"/>
-          </a:p>
-        </p:txBody>
-      </p:sp>
-      <p:sp>
-        <p:nvSpPr>
-          <p:cNvPr id="33" name="矩形 32">
-            <a:extLst>
-              <a:ext uri="{FF2B5EF4-FFF2-40B4-BE49-F238E27FC236}">
-                <a16:creationId xmlns:a16="http://schemas.microsoft.com/office/drawing/2014/main" id="{F479F3E2-E958-3D4D-93EE-923E1DEF5168}"/>
-              </a:ext>
-            </a:extLst>
-          </p:cNvPr>
-          <p:cNvSpPr/>
-          <p:nvPr/>
-        </p:nvSpPr>
-        <p:spPr>
-          <a:xfrm>
-            <a:off x="2513273" y="2595432"/>
-            <a:ext cx="3349379" cy="363849"/>
+            <a:off x="2499495" y="4782390"/>
+            <a:ext cx="3300052" cy="363849"/>
           </a:xfrm>
           <a:prstGeom prst="rect">
             <a:avLst/>
@@ -4587,17 +4267,17 @@
                   <a:schemeClr val="tx1"/>
                 </a:solidFill>
               </a:rPr>
-              <a:t>人体网格先验提供拓扑结构约束</a:t>
-            </a:r>
-          </a:p>
-        </p:txBody>
-      </p:sp>
-      <p:sp>
-        <p:nvSpPr>
-          <p:cNvPr id="36" name="矩形 35">
-            <a:extLst>
-              <a:ext uri="{FF2B5EF4-FFF2-40B4-BE49-F238E27FC236}">
-                <a16:creationId xmlns:a16="http://schemas.microsoft.com/office/drawing/2014/main" id="{15DAFCAF-6247-3C4F-8EA7-DBECB725F6D7}"/>
+              <a:t>提高人体几何重建的质量与驱动泛化性</a:t>
+            </a:r>
+          </a:p>
+        </p:txBody>
+      </p:sp>
+      <p:sp>
+        <p:nvSpPr>
+          <p:cNvPr id="44" name="矩形 43">
+            <a:extLst>
+              <a:ext uri="{FF2B5EF4-FFF2-40B4-BE49-F238E27FC236}">
+                <a16:creationId xmlns:a16="http://schemas.microsoft.com/office/drawing/2014/main" id="{6353E3A8-3A33-CB41-8B8F-95F8185207D7}"/>
               </a:ext>
             </a:extLst>
           </p:cNvPr>
@@ -4606,8 +4286,8 @@
         </p:nvSpPr>
         <p:spPr>
           <a:xfrm>
-            <a:off x="5985159" y="2607360"/>
-            <a:ext cx="3284834" cy="363849"/>
+            <a:off x="6042162" y="4786878"/>
+            <a:ext cx="3223576" cy="363849"/>
           </a:xfrm>
           <a:prstGeom prst="rect">
             <a:avLst/>
@@ -4647,57 +4327,66 @@
                   <a:schemeClr val="tx1"/>
                 </a:solidFill>
               </a:rPr>
-              <a:t>人体网格提供人体测量信息先验</a:t>
-            </a:r>
-          </a:p>
-        </p:txBody>
-      </p:sp>
-      <p:sp>
-        <p:nvSpPr>
-          <p:cNvPr id="39" name="文本框 38">
-            <a:extLst>
-              <a:ext uri="{FF2B5EF4-FFF2-40B4-BE49-F238E27FC236}">
-                <a16:creationId xmlns:a16="http://schemas.microsoft.com/office/drawing/2014/main" id="{C40A0DA6-A11F-5345-B458-6A425514CD44}"/>
-              </a:ext>
-            </a:extLst>
-          </p:cNvPr>
-          <p:cNvSpPr txBox="1"/>
+              <a:t>提高服装参数生成的准确度与效率</a:t>
+            </a:r>
+          </a:p>
+        </p:txBody>
+      </p:sp>
+      <p:sp>
+        <p:nvSpPr>
+          <p:cNvPr id="2" name="下箭头 1">
+            <a:extLst>
+              <a:ext uri="{FF2B5EF4-FFF2-40B4-BE49-F238E27FC236}">
+                <a16:creationId xmlns:a16="http://schemas.microsoft.com/office/drawing/2014/main" id="{B962EC26-32C1-FC42-8C36-D37DC5D8C4FF}"/>
+              </a:ext>
+            </a:extLst>
+          </p:cNvPr>
+          <p:cNvSpPr/>
           <p:nvPr/>
         </p:nvSpPr>
         <p:spPr>
           <a:xfrm>
-            <a:off x="4533899" y="2319307"/>
-            <a:ext cx="2600325" cy="276999"/>
-          </a:xfrm>
-          <a:prstGeom prst="rect">
+            <a:off x="4019744" y="2294984"/>
+            <a:ext cx="259553" cy="269656"/>
+          </a:xfrm>
+          <a:prstGeom prst="downArrow">
             <a:avLst/>
           </a:prstGeom>
-          <a:noFill/>
-        </p:spPr>
-        <p:txBody>
-          <a:bodyPr wrap="square">
-            <a:spAutoFit/>
-          </a:bodyPr>
+          <a:solidFill>
+            <a:srgbClr val="0070C0"/>
+          </a:solidFill>
+        </p:spPr>
+        <p:style>
+          <a:lnRef idx="2">
+            <a:schemeClr val="accent1">
+              <a:shade val="50000"/>
+            </a:schemeClr>
+          </a:lnRef>
+          <a:fillRef idx="1">
+            <a:schemeClr val="accent1"/>
+          </a:fillRef>
+          <a:effectRef idx="0">
+            <a:schemeClr val="accent1"/>
+          </a:effectRef>
+          <a:fontRef idx="minor">
+            <a:schemeClr val="lt1"/>
+          </a:fontRef>
+        </p:style>
+        <p:txBody>
+          <a:bodyPr rtlCol="0" anchor="ctr"/>
           <a:lstStyle/>
           <a:p>
             <a:pPr algn="ctr"/>
-            <a:r>
-              <a:rPr kumimoji="1" lang="zh-CN" altLang="en-US" sz="1200" dirty="0">
-                <a:solidFill>
-                  <a:schemeClr val="tx1"/>
-                </a:solidFill>
-              </a:rPr>
-              <a:t>引入参数化人体网格先验</a:t>
-            </a:r>
-          </a:p>
-        </p:txBody>
-      </p:sp>
-      <p:sp>
-        <p:nvSpPr>
-          <p:cNvPr id="43" name="矩形 42">
-            <a:extLst>
-              <a:ext uri="{FF2B5EF4-FFF2-40B4-BE49-F238E27FC236}">
-                <a16:creationId xmlns:a16="http://schemas.microsoft.com/office/drawing/2014/main" id="{9BE688C9-CB83-F447-BD34-8337B465A7E3}"/>
+            <a:endParaRPr kumimoji="1" lang="zh-CN" altLang="en-US"/>
+          </a:p>
+        </p:txBody>
+      </p:sp>
+      <p:sp>
+        <p:nvSpPr>
+          <p:cNvPr id="29" name="下箭头 28">
+            <a:extLst>
+              <a:ext uri="{FF2B5EF4-FFF2-40B4-BE49-F238E27FC236}">
+                <a16:creationId xmlns:a16="http://schemas.microsoft.com/office/drawing/2014/main" id="{DEB98004-A16A-BC49-A85C-3E19B2EDB0AC}"/>
               </a:ext>
             </a:extLst>
           </p:cNvPr>
@@ -4706,8 +4395,155 @@
         </p:nvSpPr>
         <p:spPr>
           <a:xfrm>
-            <a:off x="2610908" y="3640342"/>
-            <a:ext cx="3090107" cy="288300"/>
+            <a:off x="7589089" y="2313339"/>
+            <a:ext cx="259553" cy="269656"/>
+          </a:xfrm>
+          <a:prstGeom prst="downArrow">
+            <a:avLst/>
+          </a:prstGeom>
+          <a:solidFill>
+            <a:srgbClr val="0070C0"/>
+          </a:solidFill>
+        </p:spPr>
+        <p:style>
+          <a:lnRef idx="2">
+            <a:schemeClr val="accent1">
+              <a:shade val="50000"/>
+            </a:schemeClr>
+          </a:lnRef>
+          <a:fillRef idx="1">
+            <a:schemeClr val="accent1"/>
+          </a:fillRef>
+          <a:effectRef idx="0">
+            <a:schemeClr val="accent1"/>
+          </a:effectRef>
+          <a:fontRef idx="minor">
+            <a:schemeClr val="lt1"/>
+          </a:fontRef>
+        </p:style>
+        <p:txBody>
+          <a:bodyPr rtlCol="0" anchor="ctr"/>
+          <a:lstStyle/>
+          <a:p>
+            <a:pPr algn="ctr"/>
+            <a:endParaRPr kumimoji="1" lang="zh-CN" altLang="en-US"/>
+          </a:p>
+        </p:txBody>
+      </p:sp>
+      <p:sp>
+        <p:nvSpPr>
+          <p:cNvPr id="31" name="下箭头 30">
+            <a:extLst>
+              <a:ext uri="{FF2B5EF4-FFF2-40B4-BE49-F238E27FC236}">
+                <a16:creationId xmlns:a16="http://schemas.microsoft.com/office/drawing/2014/main" id="{03EC22AE-378E-BD4E-8021-160D8A59F64E}"/>
+              </a:ext>
+            </a:extLst>
+          </p:cNvPr>
+          <p:cNvSpPr/>
+          <p:nvPr/>
+        </p:nvSpPr>
+        <p:spPr>
+          <a:xfrm>
+            <a:off x="4014718" y="2997717"/>
+            <a:ext cx="259553" cy="180790"/>
+          </a:xfrm>
+          <a:prstGeom prst="downArrow">
+            <a:avLst/>
+          </a:prstGeom>
+          <a:solidFill>
+            <a:srgbClr val="0070C0"/>
+          </a:solidFill>
+        </p:spPr>
+        <p:style>
+          <a:lnRef idx="2">
+            <a:schemeClr val="accent1">
+              <a:shade val="50000"/>
+            </a:schemeClr>
+          </a:lnRef>
+          <a:fillRef idx="1">
+            <a:schemeClr val="accent1"/>
+          </a:fillRef>
+          <a:effectRef idx="0">
+            <a:schemeClr val="accent1"/>
+          </a:effectRef>
+          <a:fontRef idx="minor">
+            <a:schemeClr val="lt1"/>
+          </a:fontRef>
+        </p:style>
+        <p:txBody>
+          <a:bodyPr rtlCol="0" anchor="ctr"/>
+          <a:lstStyle/>
+          <a:p>
+            <a:pPr algn="ctr"/>
+            <a:endParaRPr kumimoji="1" lang="zh-CN" altLang="en-US"/>
+          </a:p>
+        </p:txBody>
+      </p:sp>
+      <p:sp>
+        <p:nvSpPr>
+          <p:cNvPr id="32" name="下箭头 31">
+            <a:extLst>
+              <a:ext uri="{FF2B5EF4-FFF2-40B4-BE49-F238E27FC236}">
+                <a16:creationId xmlns:a16="http://schemas.microsoft.com/office/drawing/2014/main" id="{CB211465-BE7A-694E-9FCC-CCED075A0606}"/>
+              </a:ext>
+            </a:extLst>
+          </p:cNvPr>
+          <p:cNvSpPr/>
+          <p:nvPr/>
+        </p:nvSpPr>
+        <p:spPr>
+          <a:xfrm>
+            <a:off x="7592450" y="2997717"/>
+            <a:ext cx="259553" cy="180790"/>
+          </a:xfrm>
+          <a:prstGeom prst="downArrow">
+            <a:avLst/>
+          </a:prstGeom>
+          <a:solidFill>
+            <a:srgbClr val="0070C0"/>
+          </a:solidFill>
+        </p:spPr>
+        <p:style>
+          <a:lnRef idx="2">
+            <a:schemeClr val="accent1">
+              <a:shade val="50000"/>
+            </a:schemeClr>
+          </a:lnRef>
+          <a:fillRef idx="1">
+            <a:schemeClr val="accent1"/>
+          </a:fillRef>
+          <a:effectRef idx="0">
+            <a:schemeClr val="accent1"/>
+          </a:effectRef>
+          <a:fontRef idx="minor">
+            <a:schemeClr val="lt1"/>
+          </a:fontRef>
+        </p:style>
+        <p:txBody>
+          <a:bodyPr rtlCol="0" anchor="ctr"/>
+          <a:lstStyle/>
+          <a:p>
+            <a:pPr algn="ctr"/>
+            <a:endParaRPr kumimoji="1" lang="zh-CN" altLang="en-US"/>
+          </a:p>
+        </p:txBody>
+      </p:sp>
+      <p:sp>
+        <p:nvSpPr>
+          <p:cNvPr id="33" name="矩形 32">
+            <a:extLst>
+              <a:ext uri="{FF2B5EF4-FFF2-40B4-BE49-F238E27FC236}">
+                <a16:creationId xmlns:a16="http://schemas.microsoft.com/office/drawing/2014/main" id="{F479F3E2-E958-3D4D-93EE-923E1DEF5168}"/>
+              </a:ext>
+            </a:extLst>
+          </p:cNvPr>
+          <p:cNvSpPr/>
+          <p:nvPr/>
+        </p:nvSpPr>
+        <p:spPr>
+          <a:xfrm>
+            <a:off x="2513239" y="2595432"/>
+            <a:ext cx="3349413" cy="363849"/>
           </a:xfrm>
           <a:prstGeom prst="rect">
             <a:avLst/>
@@ -4742,22 +4578,22 @@
           <a:p>
             <a:pPr algn="ctr"/>
             <a:r>
-              <a:rPr kumimoji="1" lang="zh-CN" altLang="en-US" sz="1100" dirty="0">
+              <a:rPr kumimoji="1" lang="zh-CN" altLang="en-US" sz="1200" dirty="0">
                 <a:solidFill>
                   <a:schemeClr val="tx1"/>
                 </a:solidFill>
               </a:rPr>
-              <a:t>可变形穿衣人网格表示</a:t>
-            </a:r>
-          </a:p>
-        </p:txBody>
-      </p:sp>
-      <p:sp>
-        <p:nvSpPr>
-          <p:cNvPr id="45" name="矩形 44">
-            <a:extLst>
-              <a:ext uri="{FF2B5EF4-FFF2-40B4-BE49-F238E27FC236}">
-                <a16:creationId xmlns:a16="http://schemas.microsoft.com/office/drawing/2014/main" id="{826EB1D6-45D7-AD4A-BA39-71A097F42B91}"/>
+              <a:t>人体几何提供拓扑结构约束</a:t>
+            </a:r>
+          </a:p>
+        </p:txBody>
+      </p:sp>
+      <p:sp>
+        <p:nvSpPr>
+          <p:cNvPr id="36" name="矩形 35">
+            <a:extLst>
+              <a:ext uri="{FF2B5EF4-FFF2-40B4-BE49-F238E27FC236}">
+                <a16:creationId xmlns:a16="http://schemas.microsoft.com/office/drawing/2014/main" id="{15DAFCAF-6247-3C4F-8EA7-DBECB725F6D7}"/>
               </a:ext>
             </a:extLst>
           </p:cNvPr>
@@ -4766,8 +4602,8 @@
         </p:nvSpPr>
         <p:spPr>
           <a:xfrm>
-            <a:off x="6122394" y="3696621"/>
-            <a:ext cx="3090107" cy="288300"/>
+            <a:off x="6015789" y="2592244"/>
+            <a:ext cx="3249949" cy="363849"/>
           </a:xfrm>
           <a:prstGeom prst="rect">
             <a:avLst/>
@@ -4802,22 +4638,62 @@
           <a:p>
             <a:pPr algn="ctr"/>
             <a:r>
-              <a:rPr kumimoji="1" lang="zh-CN" altLang="en-US" sz="1100" dirty="0">
+              <a:rPr kumimoji="1" lang="zh-CN" altLang="en-US" sz="1200" dirty="0">
                 <a:solidFill>
                   <a:schemeClr val="tx1"/>
                 </a:solidFill>
               </a:rPr>
-              <a:t>人体测量先验自动化提取</a:t>
-            </a:r>
-          </a:p>
-        </p:txBody>
-      </p:sp>
-      <p:sp>
-        <p:nvSpPr>
-          <p:cNvPr id="46" name="矩形 45">
-            <a:extLst>
-              <a:ext uri="{FF2B5EF4-FFF2-40B4-BE49-F238E27FC236}">
-                <a16:creationId xmlns:a16="http://schemas.microsoft.com/office/drawing/2014/main" id="{6324C99D-4B2D-8A4F-A578-76E120F84167}"/>
+              <a:t>人体几何提供测量信息先验</a:t>
+            </a:r>
+          </a:p>
+        </p:txBody>
+      </p:sp>
+      <p:sp>
+        <p:nvSpPr>
+          <p:cNvPr id="39" name="文本框 38">
+            <a:extLst>
+              <a:ext uri="{FF2B5EF4-FFF2-40B4-BE49-F238E27FC236}">
+                <a16:creationId xmlns:a16="http://schemas.microsoft.com/office/drawing/2014/main" id="{C40A0DA6-A11F-5345-B458-6A425514CD44}"/>
+              </a:ext>
+            </a:extLst>
+          </p:cNvPr>
+          <p:cNvSpPr txBox="1"/>
+          <p:nvPr/>
+        </p:nvSpPr>
+        <p:spPr>
+          <a:xfrm>
+            <a:off x="4515903" y="2301244"/>
+            <a:ext cx="2675894" cy="276999"/>
+          </a:xfrm>
+          <a:prstGeom prst="rect">
+            <a:avLst/>
+          </a:prstGeom>
+          <a:noFill/>
+        </p:spPr>
+        <p:txBody>
+          <a:bodyPr wrap="square">
+            <a:spAutoFit/>
+          </a:bodyPr>
+          <a:lstStyle/>
+          <a:p>
+            <a:pPr algn="ctr"/>
+            <a:r>
+              <a:rPr kumimoji="1" lang="zh-CN" altLang="en-US" sz="1200" dirty="0">
+                <a:solidFill>
+                  <a:schemeClr val="tx1"/>
+                </a:solidFill>
+              </a:rPr>
+              <a:t>引入参数化人体几何先验</a:t>
+            </a:r>
+          </a:p>
+        </p:txBody>
+      </p:sp>
+      <p:sp>
+        <p:nvSpPr>
+          <p:cNvPr id="43" name="矩形 42">
+            <a:extLst>
+              <a:ext uri="{FF2B5EF4-FFF2-40B4-BE49-F238E27FC236}">
+                <a16:creationId xmlns:a16="http://schemas.microsoft.com/office/drawing/2014/main" id="{9BE688C9-CB83-F447-BD34-8337B465A7E3}"/>
               </a:ext>
             </a:extLst>
           </p:cNvPr>
@@ -4826,7 +4702,7 @@
         </p:nvSpPr>
         <p:spPr>
           <a:xfrm>
-            <a:off x="6122394" y="4022220"/>
+            <a:off x="2610908" y="3640342"/>
             <a:ext cx="3090107" cy="288300"/>
           </a:xfrm>
           <a:prstGeom prst="rect">
@@ -4834,9 +4710,7 @@
           </a:prstGeom>
           <a:noFill/>
           <a:ln>
-            <a:solidFill>
-              <a:schemeClr val="tx1"/>
-            </a:solidFill>
+            <a:noFill/>
             <a:prstDash val="solid"/>
           </a:ln>
         </p:spPr>
@@ -4867,17 +4741,17 @@
                   <a:schemeClr val="tx1"/>
                 </a:solidFill>
               </a:rPr>
-              <a:t>服装设计参数重表示</a:t>
-            </a:r>
-          </a:p>
-        </p:txBody>
-      </p:sp>
-      <p:sp>
-        <p:nvSpPr>
-          <p:cNvPr id="47" name="矩形 46">
-            <a:extLst>
-              <a:ext uri="{FF2B5EF4-FFF2-40B4-BE49-F238E27FC236}">
-                <a16:creationId xmlns:a16="http://schemas.microsoft.com/office/drawing/2014/main" id="{5AD9FF3D-7151-544F-A5F6-33508FBBABF4}"/>
+              <a:t>可变形穿衣人网格表示</a:t>
+            </a:r>
+          </a:p>
+        </p:txBody>
+      </p:sp>
+      <p:sp>
+        <p:nvSpPr>
+          <p:cNvPr id="45" name="矩形 44">
+            <a:extLst>
+              <a:ext uri="{FF2B5EF4-FFF2-40B4-BE49-F238E27FC236}">
+                <a16:creationId xmlns:a16="http://schemas.microsoft.com/office/drawing/2014/main" id="{826EB1D6-45D7-AD4A-BA39-71A097F42B91}"/>
               </a:ext>
             </a:extLst>
           </p:cNvPr>
@@ -4886,7 +4760,7 @@
         </p:nvSpPr>
         <p:spPr>
           <a:xfrm>
-            <a:off x="6122394" y="4373111"/>
+            <a:off x="6122394" y="3595644"/>
             <a:ext cx="3090107" cy="288300"/>
           </a:xfrm>
           <a:prstGeom prst="rect">
@@ -4894,9 +4768,7 @@
           </a:prstGeom>
           <a:noFill/>
           <a:ln>
-            <a:solidFill>
-              <a:schemeClr val="tx1"/>
-            </a:solidFill>
+            <a:noFill/>
             <a:prstDash val="solid"/>
           </a:ln>
         </p:spPr>
@@ -4927,17 +4799,17 @@
                   <a:schemeClr val="tx1"/>
                 </a:solidFill>
               </a:rPr>
-              <a:t>几何先验驱动多模态推理</a:t>
-            </a:r>
-          </a:p>
-        </p:txBody>
-      </p:sp>
-      <p:sp>
-        <p:nvSpPr>
-          <p:cNvPr id="48" name="矩形 47">
-            <a:extLst>
-              <a:ext uri="{FF2B5EF4-FFF2-40B4-BE49-F238E27FC236}">
-                <a16:creationId xmlns:a16="http://schemas.microsoft.com/office/drawing/2014/main" id="{03804F8B-075A-9440-AC49-21C41680CC31}"/>
+              <a:t>人体测量先验自动化提取</a:t>
+            </a:r>
+          </a:p>
+        </p:txBody>
+      </p:sp>
+      <p:sp>
+        <p:nvSpPr>
+          <p:cNvPr id="46" name="矩形 45">
+            <a:extLst>
+              <a:ext uri="{FF2B5EF4-FFF2-40B4-BE49-F238E27FC236}">
+                <a16:creationId xmlns:a16="http://schemas.microsoft.com/office/drawing/2014/main" id="{6324C99D-4B2D-8A4F-A578-76E120F84167}"/>
               </a:ext>
             </a:extLst>
           </p:cNvPr>
@@ -4946,8 +4818,124 @@
         </p:nvSpPr>
         <p:spPr>
           <a:xfrm>
-            <a:off x="2508436" y="5544135"/>
-            <a:ext cx="6764913" cy="363849"/>
+            <a:off x="6122394" y="3893193"/>
+            <a:ext cx="3090107" cy="288300"/>
+          </a:xfrm>
+          <a:prstGeom prst="rect">
+            <a:avLst/>
+          </a:prstGeom>
+          <a:noFill/>
+          <a:ln>
+            <a:noFill/>
+            <a:prstDash val="solid"/>
+          </a:ln>
+        </p:spPr>
+        <p:style>
+          <a:lnRef idx="2">
+            <a:schemeClr val="accent1">
+              <a:shade val="50000"/>
+            </a:schemeClr>
+          </a:lnRef>
+          <a:fillRef idx="1">
+            <a:schemeClr val="accent1"/>
+          </a:fillRef>
+          <a:effectRef idx="0">
+            <a:schemeClr val="accent1"/>
+          </a:effectRef>
+          <a:fontRef idx="minor">
+            <a:schemeClr val="lt1"/>
+          </a:fontRef>
+        </p:style>
+        <p:txBody>
+          <a:bodyPr rtlCol="0" anchor="ctr"/>
+          <a:lstStyle/>
+          <a:p>
+            <a:pPr algn="ctr"/>
+            <a:r>
+              <a:rPr kumimoji="1" lang="zh-CN" altLang="en-US" sz="1100" dirty="0">
+                <a:solidFill>
+                  <a:schemeClr val="tx1"/>
+                </a:solidFill>
+              </a:rPr>
+              <a:t>服装设计参数重表示</a:t>
+            </a:r>
+          </a:p>
+        </p:txBody>
+      </p:sp>
+      <p:sp>
+        <p:nvSpPr>
+          <p:cNvPr id="47" name="矩形 46">
+            <a:extLst>
+              <a:ext uri="{FF2B5EF4-FFF2-40B4-BE49-F238E27FC236}">
+                <a16:creationId xmlns:a16="http://schemas.microsoft.com/office/drawing/2014/main" id="{5AD9FF3D-7151-544F-A5F6-33508FBBABF4}"/>
+              </a:ext>
+            </a:extLst>
+          </p:cNvPr>
+          <p:cNvSpPr/>
+          <p:nvPr/>
+        </p:nvSpPr>
+        <p:spPr>
+          <a:xfrm>
+            <a:off x="6122394" y="4221644"/>
+            <a:ext cx="3090107" cy="288300"/>
+          </a:xfrm>
+          <a:prstGeom prst="rect">
+            <a:avLst/>
+          </a:prstGeom>
+          <a:noFill/>
+          <a:ln>
+            <a:noFill/>
+            <a:prstDash val="solid"/>
+          </a:ln>
+        </p:spPr>
+        <p:style>
+          <a:lnRef idx="2">
+            <a:schemeClr val="accent1">
+              <a:shade val="50000"/>
+            </a:schemeClr>
+          </a:lnRef>
+          <a:fillRef idx="1">
+            <a:schemeClr val="accent1"/>
+          </a:fillRef>
+          <a:effectRef idx="0">
+            <a:schemeClr val="accent1"/>
+          </a:effectRef>
+          <a:fontRef idx="minor">
+            <a:schemeClr val="lt1"/>
+          </a:fontRef>
+        </p:style>
+        <p:txBody>
+          <a:bodyPr rtlCol="0" anchor="ctr"/>
+          <a:lstStyle/>
+          <a:p>
+            <a:pPr algn="ctr"/>
+            <a:r>
+              <a:rPr kumimoji="1" lang="zh-CN" altLang="en-US" sz="1100" dirty="0">
+                <a:solidFill>
+                  <a:schemeClr val="tx1"/>
+                </a:solidFill>
+              </a:rPr>
+              <a:t>几何先验驱动多模态推理</a:t>
+            </a:r>
+          </a:p>
+        </p:txBody>
+      </p:sp>
+      <p:sp>
+        <p:nvSpPr>
+          <p:cNvPr id="48" name="矩形 47">
+            <a:extLst>
+              <a:ext uri="{FF2B5EF4-FFF2-40B4-BE49-F238E27FC236}">
+                <a16:creationId xmlns:a16="http://schemas.microsoft.com/office/drawing/2014/main" id="{03804F8B-075A-9440-AC49-21C41680CC31}"/>
+              </a:ext>
+            </a:extLst>
+          </p:cNvPr>
+          <p:cNvSpPr/>
+          <p:nvPr/>
+        </p:nvSpPr>
+        <p:spPr>
+          <a:xfrm>
+            <a:off x="2487582" y="5370230"/>
+            <a:ext cx="6785768" cy="363849"/>
           </a:xfrm>
           <a:prstGeom prst="rect">
             <a:avLst/>
@@ -5000,7 +4988,7 @@
         </p:nvSpPr>
         <p:spPr>
           <a:xfrm>
-            <a:off x="3954342" y="4750926"/>
+            <a:off x="3954342" y="4577021"/>
             <a:ext cx="259553" cy="180790"/>
           </a:xfrm>
           <a:prstGeom prst="downArrow">
@@ -5049,7 +5037,7 @@
         </p:nvSpPr>
         <p:spPr>
           <a:xfrm>
-            <a:off x="7589088" y="4754254"/>
+            <a:off x="7589088" y="4580349"/>
             <a:ext cx="259553" cy="180790"/>
           </a:xfrm>
           <a:prstGeom prst="downArrow">
@@ -5098,7 +5086,7 @@
         </p:nvSpPr>
         <p:spPr>
           <a:xfrm>
-            <a:off x="7589088" y="5334845"/>
+            <a:off x="7589088" y="5172160"/>
             <a:ext cx="259553" cy="180790"/>
           </a:xfrm>
           <a:prstGeom prst="downArrow">
@@ -5147,7 +5135,7 @@
         </p:nvSpPr>
         <p:spPr>
           <a:xfrm>
-            <a:off x="3954341" y="5347067"/>
+            <a:off x="3954341" y="5172160"/>
             <a:ext cx="259553" cy="180790"/>
           </a:xfrm>
           <a:prstGeom prst="downArrow">

--- a/main/chapter1/figures/chapter1.pptx
+++ b/main/chapter1/figures/chapter1.pptx
@@ -259,7 +259,7 @@
           <a:p>
             <a:fld id="{C4469FB2-7BD2-D646-BFBD-5C1D555F6E84}" type="datetimeFigureOut">
               <a:rPr kumimoji="1" lang="zh-CN" altLang="en-US" smtClean="0"/>
-              <a:t>2026/3/29</a:t>
+              <a:t>2026/4/6</a:t>
             </a:fld>
             <a:endParaRPr kumimoji="1" lang="zh-CN" altLang="en-US"/>
           </a:p>
@@ -457,7 +457,7 @@
           <a:p>
             <a:fld id="{C4469FB2-7BD2-D646-BFBD-5C1D555F6E84}" type="datetimeFigureOut">
               <a:rPr kumimoji="1" lang="zh-CN" altLang="en-US" smtClean="0"/>
-              <a:t>2026/3/29</a:t>
+              <a:t>2026/4/6</a:t>
             </a:fld>
             <a:endParaRPr kumimoji="1" lang="zh-CN" altLang="en-US"/>
           </a:p>
@@ -665,7 +665,7 @@
           <a:p>
             <a:fld id="{C4469FB2-7BD2-D646-BFBD-5C1D555F6E84}" type="datetimeFigureOut">
               <a:rPr kumimoji="1" lang="zh-CN" altLang="en-US" smtClean="0"/>
-              <a:t>2026/3/29</a:t>
+              <a:t>2026/4/6</a:t>
             </a:fld>
             <a:endParaRPr kumimoji="1" lang="zh-CN" altLang="en-US"/>
           </a:p>
@@ -863,7 +863,7 @@
           <a:p>
             <a:fld id="{C4469FB2-7BD2-D646-BFBD-5C1D555F6E84}" type="datetimeFigureOut">
               <a:rPr kumimoji="1" lang="zh-CN" altLang="en-US" smtClean="0"/>
-              <a:t>2026/3/29</a:t>
+              <a:t>2026/4/6</a:t>
             </a:fld>
             <a:endParaRPr kumimoji="1" lang="zh-CN" altLang="en-US"/>
           </a:p>
@@ -1138,7 +1138,7 @@
           <a:p>
             <a:fld id="{C4469FB2-7BD2-D646-BFBD-5C1D555F6E84}" type="datetimeFigureOut">
               <a:rPr kumimoji="1" lang="zh-CN" altLang="en-US" smtClean="0"/>
-              <a:t>2026/3/29</a:t>
+              <a:t>2026/4/6</a:t>
             </a:fld>
             <a:endParaRPr kumimoji="1" lang="zh-CN" altLang="en-US"/>
           </a:p>
@@ -1403,7 +1403,7 @@
           <a:p>
             <a:fld id="{C4469FB2-7BD2-D646-BFBD-5C1D555F6E84}" type="datetimeFigureOut">
               <a:rPr kumimoji="1" lang="zh-CN" altLang="en-US" smtClean="0"/>
-              <a:t>2026/3/29</a:t>
+              <a:t>2026/4/6</a:t>
             </a:fld>
             <a:endParaRPr kumimoji="1" lang="zh-CN" altLang="en-US"/>
           </a:p>
@@ -1815,7 +1815,7 @@
           <a:p>
             <a:fld id="{C4469FB2-7BD2-D646-BFBD-5C1D555F6E84}" type="datetimeFigureOut">
               <a:rPr kumimoji="1" lang="zh-CN" altLang="en-US" smtClean="0"/>
-              <a:t>2026/3/29</a:t>
+              <a:t>2026/4/6</a:t>
             </a:fld>
             <a:endParaRPr kumimoji="1" lang="zh-CN" altLang="en-US"/>
           </a:p>
@@ -1956,7 +1956,7 @@
           <a:p>
             <a:fld id="{C4469FB2-7BD2-D646-BFBD-5C1D555F6E84}" type="datetimeFigureOut">
               <a:rPr kumimoji="1" lang="zh-CN" altLang="en-US" smtClean="0"/>
-              <a:t>2026/3/29</a:t>
+              <a:t>2026/4/6</a:t>
             </a:fld>
             <a:endParaRPr kumimoji="1" lang="zh-CN" altLang="en-US"/>
           </a:p>
@@ -2069,7 +2069,7 @@
           <a:p>
             <a:fld id="{C4469FB2-7BD2-D646-BFBD-5C1D555F6E84}" type="datetimeFigureOut">
               <a:rPr kumimoji="1" lang="zh-CN" altLang="en-US" smtClean="0"/>
-              <a:t>2026/3/29</a:t>
+              <a:t>2026/4/6</a:t>
             </a:fld>
             <a:endParaRPr kumimoji="1" lang="zh-CN" altLang="en-US"/>
           </a:p>
@@ -2380,7 +2380,7 @@
           <a:p>
             <a:fld id="{C4469FB2-7BD2-D646-BFBD-5C1D555F6E84}" type="datetimeFigureOut">
               <a:rPr kumimoji="1" lang="zh-CN" altLang="en-US" smtClean="0"/>
-              <a:t>2026/3/29</a:t>
+              <a:t>2026/4/6</a:t>
             </a:fld>
             <a:endParaRPr kumimoji="1" lang="zh-CN" altLang="en-US"/>
           </a:p>
@@ -2668,7 +2668,7 @@
           <a:p>
             <a:fld id="{C4469FB2-7BD2-D646-BFBD-5C1D555F6E84}" type="datetimeFigureOut">
               <a:rPr kumimoji="1" lang="zh-CN" altLang="en-US" smtClean="0"/>
-              <a:t>2026/3/29</a:t>
+              <a:t>2026/4/6</a:t>
             </a:fld>
             <a:endParaRPr kumimoji="1" lang="zh-CN" altLang="en-US"/>
           </a:p>
@@ -2909,7 +2909,7 @@
           <a:p>
             <a:fld id="{C4469FB2-7BD2-D646-BFBD-5C1D555F6E84}" type="datetimeFigureOut">
               <a:rPr kumimoji="1" lang="zh-CN" altLang="en-US" smtClean="0"/>
-              <a:t>2026/3/29</a:t>
+              <a:t>2026/4/6</a:t>
             </a:fld>
             <a:endParaRPr kumimoji="1" lang="zh-CN" altLang="en-US"/>
           </a:p>
@@ -3375,7 +3375,7 @@
             <a:pPr algn="ctr"/>
             <a:r>
               <a:rPr kumimoji="1" lang="zh-CN" altLang="en-US" dirty="0"/>
-              <a:t>基于几何先验的三维人体重建与服装生成方法研究</a:t>
+              <a:t>基于几何先验的三维人体重建与服装生成研究</a:t>
             </a:r>
           </a:p>
         </p:txBody>
@@ -3682,7 +3682,7 @@
             <a:pPr algn="ctr"/>
             <a:r>
               <a:rPr kumimoji="1" lang="zh-CN" altLang="en-US" sz="1400" dirty="0"/>
-              <a:t>服装生成缺乏人体几何感知</a:t>
+              <a:t>服装结构与穿着者体型不适配</a:t>
             </a:r>
           </a:p>
         </p:txBody>

--- a/main/chapter1/figures/chapter1.pptx
+++ b/main/chapter1/figures/chapter1.pptx
@@ -5,7 +5,7 @@
     <p:sldMasterId id="2147483648" r:id="rId1"/>
   </p:sldMasterIdLst>
   <p:sldIdLst>
-    <p:sldId id="256" r:id="rId2"/>
+    <p:sldId id="257" r:id="rId2"/>
   </p:sldIdLst>
   <p:sldSz cx="12192000" cy="6858000"/>
   <p:notesSz cx="6858000" cy="9144000"/>
@@ -259,7 +259,7 @@
           <a:p>
             <a:fld id="{C4469FB2-7BD2-D646-BFBD-5C1D555F6E84}" type="datetimeFigureOut">
               <a:rPr kumimoji="1" lang="zh-CN" altLang="en-US" smtClean="0"/>
-              <a:t>2026/4/6</a:t>
+              <a:t>2026/4/11</a:t>
             </a:fld>
             <a:endParaRPr kumimoji="1" lang="zh-CN" altLang="en-US"/>
           </a:p>
@@ -457,7 +457,7 @@
           <a:p>
             <a:fld id="{C4469FB2-7BD2-D646-BFBD-5C1D555F6E84}" type="datetimeFigureOut">
               <a:rPr kumimoji="1" lang="zh-CN" altLang="en-US" smtClean="0"/>
-              <a:t>2026/4/6</a:t>
+              <a:t>2026/4/11</a:t>
             </a:fld>
             <a:endParaRPr kumimoji="1" lang="zh-CN" altLang="en-US"/>
           </a:p>
@@ -665,7 +665,7 @@
           <a:p>
             <a:fld id="{C4469FB2-7BD2-D646-BFBD-5C1D555F6E84}" type="datetimeFigureOut">
               <a:rPr kumimoji="1" lang="zh-CN" altLang="en-US" smtClean="0"/>
-              <a:t>2026/4/6</a:t>
+              <a:t>2026/4/11</a:t>
             </a:fld>
             <a:endParaRPr kumimoji="1" lang="zh-CN" altLang="en-US"/>
           </a:p>
@@ -863,7 +863,7 @@
           <a:p>
             <a:fld id="{C4469FB2-7BD2-D646-BFBD-5C1D555F6E84}" type="datetimeFigureOut">
               <a:rPr kumimoji="1" lang="zh-CN" altLang="en-US" smtClean="0"/>
-              <a:t>2026/4/6</a:t>
+              <a:t>2026/4/11</a:t>
             </a:fld>
             <a:endParaRPr kumimoji="1" lang="zh-CN" altLang="en-US"/>
           </a:p>
@@ -1138,7 +1138,7 @@
           <a:p>
             <a:fld id="{C4469FB2-7BD2-D646-BFBD-5C1D555F6E84}" type="datetimeFigureOut">
               <a:rPr kumimoji="1" lang="zh-CN" altLang="en-US" smtClean="0"/>
-              <a:t>2026/4/6</a:t>
+              <a:t>2026/4/11</a:t>
             </a:fld>
             <a:endParaRPr kumimoji="1" lang="zh-CN" altLang="en-US"/>
           </a:p>
@@ -1403,7 +1403,7 @@
           <a:p>
             <a:fld id="{C4469FB2-7BD2-D646-BFBD-5C1D555F6E84}" type="datetimeFigureOut">
               <a:rPr kumimoji="1" lang="zh-CN" altLang="en-US" smtClean="0"/>
-              <a:t>2026/4/6</a:t>
+              <a:t>2026/4/11</a:t>
             </a:fld>
             <a:endParaRPr kumimoji="1" lang="zh-CN" altLang="en-US"/>
           </a:p>
@@ -1815,7 +1815,7 @@
           <a:p>
             <a:fld id="{C4469FB2-7BD2-D646-BFBD-5C1D555F6E84}" type="datetimeFigureOut">
               <a:rPr kumimoji="1" lang="zh-CN" altLang="en-US" smtClean="0"/>
-              <a:t>2026/4/6</a:t>
+              <a:t>2026/4/11</a:t>
             </a:fld>
             <a:endParaRPr kumimoji="1" lang="zh-CN" altLang="en-US"/>
           </a:p>
@@ -1956,7 +1956,7 @@
           <a:p>
             <a:fld id="{C4469FB2-7BD2-D646-BFBD-5C1D555F6E84}" type="datetimeFigureOut">
               <a:rPr kumimoji="1" lang="zh-CN" altLang="en-US" smtClean="0"/>
-              <a:t>2026/4/6</a:t>
+              <a:t>2026/4/11</a:t>
             </a:fld>
             <a:endParaRPr kumimoji="1" lang="zh-CN" altLang="en-US"/>
           </a:p>
@@ -2069,7 +2069,7 @@
           <a:p>
             <a:fld id="{C4469FB2-7BD2-D646-BFBD-5C1D555F6E84}" type="datetimeFigureOut">
               <a:rPr kumimoji="1" lang="zh-CN" altLang="en-US" smtClean="0"/>
-              <a:t>2026/4/6</a:t>
+              <a:t>2026/4/11</a:t>
             </a:fld>
             <a:endParaRPr kumimoji="1" lang="zh-CN" altLang="en-US"/>
           </a:p>
@@ -2380,7 +2380,7 @@
           <a:p>
             <a:fld id="{C4469FB2-7BD2-D646-BFBD-5C1D555F6E84}" type="datetimeFigureOut">
               <a:rPr kumimoji="1" lang="zh-CN" altLang="en-US" smtClean="0"/>
-              <a:t>2026/4/6</a:t>
+              <a:t>2026/4/11</a:t>
             </a:fld>
             <a:endParaRPr kumimoji="1" lang="zh-CN" altLang="en-US"/>
           </a:p>
@@ -2668,7 +2668,7 @@
           <a:p>
             <a:fld id="{C4469FB2-7BD2-D646-BFBD-5C1D555F6E84}" type="datetimeFigureOut">
               <a:rPr kumimoji="1" lang="zh-CN" altLang="en-US" smtClean="0"/>
-              <a:t>2026/4/6</a:t>
+              <a:t>2026/4/11</a:t>
             </a:fld>
             <a:endParaRPr kumimoji="1" lang="zh-CN" altLang="en-US"/>
           </a:p>
@@ -2909,7 +2909,7 @@
           <a:p>
             <a:fld id="{C4469FB2-7BD2-D646-BFBD-5C1D555F6E84}" type="datetimeFigureOut">
               <a:rPr kumimoji="1" lang="zh-CN" altLang="en-US" smtClean="0"/>
-              <a:t>2026/4/6</a:t>
+              <a:t>2026/4/11</a:t>
             </a:fld>
             <a:endParaRPr kumimoji="1" lang="zh-CN" altLang="en-US"/>
           </a:p>
@@ -3326,6 +3326,237 @@
           <a:chExt cx="0" cy="0"/>
         </a:xfrm>
       </p:grpSpPr>
+      <p:grpSp>
+        <p:nvGrpSpPr>
+          <p:cNvPr id="38" name="组合 37">
+            <a:extLst>
+              <a:ext uri="{FF2B5EF4-FFF2-40B4-BE49-F238E27FC236}">
+                <a16:creationId xmlns:a16="http://schemas.microsoft.com/office/drawing/2014/main" id="{5940F06E-4D47-184F-8EF4-77BAB8B41B60}"/>
+              </a:ext>
+            </a:extLst>
+          </p:cNvPr>
+          <p:cNvGrpSpPr/>
+          <p:nvPr/>
+        </p:nvGrpSpPr>
+        <p:grpSpPr>
+          <a:xfrm>
+            <a:off x="3790241" y="1543093"/>
+            <a:ext cx="1306525" cy="815710"/>
+            <a:chOff x="6440852" y="2126604"/>
+            <a:chExt cx="5255404" cy="3118944"/>
+          </a:xfrm>
+        </p:grpSpPr>
+        <p:pic>
+          <p:nvPicPr>
+            <p:cNvPr id="42" name="图片 41">
+              <a:extLst>
+                <a:ext uri="{FF2B5EF4-FFF2-40B4-BE49-F238E27FC236}">
+                  <a16:creationId xmlns:a16="http://schemas.microsoft.com/office/drawing/2014/main" id="{F7EF7C6A-B617-C347-B2CD-A40683ADFF05}"/>
+                </a:ext>
+              </a:extLst>
+            </p:cNvPr>
+            <p:cNvPicPr>
+              <a:picLocks noChangeAspect="1"/>
+            </p:cNvPicPr>
+            <p:nvPr/>
+          </p:nvPicPr>
+          <p:blipFill>
+            <a:blip r:embed="rId2"/>
+            <a:stretch>
+              <a:fillRect/>
+            </a:stretch>
+          </p:blipFill>
+          <p:spPr>
+            <a:xfrm>
+              <a:off x="6440852" y="2211495"/>
+              <a:ext cx="2620590" cy="2762186"/>
+            </a:xfrm>
+            <a:prstGeom prst="rect">
+              <a:avLst/>
+            </a:prstGeom>
+            <a:noFill/>
+            <a:ln w="12700">
+              <a:solidFill>
+                <a:srgbClr val="0070C0"/>
+              </a:solidFill>
+            </a:ln>
+          </p:spPr>
+        </p:pic>
+        <p:pic>
+          <p:nvPicPr>
+            <p:cNvPr id="53" name="图片 52">
+              <a:extLst>
+                <a:ext uri="{FF2B5EF4-FFF2-40B4-BE49-F238E27FC236}">
+                  <a16:creationId xmlns:a16="http://schemas.microsoft.com/office/drawing/2014/main" id="{7066BF8F-74A8-EB41-B4F1-F08A7234456C}"/>
+                </a:ext>
+              </a:extLst>
+            </p:cNvPr>
+            <p:cNvPicPr>
+              <a:picLocks noChangeAspect="1"/>
+            </p:cNvPicPr>
+            <p:nvPr/>
+          </p:nvPicPr>
+          <p:blipFill rotWithShape="1">
+            <a:blip r:embed="rId3"/>
+            <a:srcRect t="6931"/>
+            <a:stretch/>
+          </p:blipFill>
+          <p:spPr>
+            <a:xfrm>
+              <a:off x="9280802" y="2126604"/>
+              <a:ext cx="2415454" cy="3118944"/>
+            </a:xfrm>
+            <a:prstGeom prst="rect">
+              <a:avLst/>
+            </a:prstGeom>
+            <a:ln w="12700">
+              <a:noFill/>
+            </a:ln>
+          </p:spPr>
+        </p:pic>
+        <p:sp>
+          <p:nvSpPr>
+            <p:cNvPr id="54" name="矩形: 圆角 97">
+              <a:extLst>
+                <a:ext uri="{FF2B5EF4-FFF2-40B4-BE49-F238E27FC236}">
+                  <a16:creationId xmlns:a16="http://schemas.microsoft.com/office/drawing/2014/main" id="{AB84F1CF-DADE-634C-BCBA-1C73FFC49C2B}"/>
+                </a:ext>
+              </a:extLst>
+            </p:cNvPr>
+            <p:cNvSpPr/>
+            <p:nvPr/>
+          </p:nvSpPr>
+          <p:spPr>
+            <a:xfrm>
+              <a:off x="10274717" y="2552522"/>
+              <a:ext cx="777600" cy="782819"/>
+            </a:xfrm>
+            <a:prstGeom prst="roundRect">
+              <a:avLst>
+                <a:gd name="adj" fmla="val 0"/>
+              </a:avLst>
+            </a:prstGeom>
+            <a:noFill/>
+            <a:ln w="12700">
+              <a:solidFill>
+                <a:srgbClr val="0070C0"/>
+              </a:solidFill>
+            </a:ln>
+          </p:spPr>
+          <p:style>
+            <a:lnRef idx="2">
+              <a:schemeClr val="accent1">
+                <a:shade val="50000"/>
+              </a:schemeClr>
+            </a:lnRef>
+            <a:fillRef idx="1">
+              <a:schemeClr val="accent1"/>
+            </a:fillRef>
+            <a:effectRef idx="0">
+              <a:schemeClr val="accent1"/>
+            </a:effectRef>
+            <a:fontRef idx="minor">
+              <a:schemeClr val="lt1"/>
+            </a:fontRef>
+          </p:style>
+          <p:txBody>
+            <a:bodyPr rtlCol="0" anchor="ctr"/>
+            <a:lstStyle/>
+            <a:p>
+              <a:pPr algn="ctr"/>
+              <a:endParaRPr lang="zh-CN" altLang="en-US" b="1">
+                <a:solidFill>
+                  <a:schemeClr val="tx1"/>
+                </a:solidFill>
+              </a:endParaRPr>
+            </a:p>
+          </p:txBody>
+        </p:sp>
+        <p:cxnSp>
+          <p:nvCxnSpPr>
+            <p:cNvPr id="55" name="直接箭头连接符 102">
+              <a:extLst>
+                <a:ext uri="{FF2B5EF4-FFF2-40B4-BE49-F238E27FC236}">
+                  <a16:creationId xmlns:a16="http://schemas.microsoft.com/office/drawing/2014/main" id="{BBC3491B-ECE9-C64F-96D4-65A93E94D5C7}"/>
+                </a:ext>
+              </a:extLst>
+            </p:cNvPr>
+            <p:cNvCxnSpPr>
+              <a:cxnSpLocks/>
+            </p:cNvCxnSpPr>
+            <p:nvPr/>
+          </p:nvCxnSpPr>
+          <p:spPr>
+            <a:xfrm flipH="1" flipV="1">
+              <a:off x="9081502" y="2202485"/>
+              <a:ext cx="1193217" cy="350037"/>
+            </a:xfrm>
+            <a:prstGeom prst="straightConnector1">
+              <a:avLst/>
+            </a:prstGeom>
+            <a:ln w="12700">
+              <a:prstDash val="dash"/>
+              <a:tailEnd type="none"/>
+            </a:ln>
+          </p:spPr>
+          <p:style>
+            <a:lnRef idx="1">
+              <a:schemeClr val="accent1"/>
+            </a:lnRef>
+            <a:fillRef idx="0">
+              <a:schemeClr val="accent1"/>
+            </a:fillRef>
+            <a:effectRef idx="0">
+              <a:schemeClr val="accent1"/>
+            </a:effectRef>
+            <a:fontRef idx="minor">
+              <a:schemeClr val="tx1"/>
+            </a:fontRef>
+          </p:style>
+        </p:cxnSp>
+        <p:cxnSp>
+          <p:nvCxnSpPr>
+            <p:cNvPr id="56" name="直接箭头连接符 103">
+              <a:extLst>
+                <a:ext uri="{FF2B5EF4-FFF2-40B4-BE49-F238E27FC236}">
+                  <a16:creationId xmlns:a16="http://schemas.microsoft.com/office/drawing/2014/main" id="{C61BC30C-1028-B347-9D19-30421F9C0F27}"/>
+                </a:ext>
+              </a:extLst>
+            </p:cNvPr>
+            <p:cNvCxnSpPr>
+              <a:cxnSpLocks/>
+            </p:cNvCxnSpPr>
+            <p:nvPr/>
+          </p:nvCxnSpPr>
+          <p:spPr>
+            <a:xfrm flipH="1">
+              <a:off x="9081502" y="3335341"/>
+              <a:ext cx="1193217" cy="1644147"/>
+            </a:xfrm>
+            <a:prstGeom prst="straightConnector1">
+              <a:avLst/>
+            </a:prstGeom>
+            <a:ln w="12700">
+              <a:prstDash val="dash"/>
+              <a:tailEnd type="none"/>
+            </a:ln>
+          </p:spPr>
+          <p:style>
+            <a:lnRef idx="1">
+              <a:schemeClr val="accent1"/>
+            </a:lnRef>
+            <a:fillRef idx="0">
+              <a:schemeClr val="accent1"/>
+            </a:fillRef>
+            <a:effectRef idx="0">
+              <a:schemeClr val="accent1"/>
+            </a:effectRef>
+            <a:fontRef idx="minor">
+              <a:schemeClr val="tx1"/>
+            </a:fontRef>
+          </p:style>
+        </p:cxnSp>
+      </p:grpSp>
       <p:sp>
         <p:nvSpPr>
           <p:cNvPr id="4" name="矩形 3">
@@ -3340,16 +3571,14 @@
         </p:nvSpPr>
         <p:spPr>
           <a:xfrm>
-            <a:off x="2513273" y="729093"/>
-            <a:ext cx="6756722" cy="439260"/>
+            <a:off x="2487961" y="873746"/>
+            <a:ext cx="5284454" cy="366804"/>
           </a:xfrm>
           <a:prstGeom prst="rect">
             <a:avLst/>
           </a:prstGeom>
           <a:solidFill>
-            <a:schemeClr val="accent5">
-              <a:lumMod val="50000"/>
-            </a:schemeClr>
+            <a:srgbClr val="CCE9FF"/>
           </a:solidFill>
         </p:spPr>
         <p:style>
@@ -3374,7 +3603,11 @@
           <a:p>
             <a:pPr algn="ctr"/>
             <a:r>
-              <a:rPr kumimoji="1" lang="zh-CN" altLang="en-US" dirty="0"/>
+              <a:rPr kumimoji="1" lang="zh-CN" altLang="en-US" sz="1400" b="1" dirty="0">
+                <a:solidFill>
+                  <a:schemeClr val="tx1"/>
+                </a:solidFill>
+              </a:rPr>
               <a:t>基于几何先验的三维人体重建与服装生成研究</a:t>
             </a:r>
           </a:p>
@@ -3394,8 +3627,8 @@
         </p:nvSpPr>
         <p:spPr>
           <a:xfrm>
-            <a:off x="2516627" y="1308076"/>
-            <a:ext cx="3349379" cy="956116"/>
+            <a:off x="2487961" y="1308075"/>
+            <a:ext cx="2608805" cy="1223909"/>
           </a:xfrm>
           <a:prstGeom prst="rect">
             <a:avLst/>
@@ -3429,7 +3662,7 @@
           <a:lstStyle/>
           <a:p>
             <a:pPr algn="ctr"/>
-            <a:endParaRPr kumimoji="1" lang="zh-CN" altLang="en-US"/>
+            <a:endParaRPr kumimoji="1" lang="zh-CN" altLang="en-US" b="1"/>
           </a:p>
         </p:txBody>
       </p:sp>
@@ -3447,8 +3680,8 @@
         </p:nvSpPr>
         <p:spPr>
           <a:xfrm>
-            <a:off x="1917699" y="1446464"/>
-            <a:ext cx="543739" cy="523220"/>
+            <a:off x="2186953" y="1434855"/>
+            <a:ext cx="360140" cy="830997"/>
           </a:xfrm>
           <a:prstGeom prst="rect">
             <a:avLst/>
@@ -3462,26 +3695,14 @@
           <a:lstStyle/>
           <a:p>
             <a:r>
-              <a:rPr kumimoji="1" lang="zh-CN" altLang="en-US" sz="1400" dirty="0">
-                <a:solidFill>
-                  <a:srgbClr val="002060"/>
-                </a:solidFill>
-              </a:rPr>
+              <a:rPr kumimoji="1" lang="zh-CN" altLang="en-US" sz="1200" b="1" dirty="0"/>
               <a:t>问题</a:t>
             </a:r>
-            <a:endParaRPr kumimoji="1" lang="en-US" altLang="zh-CN" sz="1400" dirty="0">
-              <a:solidFill>
-                <a:srgbClr val="002060"/>
-              </a:solidFill>
-            </a:endParaRPr>
-          </a:p>
-          <a:p>
-            <a:r>
-              <a:rPr kumimoji="1" lang="zh-CN" altLang="en-US" sz="1400" dirty="0">
-                <a:solidFill>
-                  <a:srgbClr val="002060"/>
-                </a:solidFill>
-              </a:rPr>
+            <a:endParaRPr kumimoji="1" lang="en-US" altLang="zh-CN" sz="1200" b="1" dirty="0"/>
+          </a:p>
+          <a:p>
+            <a:r>
+              <a:rPr kumimoji="1" lang="zh-CN" altLang="en-US" sz="1200" b="1" dirty="0"/>
               <a:t>挑战</a:t>
             </a:r>
           </a:p>
@@ -3489,10 +3710,10 @@
       </p:sp>
       <p:sp>
         <p:nvSpPr>
-          <p:cNvPr id="13" name="矩形 12">
-            <a:extLst>
-              <a:ext uri="{FF2B5EF4-FFF2-40B4-BE49-F238E27FC236}">
-                <a16:creationId xmlns:a16="http://schemas.microsoft.com/office/drawing/2014/main" id="{6298392B-9571-374C-AD46-ED0709A7F7A2}"/>
+          <p:cNvPr id="16" name="矩形 15">
+            <a:extLst>
+              <a:ext uri="{FF2B5EF4-FFF2-40B4-BE49-F238E27FC236}">
+                <a16:creationId xmlns:a16="http://schemas.microsoft.com/office/drawing/2014/main" id="{5157DD94-4954-BF43-B48A-41C650F63B56}"/>
               </a:ext>
             </a:extLst>
           </p:cNvPr>
@@ -3501,17 +3722,19 @@
         </p:nvSpPr>
         <p:spPr>
           <a:xfrm>
-            <a:off x="2516626" y="1308075"/>
-            <a:ext cx="3349379" cy="363849"/>
+            <a:off x="5162416" y="1309977"/>
+            <a:ext cx="2610000" cy="1220104"/>
           </a:xfrm>
           <a:prstGeom prst="rect">
             <a:avLst/>
           </a:prstGeom>
-          <a:solidFill>
-            <a:schemeClr val="accent5">
-              <a:lumMod val="50000"/>
-            </a:schemeClr>
-          </a:solidFill>
+          <a:noFill/>
+          <a:ln>
+            <a:solidFill>
+              <a:schemeClr val="tx1"/>
+            </a:solidFill>
+            <a:prstDash val="solid"/>
+          </a:ln>
         </p:spPr>
         <p:style>
           <a:lnRef idx="2">
@@ -3534,19 +3757,16 @@
           <a:lstStyle/>
           <a:p>
             <a:pPr algn="ctr"/>
-            <a:r>
-              <a:rPr kumimoji="1" lang="zh-CN" altLang="en-US" sz="1400" dirty="0"/>
-              <a:t>人体驱动时存在几何不一致性</a:t>
-            </a:r>
-          </a:p>
-        </p:txBody>
-      </p:sp>
-      <p:sp>
-        <p:nvSpPr>
-          <p:cNvPr id="15" name="文本框 14">
-            <a:extLst>
-              <a:ext uri="{FF2B5EF4-FFF2-40B4-BE49-F238E27FC236}">
-                <a16:creationId xmlns:a16="http://schemas.microsoft.com/office/drawing/2014/main" id="{BCB89BCB-96A7-F043-80A7-601B497E868C}"/>
+            <a:endParaRPr kumimoji="1" lang="zh-CN" altLang="en-US" b="1"/>
+          </a:p>
+        </p:txBody>
+      </p:sp>
+      <p:sp>
+        <p:nvSpPr>
+          <p:cNvPr id="21" name="文本框 20">
+            <a:extLst>
+              <a:ext uri="{FF2B5EF4-FFF2-40B4-BE49-F238E27FC236}">
+                <a16:creationId xmlns:a16="http://schemas.microsoft.com/office/drawing/2014/main" id="{D6F2C1C8-152A-4A4B-975E-0B0A305CDE75}"/>
               </a:ext>
             </a:extLst>
           </p:cNvPr>
@@ -3555,8 +3775,8 @@
         </p:nvSpPr>
         <p:spPr>
           <a:xfrm>
-            <a:off x="2605322" y="1725146"/>
-            <a:ext cx="3160410" cy="461665"/>
+            <a:off x="2160773" y="2644485"/>
+            <a:ext cx="332488" cy="461665"/>
           </a:xfrm>
           <a:prstGeom prst="rect">
             <a:avLst/>
@@ -3564,28 +3784,94 @@
           <a:noFill/>
         </p:spPr>
         <p:txBody>
-          <a:bodyPr wrap="square">
+          <a:bodyPr wrap="square" rtlCol="0">
             <a:spAutoFit/>
           </a:bodyPr>
           <a:lstStyle/>
           <a:p>
             <a:r>
-              <a:rPr lang="zh-CN" altLang="en-US" sz="1200" dirty="0"/>
-              <a:t>现有3DGS人体方法中高斯为无约束优化，与底层网格拓扑无关联，导致</a:t>
-            </a:r>
-            <a:r>
-              <a:rPr lang="zh-CN" altLang="en-US" sz="1200" b="1" dirty="0"/>
-              <a:t>驱动泛化性差</a:t>
-            </a:r>
-          </a:p>
-        </p:txBody>
-      </p:sp>
-      <p:sp>
-        <p:nvSpPr>
-          <p:cNvPr id="16" name="矩形 15">
-            <a:extLst>
-              <a:ext uri="{FF2B5EF4-FFF2-40B4-BE49-F238E27FC236}">
-                <a16:creationId xmlns:a16="http://schemas.microsoft.com/office/drawing/2014/main" id="{5157DD94-4954-BF43-B48A-41C650F63B56}"/>
+              <a:rPr kumimoji="1" lang="zh-CN" altLang="en-US" sz="1200" b="1" dirty="0"/>
+              <a:t>思路</a:t>
+            </a:r>
+          </a:p>
+        </p:txBody>
+      </p:sp>
+      <p:sp>
+        <p:nvSpPr>
+          <p:cNvPr id="22" name="文本框 21">
+            <a:extLst>
+              <a:ext uri="{FF2B5EF4-FFF2-40B4-BE49-F238E27FC236}">
+                <a16:creationId xmlns:a16="http://schemas.microsoft.com/office/drawing/2014/main" id="{AB436BA9-BD19-0D44-94E4-6CABAD57EF37}"/>
+              </a:ext>
+            </a:extLst>
+          </p:cNvPr>
+          <p:cNvSpPr txBox="1"/>
+          <p:nvPr/>
+        </p:nvSpPr>
+        <p:spPr>
+          <a:xfrm>
+            <a:off x="2175378" y="3651005"/>
+            <a:ext cx="296160" cy="830997"/>
+          </a:xfrm>
+          <a:prstGeom prst="rect">
+            <a:avLst/>
+          </a:prstGeom>
+          <a:noFill/>
+        </p:spPr>
+        <p:txBody>
+          <a:bodyPr wrap="square" rtlCol="0">
+            <a:spAutoFit/>
+          </a:bodyPr>
+          <a:lstStyle/>
+          <a:p>
+            <a:r>
+              <a:rPr kumimoji="1" lang="zh-CN" altLang="en-US" sz="1200" b="1" dirty="0"/>
+              <a:t>研究内容</a:t>
+            </a:r>
+          </a:p>
+        </p:txBody>
+      </p:sp>
+      <p:sp>
+        <p:nvSpPr>
+          <p:cNvPr id="23" name="文本框 22">
+            <a:extLst>
+              <a:ext uri="{FF2B5EF4-FFF2-40B4-BE49-F238E27FC236}">
+                <a16:creationId xmlns:a16="http://schemas.microsoft.com/office/drawing/2014/main" id="{581880DE-CE26-C944-8830-B479173C0A17}"/>
+              </a:ext>
+            </a:extLst>
+          </p:cNvPr>
+          <p:cNvSpPr txBox="1"/>
+          <p:nvPr/>
+        </p:nvSpPr>
+        <p:spPr>
+          <a:xfrm>
+            <a:off x="2171233" y="4726049"/>
+            <a:ext cx="344526" cy="461665"/>
+          </a:xfrm>
+          <a:prstGeom prst="rect">
+            <a:avLst/>
+          </a:prstGeom>
+          <a:noFill/>
+        </p:spPr>
+        <p:txBody>
+          <a:bodyPr wrap="square" rtlCol="0">
+            <a:spAutoFit/>
+          </a:bodyPr>
+          <a:lstStyle/>
+          <a:p>
+            <a:r>
+              <a:rPr kumimoji="1" lang="zh-CN" altLang="en-US" sz="1200" b="1" dirty="0"/>
+              <a:t>目标</a:t>
+            </a:r>
+          </a:p>
+        </p:txBody>
+      </p:sp>
+      <p:sp>
+        <p:nvSpPr>
+          <p:cNvPr id="24" name="矩形 23">
+            <a:extLst>
+              <a:ext uri="{FF2B5EF4-FFF2-40B4-BE49-F238E27FC236}">
+                <a16:creationId xmlns:a16="http://schemas.microsoft.com/office/drawing/2014/main" id="{989FAB68-41C5-F643-B9EC-D8A9F8D3BF11}"/>
               </a:ext>
             </a:extLst>
           </p:cNvPr>
@@ -3594,8 +3880,8 @@
         </p:nvSpPr>
         <p:spPr>
           <a:xfrm>
-            <a:off x="5988517" y="1310126"/>
-            <a:ext cx="3284834" cy="956116"/>
+            <a:off x="2495550" y="3289086"/>
+            <a:ext cx="2595563" cy="1324752"/>
           </a:xfrm>
           <a:prstGeom prst="rect">
             <a:avLst/>
@@ -3629,16 +3915,16 @@
           <a:lstStyle/>
           <a:p>
             <a:pPr algn="ctr"/>
-            <a:endParaRPr kumimoji="1" lang="zh-CN" altLang="en-US"/>
-          </a:p>
-        </p:txBody>
-      </p:sp>
-      <p:sp>
-        <p:nvSpPr>
-          <p:cNvPr id="17" name="矩形 16">
-            <a:extLst>
-              <a:ext uri="{FF2B5EF4-FFF2-40B4-BE49-F238E27FC236}">
-                <a16:creationId xmlns:a16="http://schemas.microsoft.com/office/drawing/2014/main" id="{C4A406CE-C199-8146-9772-97C416362250}"/>
+            <a:endParaRPr kumimoji="1" lang="zh-CN" altLang="en-US" b="1"/>
+          </a:p>
+        </p:txBody>
+      </p:sp>
+      <p:sp>
+        <p:nvSpPr>
+          <p:cNvPr id="25" name="矩形 24">
+            <a:extLst>
+              <a:ext uri="{FF2B5EF4-FFF2-40B4-BE49-F238E27FC236}">
+                <a16:creationId xmlns:a16="http://schemas.microsoft.com/office/drawing/2014/main" id="{41C3218C-46B2-9E4D-B09A-FCEDD9869CB3}"/>
               </a:ext>
             </a:extLst>
           </p:cNvPr>
@@ -3647,17 +3933,18 @@
         </p:nvSpPr>
         <p:spPr>
           <a:xfrm>
-            <a:off x="5988516" y="1308075"/>
-            <a:ext cx="3284833" cy="363849"/>
+            <a:off x="2506471" y="3302797"/>
+            <a:ext cx="2579295" cy="388712"/>
           </a:xfrm>
           <a:prstGeom prst="rect">
             <a:avLst/>
           </a:prstGeom>
           <a:solidFill>
-            <a:schemeClr val="accent5">
-              <a:lumMod val="50000"/>
-            </a:schemeClr>
+            <a:srgbClr val="CCE9FF"/>
           </a:solidFill>
+          <a:ln>
+            <a:noFill/>
+          </a:ln>
         </p:spPr>
         <p:style>
           <a:lnRef idx="2">
@@ -3681,174 +3968,38 @@
           <a:p>
             <a:pPr algn="ctr"/>
             <a:r>
-              <a:rPr kumimoji="1" lang="zh-CN" altLang="en-US" sz="1400" dirty="0"/>
-              <a:t>服装结构与穿着者体型不适配</a:t>
-            </a:r>
-          </a:p>
-        </p:txBody>
-      </p:sp>
-      <p:sp>
-        <p:nvSpPr>
-          <p:cNvPr id="18" name="文本框 17">
-            <a:extLst>
-              <a:ext uri="{FF2B5EF4-FFF2-40B4-BE49-F238E27FC236}">
-                <a16:creationId xmlns:a16="http://schemas.microsoft.com/office/drawing/2014/main" id="{FC18C682-CA5B-3E4E-8FBB-9B3D8D8A8FDF}"/>
-              </a:ext>
-            </a:extLst>
-          </p:cNvPr>
-          <p:cNvSpPr txBox="1"/>
-          <p:nvPr/>
-        </p:nvSpPr>
-        <p:spPr>
-          <a:xfrm>
-            <a:off x="6023028" y="1752139"/>
-            <a:ext cx="3235470" cy="461665"/>
-          </a:xfrm>
-          <a:prstGeom prst="rect">
-            <a:avLst/>
-          </a:prstGeom>
-          <a:noFill/>
-        </p:spPr>
-        <p:txBody>
-          <a:bodyPr wrap="square">
-            <a:spAutoFit/>
-          </a:bodyPr>
-          <a:lstStyle/>
-          <a:p>
-            <a:r>
-              <a:rPr lang="zh-CN" altLang="en-US" sz="1200" dirty="0"/>
-              <a:t>现有方法仅凭图像预测服装参数，缺乏穿着者的显式几何约束，生成</a:t>
-            </a:r>
-            <a:r>
-              <a:rPr lang="zh-CN" altLang="en-US" sz="1200" b="1" dirty="0"/>
-              <a:t>服装几何结构失真</a:t>
-            </a:r>
-          </a:p>
-        </p:txBody>
-      </p:sp>
-      <p:sp>
-        <p:nvSpPr>
-          <p:cNvPr id="21" name="文本框 20">
-            <a:extLst>
-              <a:ext uri="{FF2B5EF4-FFF2-40B4-BE49-F238E27FC236}">
-                <a16:creationId xmlns:a16="http://schemas.microsoft.com/office/drawing/2014/main" id="{D6F2C1C8-152A-4A4B-975E-0B0A305CDE75}"/>
-              </a:ext>
-            </a:extLst>
-          </p:cNvPr>
-          <p:cNvSpPr txBox="1"/>
-          <p:nvPr/>
-        </p:nvSpPr>
-        <p:spPr>
-          <a:xfrm>
-            <a:off x="1895259" y="2474497"/>
-            <a:ext cx="543739" cy="523220"/>
-          </a:xfrm>
-          <a:prstGeom prst="rect">
-            <a:avLst/>
-          </a:prstGeom>
-          <a:noFill/>
-        </p:spPr>
-        <p:txBody>
-          <a:bodyPr wrap="square" rtlCol="0">
-            <a:spAutoFit/>
-          </a:bodyPr>
-          <a:lstStyle/>
-          <a:p>
-            <a:r>
-              <a:rPr kumimoji="1" lang="zh-CN" altLang="en-US" sz="1400" dirty="0">
+              <a:rPr kumimoji="1" lang="zh-CN" altLang="en-US" sz="1050" b="1" dirty="0">
                 <a:solidFill>
-                  <a:srgbClr val="002060"/>
+                  <a:schemeClr val="tx1"/>
                 </a:solidFill>
               </a:rPr>
-              <a:t>研究思路</a:t>
-            </a:r>
-          </a:p>
-        </p:txBody>
-      </p:sp>
-      <p:sp>
-        <p:nvSpPr>
-          <p:cNvPr id="22" name="文本框 21">
-            <a:extLst>
-              <a:ext uri="{FF2B5EF4-FFF2-40B4-BE49-F238E27FC236}">
-                <a16:creationId xmlns:a16="http://schemas.microsoft.com/office/drawing/2014/main" id="{AB436BA9-BD19-0D44-94E4-6CABAD57EF37}"/>
-              </a:ext>
-            </a:extLst>
-          </p:cNvPr>
-          <p:cNvSpPr txBox="1"/>
-          <p:nvPr/>
-        </p:nvSpPr>
-        <p:spPr>
-          <a:xfrm>
-            <a:off x="1895260" y="3643378"/>
-            <a:ext cx="543738" cy="523220"/>
-          </a:xfrm>
-          <a:prstGeom prst="rect">
-            <a:avLst/>
-          </a:prstGeom>
-          <a:noFill/>
-        </p:spPr>
-        <p:txBody>
-          <a:bodyPr wrap="square" rtlCol="0">
-            <a:spAutoFit/>
-          </a:bodyPr>
-          <a:lstStyle/>
-          <a:p>
-            <a:r>
-              <a:rPr kumimoji="1" lang="zh-CN" altLang="en-US" sz="1400" dirty="0">
+              <a:t>基于拓扑绑定的三维高斯人体重建</a:t>
+            </a:r>
+            <a:endParaRPr kumimoji="1" lang="en-US" altLang="zh-CN" sz="1050" b="1" dirty="0">
+              <a:solidFill>
+                <a:schemeClr val="tx1"/>
+              </a:solidFill>
+            </a:endParaRPr>
+          </a:p>
+          <a:p>
+            <a:pPr algn="ctr"/>
+            <a:r>
+              <a:rPr kumimoji="1" lang="zh-CN" altLang="en-US" sz="1050" b="1" dirty="0">
                 <a:solidFill>
-                  <a:srgbClr val="002060"/>
+                  <a:schemeClr val="tx1"/>
                 </a:solidFill>
               </a:rPr>
-              <a:t>研究内容</a:t>
-            </a:r>
-          </a:p>
-        </p:txBody>
-      </p:sp>
-      <p:sp>
-        <p:nvSpPr>
-          <p:cNvPr id="23" name="文本框 22">
-            <a:extLst>
-              <a:ext uri="{FF2B5EF4-FFF2-40B4-BE49-F238E27FC236}">
-                <a16:creationId xmlns:a16="http://schemas.microsoft.com/office/drawing/2014/main" id="{581880DE-CE26-C944-8830-B479173C0A17}"/>
-              </a:ext>
-            </a:extLst>
-          </p:cNvPr>
-          <p:cNvSpPr txBox="1"/>
-          <p:nvPr/>
-        </p:nvSpPr>
-        <p:spPr>
-          <a:xfrm>
-            <a:off x="1895259" y="4796569"/>
-            <a:ext cx="543739" cy="307777"/>
-          </a:xfrm>
-          <a:prstGeom prst="rect">
-            <a:avLst/>
-          </a:prstGeom>
-          <a:noFill/>
-        </p:spPr>
-        <p:txBody>
-          <a:bodyPr wrap="square" rtlCol="0">
-            <a:spAutoFit/>
-          </a:bodyPr>
-          <a:lstStyle/>
-          <a:p>
-            <a:r>
-              <a:rPr kumimoji="1" lang="zh-CN" altLang="en-US" sz="1400" dirty="0">
-                <a:solidFill>
-                  <a:srgbClr val="002060"/>
-                </a:solidFill>
-              </a:rPr>
-              <a:t>目标</a:t>
-            </a:r>
-          </a:p>
-        </p:txBody>
-      </p:sp>
-      <p:sp>
-        <p:nvSpPr>
-          <p:cNvPr id="24" name="矩形 23">
-            <a:extLst>
-              <a:ext uri="{FF2B5EF4-FFF2-40B4-BE49-F238E27FC236}">
-                <a16:creationId xmlns:a16="http://schemas.microsoft.com/office/drawing/2014/main" id="{989FAB68-41C5-F643-B9EC-D8A9F8D3BF11}"/>
+              <a:t>（第三章）</a:t>
+            </a:r>
+          </a:p>
+        </p:txBody>
+      </p:sp>
+      <p:sp>
+        <p:nvSpPr>
+          <p:cNvPr id="27" name="矩形 26">
+            <a:extLst>
+              <a:ext uri="{FF2B5EF4-FFF2-40B4-BE49-F238E27FC236}">
+                <a16:creationId xmlns:a16="http://schemas.microsoft.com/office/drawing/2014/main" id="{B25D0B37-0A39-954A-B868-84049DCAE970}"/>
               </a:ext>
             </a:extLst>
           </p:cNvPr>
@@ -3857,8 +4008,8 @@
         </p:nvSpPr>
         <p:spPr>
           <a:xfrm>
-            <a:off x="2513239" y="3223032"/>
-            <a:ext cx="3344576" cy="1332579"/>
+            <a:off x="5166333" y="3289084"/>
+            <a:ext cx="2606081" cy="1324751"/>
           </a:xfrm>
           <a:prstGeom prst="rect">
             <a:avLst/>
@@ -3892,16 +4043,16 @@
           <a:lstStyle/>
           <a:p>
             <a:pPr algn="ctr"/>
-            <a:endParaRPr kumimoji="1" lang="zh-CN" altLang="en-US"/>
-          </a:p>
-        </p:txBody>
-      </p:sp>
-      <p:sp>
-        <p:nvSpPr>
-          <p:cNvPr id="25" name="矩形 24">
-            <a:extLst>
-              <a:ext uri="{FF2B5EF4-FFF2-40B4-BE49-F238E27FC236}">
-                <a16:creationId xmlns:a16="http://schemas.microsoft.com/office/drawing/2014/main" id="{41C3218C-46B2-9E4D-B09A-FCEDD9869CB3}"/>
+            <a:endParaRPr kumimoji="1" lang="zh-CN" altLang="en-US" b="1"/>
+          </a:p>
+        </p:txBody>
+      </p:sp>
+      <p:sp>
+        <p:nvSpPr>
+          <p:cNvPr id="28" name="矩形 27">
+            <a:extLst>
+              <a:ext uri="{FF2B5EF4-FFF2-40B4-BE49-F238E27FC236}">
+                <a16:creationId xmlns:a16="http://schemas.microsoft.com/office/drawing/2014/main" id="{107A842C-0FEF-9048-ABCF-9BF35EE6971B}"/>
               </a:ext>
             </a:extLst>
           </p:cNvPr>
@@ -3910,17 +4061,18 @@
         </p:nvSpPr>
         <p:spPr>
           <a:xfrm>
-            <a:off x="2513237" y="3215857"/>
-            <a:ext cx="3349414" cy="363849"/>
+            <a:off x="5174993" y="3302380"/>
+            <a:ext cx="2592397" cy="386636"/>
           </a:xfrm>
           <a:prstGeom prst="rect">
             <a:avLst/>
           </a:prstGeom>
           <a:solidFill>
-            <a:schemeClr val="accent5">
-              <a:lumMod val="50000"/>
-            </a:schemeClr>
+            <a:srgbClr val="CCE9FF"/>
           </a:solidFill>
+          <a:ln>
+            <a:noFill/>
+          </a:ln>
         </p:spPr>
         <p:style>
           <a:lnRef idx="2">
@@ -3944,18 +4096,38 @@
           <a:p>
             <a:pPr algn="ctr"/>
             <a:r>
-              <a:rPr kumimoji="1" lang="zh-CN" altLang="en-US" sz="1400" dirty="0"/>
-              <a:t>基于拓扑绑定的三维高斯人体重建</a:t>
-            </a:r>
-          </a:p>
-        </p:txBody>
-      </p:sp>
-      <p:sp>
-        <p:nvSpPr>
-          <p:cNvPr id="27" name="矩形 26">
-            <a:extLst>
-              <a:ext uri="{FF2B5EF4-FFF2-40B4-BE49-F238E27FC236}">
-                <a16:creationId xmlns:a16="http://schemas.microsoft.com/office/drawing/2014/main" id="{B25D0B37-0A39-954A-B868-84049DCAE970}"/>
+              <a:rPr kumimoji="1" lang="zh-CN" altLang="en-US" sz="1050" b="1" dirty="0">
+                <a:solidFill>
+                  <a:schemeClr val="tx1"/>
+                </a:solidFill>
+              </a:rPr>
+              <a:t>基于人体测量先验的服装参数生成</a:t>
+            </a:r>
+            <a:endParaRPr kumimoji="1" lang="en-US" altLang="zh-CN" sz="1050" b="1" dirty="0">
+              <a:solidFill>
+                <a:schemeClr val="tx1"/>
+              </a:solidFill>
+            </a:endParaRPr>
+          </a:p>
+          <a:p>
+            <a:pPr algn="ctr"/>
+            <a:r>
+              <a:rPr kumimoji="1" lang="zh-CN" altLang="en-US" sz="1050" b="1" dirty="0">
+                <a:solidFill>
+                  <a:schemeClr val="tx1"/>
+                </a:solidFill>
+              </a:rPr>
+              <a:t>（第四章）</a:t>
+            </a:r>
+          </a:p>
+        </p:txBody>
+      </p:sp>
+      <p:sp>
+        <p:nvSpPr>
+          <p:cNvPr id="2" name="下箭头 1">
+            <a:extLst>
+              <a:ext uri="{FF2B5EF4-FFF2-40B4-BE49-F238E27FC236}">
+                <a16:creationId xmlns:a16="http://schemas.microsoft.com/office/drawing/2014/main" id="{B962EC26-32C1-FC42-8C36-D37DC5D8C4FF}"/>
               </a:ext>
             </a:extLst>
           </p:cNvPr>
@@ -3964,19 +4136,18 @@
         </p:nvSpPr>
         <p:spPr>
           <a:xfrm>
-            <a:off x="6046418" y="3223031"/>
-            <a:ext cx="3223576" cy="1332579"/>
-          </a:xfrm>
-          <a:prstGeom prst="rect">
-            <a:avLst/>
+            <a:off x="3680347" y="2552262"/>
+            <a:ext cx="175767" cy="193473"/>
+          </a:xfrm>
+          <a:prstGeom prst="downArrow">
+            <a:avLst>
+              <a:gd name="adj1" fmla="val 50000"/>
+              <a:gd name="adj2" fmla="val 47371"/>
+            </a:avLst>
           </a:prstGeom>
-          <a:noFill/>
-          <a:ln>
-            <a:solidFill>
-              <a:schemeClr val="tx1"/>
-            </a:solidFill>
-            <a:prstDash val="solid"/>
-          </a:ln>
+          <a:solidFill>
+            <a:srgbClr val="0070C0"/>
+          </a:solidFill>
         </p:spPr>
         <p:style>
           <a:lnRef idx="2">
@@ -3999,16 +4170,16 @@
           <a:lstStyle/>
           <a:p>
             <a:pPr algn="ctr"/>
-            <a:endParaRPr kumimoji="1" lang="zh-CN" altLang="en-US"/>
-          </a:p>
-        </p:txBody>
-      </p:sp>
-      <p:sp>
-        <p:nvSpPr>
-          <p:cNvPr id="28" name="矩形 27">
-            <a:extLst>
-              <a:ext uri="{FF2B5EF4-FFF2-40B4-BE49-F238E27FC236}">
-                <a16:creationId xmlns:a16="http://schemas.microsoft.com/office/drawing/2014/main" id="{107A842C-0FEF-9048-ABCF-9BF35EE6971B}"/>
+            <a:endParaRPr kumimoji="1" lang="zh-CN" altLang="en-US" b="1" dirty="0"/>
+          </a:p>
+        </p:txBody>
+      </p:sp>
+      <p:sp>
+        <p:nvSpPr>
+          <p:cNvPr id="29" name="下箭头 28">
+            <a:extLst>
+              <a:ext uri="{FF2B5EF4-FFF2-40B4-BE49-F238E27FC236}">
+                <a16:creationId xmlns:a16="http://schemas.microsoft.com/office/drawing/2014/main" id="{DEB98004-A16A-BC49-A85C-3E19B2EDB0AC}"/>
               </a:ext>
             </a:extLst>
           </p:cNvPr>
@@ -4017,16 +4188,14 @@
         </p:nvSpPr>
         <p:spPr>
           <a:xfrm>
-            <a:off x="6046419" y="3220981"/>
-            <a:ext cx="3223576" cy="363849"/>
-          </a:xfrm>
-          <a:prstGeom prst="rect">
+            <a:off x="6269706" y="2543567"/>
+            <a:ext cx="178412" cy="197725"/>
+          </a:xfrm>
+          <a:prstGeom prst="downArrow">
             <a:avLst/>
           </a:prstGeom>
           <a:solidFill>
-            <a:schemeClr val="accent5">
-              <a:lumMod val="50000"/>
-            </a:schemeClr>
+            <a:srgbClr val="0070C0"/>
           </a:solidFill>
         </p:spPr>
         <p:style>
@@ -4050,19 +4219,16 @@
           <a:lstStyle/>
           <a:p>
             <a:pPr algn="ctr"/>
-            <a:r>
-              <a:rPr kumimoji="1" lang="zh-CN" altLang="en-US" sz="1400" dirty="0"/>
-              <a:t>基于人体测量先验的服装参数生成</a:t>
-            </a:r>
-          </a:p>
-        </p:txBody>
-      </p:sp>
-      <p:sp>
-        <p:nvSpPr>
-          <p:cNvPr id="30" name="矩形 29">
-            <a:extLst>
-              <a:ext uri="{FF2B5EF4-FFF2-40B4-BE49-F238E27FC236}">
-                <a16:creationId xmlns:a16="http://schemas.microsoft.com/office/drawing/2014/main" id="{3623837E-683C-A747-BCD5-B0CFAE970554}"/>
+            <a:endParaRPr kumimoji="1" lang="zh-CN" altLang="en-US" b="1"/>
+          </a:p>
+        </p:txBody>
+      </p:sp>
+      <p:sp>
+        <p:nvSpPr>
+          <p:cNvPr id="33" name="矩形 32">
+            <a:extLst>
+              <a:ext uri="{FF2B5EF4-FFF2-40B4-BE49-F238E27FC236}">
+                <a16:creationId xmlns:a16="http://schemas.microsoft.com/office/drawing/2014/main" id="{F479F3E2-E958-3D4D-93EE-923E1DEF5168}"/>
               </a:ext>
             </a:extLst>
           </p:cNvPr>
@@ -4071,15 +4237,17 @@
         </p:nvSpPr>
         <p:spPr>
           <a:xfrm>
-            <a:off x="2599439" y="3930042"/>
-            <a:ext cx="3090107" cy="288300"/>
+            <a:off x="2495550" y="2769485"/>
+            <a:ext cx="2595563" cy="279474"/>
           </a:xfrm>
           <a:prstGeom prst="rect">
             <a:avLst/>
           </a:prstGeom>
           <a:noFill/>
           <a:ln>
-            <a:noFill/>
+            <a:solidFill>
+              <a:schemeClr val="tx1"/>
+            </a:solidFill>
             <a:prstDash val="solid"/>
           </a:ln>
         </p:spPr>
@@ -4105,22 +4273,30 @@
           <a:p>
             <a:pPr algn="ctr"/>
             <a:r>
-              <a:rPr kumimoji="1" lang="zh-CN" altLang="en-US" sz="1100" dirty="0">
+              <a:rPr kumimoji="1" lang="zh-CN" altLang="en-US" sz="1100" b="1" dirty="0">
                 <a:solidFill>
                   <a:schemeClr val="tx1"/>
                 </a:solidFill>
               </a:rPr>
-              <a:t>解析式三维高斯绑定策略</a:t>
-            </a:r>
-          </a:p>
-        </p:txBody>
-      </p:sp>
-      <p:sp>
-        <p:nvSpPr>
-          <p:cNvPr id="34" name="矩形 33">
-            <a:extLst>
-              <a:ext uri="{FF2B5EF4-FFF2-40B4-BE49-F238E27FC236}">
-                <a16:creationId xmlns:a16="http://schemas.microsoft.com/office/drawing/2014/main" id="{8309BC6A-202D-9146-939E-A6B7B1FEB7C9}"/>
+              <a:t>人体几何提供</a:t>
+            </a:r>
+            <a:r>
+              <a:rPr kumimoji="1" lang="zh-CN" altLang="en-US" sz="1100" b="1" dirty="0">
+                <a:solidFill>
+                  <a:srgbClr val="0070C0"/>
+                </a:solidFill>
+              </a:rPr>
+              <a:t>拓扑结构约束</a:t>
+            </a:r>
+          </a:p>
+        </p:txBody>
+      </p:sp>
+      <p:sp>
+        <p:nvSpPr>
+          <p:cNvPr id="36" name="矩形 35">
+            <a:extLst>
+              <a:ext uri="{FF2B5EF4-FFF2-40B4-BE49-F238E27FC236}">
+                <a16:creationId xmlns:a16="http://schemas.microsoft.com/office/drawing/2014/main" id="{15DAFCAF-6247-3C4F-8EA7-DBECB725F6D7}"/>
               </a:ext>
             </a:extLst>
           </p:cNvPr>
@@ -4129,15 +4305,17 @@
         </p:nvSpPr>
         <p:spPr>
           <a:xfrm>
-            <a:off x="2599439" y="4215797"/>
-            <a:ext cx="3090107" cy="288300"/>
+            <a:off x="5159375" y="2756700"/>
+            <a:ext cx="2628900" cy="292329"/>
           </a:xfrm>
           <a:prstGeom prst="rect">
             <a:avLst/>
           </a:prstGeom>
           <a:noFill/>
           <a:ln>
-            <a:noFill/>
+            <a:solidFill>
+              <a:schemeClr val="tx1"/>
+            </a:solidFill>
             <a:prstDash val="solid"/>
           </a:ln>
         </p:spPr>
@@ -4163,22 +4341,30 @@
           <a:p>
             <a:pPr algn="ctr"/>
             <a:r>
-              <a:rPr kumimoji="1" lang="zh-CN" altLang="en-US" sz="1100" dirty="0">
+              <a:rPr kumimoji="1" lang="zh-CN" altLang="en-US" sz="1100" b="1" dirty="0">
                 <a:solidFill>
                   <a:schemeClr val="tx1"/>
                 </a:solidFill>
               </a:rPr>
-              <a:t>三角等边正则约束项</a:t>
-            </a:r>
-          </a:p>
-        </p:txBody>
-      </p:sp>
-      <p:sp>
-        <p:nvSpPr>
-          <p:cNvPr id="40" name="文本框 39">
-            <a:extLst>
-              <a:ext uri="{FF2B5EF4-FFF2-40B4-BE49-F238E27FC236}">
-                <a16:creationId xmlns:a16="http://schemas.microsoft.com/office/drawing/2014/main" id="{C86F6E39-1FED-6347-A818-34B706834A14}"/>
+              <a:t>人体几何提供</a:t>
+            </a:r>
+            <a:r>
+              <a:rPr kumimoji="1" lang="zh-CN" altLang="en-US" sz="1100" b="1" dirty="0">
+                <a:solidFill>
+                  <a:srgbClr val="0070C0"/>
+                </a:solidFill>
+              </a:rPr>
+              <a:t>测量信息先验</a:t>
+            </a:r>
+          </a:p>
+        </p:txBody>
+      </p:sp>
+      <p:sp>
+        <p:nvSpPr>
+          <p:cNvPr id="39" name="文本框 38">
+            <a:extLst>
+              <a:ext uri="{FF2B5EF4-FFF2-40B4-BE49-F238E27FC236}">
+                <a16:creationId xmlns:a16="http://schemas.microsoft.com/office/drawing/2014/main" id="{C40A0DA6-A11F-5345-B458-6A425514CD44}"/>
               </a:ext>
             </a:extLst>
           </p:cNvPr>
@@ -4187,8 +4373,8 @@
         </p:nvSpPr>
         <p:spPr>
           <a:xfrm>
-            <a:off x="1895259" y="5398265"/>
-            <a:ext cx="543739" cy="307777"/>
+            <a:off x="4444753" y="2529521"/>
+            <a:ext cx="1331115" cy="253916"/>
           </a:xfrm>
           <a:prstGeom prst="rect">
             <a:avLst/>
@@ -4196,28 +4382,29 @@
           <a:noFill/>
         </p:spPr>
         <p:txBody>
-          <a:bodyPr wrap="square" rtlCol="0">
+          <a:bodyPr wrap="square">
             <a:spAutoFit/>
           </a:bodyPr>
           <a:lstStyle/>
           <a:p>
-            <a:r>
-              <a:rPr kumimoji="1" lang="zh-CN" altLang="en-US" sz="1400" dirty="0">
+            <a:pPr algn="ctr"/>
+            <a:r>
+              <a:rPr kumimoji="1" lang="zh-CN" altLang="en-US" sz="1050" b="1" dirty="0">
                 <a:solidFill>
-                  <a:srgbClr val="002060"/>
+                  <a:schemeClr val="tx1"/>
                 </a:solidFill>
               </a:rPr>
-              <a:t>应用</a:t>
-            </a:r>
-          </a:p>
-        </p:txBody>
-      </p:sp>
-      <p:sp>
-        <p:nvSpPr>
-          <p:cNvPr id="41" name="矩形 40">
-            <a:extLst>
-              <a:ext uri="{FF2B5EF4-FFF2-40B4-BE49-F238E27FC236}">
-                <a16:creationId xmlns:a16="http://schemas.microsoft.com/office/drawing/2014/main" id="{A9F3AFC4-DABA-F541-B97C-D4E0DD45FF6B}"/>
+              <a:t>引入人体几何先验</a:t>
+            </a:r>
+          </a:p>
+        </p:txBody>
+      </p:sp>
+      <p:sp>
+        <p:nvSpPr>
+          <p:cNvPr id="48" name="矩形 47">
+            <a:extLst>
+              <a:ext uri="{FF2B5EF4-FFF2-40B4-BE49-F238E27FC236}">
+                <a16:creationId xmlns:a16="http://schemas.microsoft.com/office/drawing/2014/main" id="{03804F8B-075A-9440-AC49-21C41680CC31}"/>
               </a:ext>
             </a:extLst>
           </p:cNvPr>
@@ -4226,8 +4413,8 @@
         </p:nvSpPr>
         <p:spPr>
           <a:xfrm>
-            <a:off x="2499495" y="4782390"/>
-            <a:ext cx="3300052" cy="363849"/>
+            <a:off x="2495549" y="4826404"/>
+            <a:ext cx="5292725" cy="309457"/>
           </a:xfrm>
           <a:prstGeom prst="rect">
             <a:avLst/>
@@ -4262,43 +4449,540 @@
           <a:p>
             <a:pPr algn="ctr"/>
             <a:r>
-              <a:rPr kumimoji="1" lang="zh-CN" altLang="en-US" sz="1200" dirty="0">
+              <a:rPr kumimoji="1" lang="zh-CN" altLang="en-US" sz="1050" b="1" dirty="0">
                 <a:solidFill>
                   <a:schemeClr val="tx1"/>
                 </a:solidFill>
               </a:rPr>
-              <a:t>提高人体几何重建的质量与驱动泛化性</a:t>
-            </a:r>
-          </a:p>
-        </p:txBody>
-      </p:sp>
-      <p:sp>
-        <p:nvSpPr>
-          <p:cNvPr id="44" name="矩形 43">
-            <a:extLst>
-              <a:ext uri="{FF2B5EF4-FFF2-40B4-BE49-F238E27FC236}">
-                <a16:creationId xmlns:a16="http://schemas.microsoft.com/office/drawing/2014/main" id="{6353E3A8-3A33-CB41-8B8F-95F8185207D7}"/>
-              </a:ext>
-            </a:extLst>
-          </p:cNvPr>
-          <p:cNvSpPr/>
+              <a:t>构建</a:t>
+            </a:r>
+            <a:r>
+              <a:rPr kumimoji="1" lang="zh-CN" altLang="en-US" sz="1050" b="1" dirty="0">
+                <a:solidFill>
+                  <a:srgbClr val="0070C0"/>
+                </a:solidFill>
+              </a:rPr>
+              <a:t>可稳定驱动</a:t>
+            </a:r>
+            <a:r>
+              <a:rPr kumimoji="1" lang="zh-CN" altLang="en-US" sz="1050" b="1" dirty="0">
+                <a:solidFill>
+                  <a:schemeClr val="tx1"/>
+                </a:solidFill>
+              </a:rPr>
+              <a:t>、</a:t>
+            </a:r>
+            <a:r>
+              <a:rPr kumimoji="1" lang="zh-CN" altLang="en-US" sz="1050" b="1" dirty="0">
+                <a:solidFill>
+                  <a:srgbClr val="0070C0"/>
+                </a:solidFill>
+              </a:rPr>
+              <a:t>高保真</a:t>
+            </a:r>
+            <a:r>
+              <a:rPr kumimoji="1" lang="zh-CN" altLang="en-US" sz="1050" b="1" dirty="0">
+                <a:solidFill>
+                  <a:schemeClr val="tx1"/>
+                </a:solidFill>
+              </a:rPr>
+              <a:t>的虚拟数字人体化身</a:t>
+            </a:r>
+          </a:p>
+        </p:txBody>
+      </p:sp>
+      <p:grpSp>
+        <p:nvGrpSpPr>
+          <p:cNvPr id="57" name="组合 56">
+            <a:extLst>
+              <a:ext uri="{FF2B5EF4-FFF2-40B4-BE49-F238E27FC236}">
+                <a16:creationId xmlns:a16="http://schemas.microsoft.com/office/drawing/2014/main" id="{72289BAA-7E45-2344-88A0-988CC9999846}"/>
+              </a:ext>
+            </a:extLst>
+          </p:cNvPr>
+          <p:cNvGrpSpPr/>
           <p:nvPr/>
-        </p:nvSpPr>
-        <p:spPr>
+        </p:nvGrpSpPr>
+        <p:grpSpPr>
           <a:xfrm>
-            <a:off x="6042162" y="4786878"/>
-            <a:ext cx="3223576" cy="363849"/>
+            <a:off x="2497362" y="1517841"/>
+            <a:ext cx="1226146" cy="807639"/>
+            <a:chOff x="495743" y="2015272"/>
+            <a:chExt cx="4951194" cy="3100047"/>
+          </a:xfrm>
+        </p:grpSpPr>
+        <p:pic>
+          <p:nvPicPr>
+            <p:cNvPr id="58" name="图片 57">
+              <a:extLst>
+                <a:ext uri="{FF2B5EF4-FFF2-40B4-BE49-F238E27FC236}">
+                  <a16:creationId xmlns:a16="http://schemas.microsoft.com/office/drawing/2014/main" id="{D2CB6D52-9F28-5A4E-908D-57551DE376A5}"/>
+                </a:ext>
+              </a:extLst>
+            </p:cNvPr>
+            <p:cNvPicPr>
+              <a:picLocks noChangeAspect="1"/>
+            </p:cNvPicPr>
+            <p:nvPr/>
+          </p:nvPicPr>
+          <p:blipFill>
+            <a:blip r:embed="rId4"/>
+            <a:stretch>
+              <a:fillRect/>
+            </a:stretch>
+          </p:blipFill>
+          <p:spPr>
+            <a:xfrm>
+              <a:off x="2824913" y="2187818"/>
+              <a:ext cx="2622024" cy="2763699"/>
+            </a:xfrm>
+            <a:prstGeom prst="rect">
+              <a:avLst/>
+            </a:prstGeom>
+            <a:noFill/>
+            <a:ln w="12700">
+              <a:solidFill>
+                <a:srgbClr val="00B050"/>
+              </a:solidFill>
+            </a:ln>
+          </p:spPr>
+        </p:pic>
+        <p:pic>
+          <p:nvPicPr>
+            <p:cNvPr id="59" name="图片 58">
+              <a:extLst>
+                <a:ext uri="{FF2B5EF4-FFF2-40B4-BE49-F238E27FC236}">
+                  <a16:creationId xmlns:a16="http://schemas.microsoft.com/office/drawing/2014/main" id="{A1A0E5AC-B8B2-104D-A988-BED6BDBFF4CD}"/>
+                </a:ext>
+              </a:extLst>
+            </p:cNvPr>
+            <p:cNvPicPr>
+              <a:picLocks noChangeAspect="1"/>
+            </p:cNvPicPr>
+            <p:nvPr/>
+          </p:nvPicPr>
+          <p:blipFill>
+            <a:blip r:embed="rId5"/>
+            <a:stretch>
+              <a:fillRect/>
+            </a:stretch>
+          </p:blipFill>
+          <p:spPr>
+            <a:xfrm>
+              <a:off x="495743" y="2015272"/>
+              <a:ext cx="2091184" cy="3100047"/>
+            </a:xfrm>
+            <a:prstGeom prst="rect">
+              <a:avLst/>
+            </a:prstGeom>
+            <a:ln w="12700">
+              <a:noFill/>
+            </a:ln>
+          </p:spPr>
+        </p:pic>
+        <p:sp>
+          <p:nvSpPr>
+            <p:cNvPr id="60" name="矩形: 圆角 98">
+              <a:extLst>
+                <a:ext uri="{FF2B5EF4-FFF2-40B4-BE49-F238E27FC236}">
+                  <a16:creationId xmlns:a16="http://schemas.microsoft.com/office/drawing/2014/main" id="{B705052B-214B-814B-B0AD-3F286D916749}"/>
+                </a:ext>
+              </a:extLst>
+            </p:cNvPr>
+            <p:cNvSpPr/>
+            <p:nvPr/>
+          </p:nvSpPr>
+          <p:spPr>
+            <a:xfrm>
+              <a:off x="1586528" y="2660644"/>
+              <a:ext cx="653925" cy="674307"/>
+            </a:xfrm>
+            <a:prstGeom prst="roundRect">
+              <a:avLst>
+                <a:gd name="adj" fmla="val 0"/>
+              </a:avLst>
+            </a:prstGeom>
+            <a:noFill/>
+            <a:ln w="12700">
+              <a:solidFill>
+                <a:srgbClr val="00B050"/>
+              </a:solidFill>
+            </a:ln>
+          </p:spPr>
+          <p:style>
+            <a:lnRef idx="2">
+              <a:schemeClr val="accent1">
+                <a:shade val="50000"/>
+              </a:schemeClr>
+            </a:lnRef>
+            <a:fillRef idx="1">
+              <a:schemeClr val="accent1"/>
+            </a:fillRef>
+            <a:effectRef idx="0">
+              <a:schemeClr val="accent1"/>
+            </a:effectRef>
+            <a:fontRef idx="minor">
+              <a:schemeClr val="lt1"/>
+            </a:fontRef>
+          </p:style>
+          <p:txBody>
+            <a:bodyPr rtlCol="0" anchor="ctr"/>
+            <a:lstStyle/>
+            <a:p>
+              <a:pPr algn="ctr"/>
+              <a:endParaRPr lang="zh-CN" altLang="en-US" b="1">
+                <a:solidFill>
+                  <a:schemeClr val="tx1"/>
+                </a:solidFill>
+              </a:endParaRPr>
+            </a:p>
+          </p:txBody>
+        </p:sp>
+        <p:cxnSp>
+          <p:nvCxnSpPr>
+            <p:cNvPr id="61" name="直接箭头连接符 8">
+              <a:extLst>
+                <a:ext uri="{FF2B5EF4-FFF2-40B4-BE49-F238E27FC236}">
+                  <a16:creationId xmlns:a16="http://schemas.microsoft.com/office/drawing/2014/main" id="{D9AFC18D-56AF-B545-BEEE-F463B9DB662D}"/>
+                </a:ext>
+              </a:extLst>
+            </p:cNvPr>
+            <p:cNvCxnSpPr>
+              <a:cxnSpLocks/>
+            </p:cNvCxnSpPr>
+            <p:nvPr/>
+          </p:nvCxnSpPr>
+          <p:spPr>
+            <a:xfrm flipV="1">
+              <a:off x="2190058" y="2187817"/>
+              <a:ext cx="616229" cy="479797"/>
+            </a:xfrm>
+            <a:prstGeom prst="straightConnector1">
+              <a:avLst/>
+            </a:prstGeom>
+            <a:ln w="12700">
+              <a:solidFill>
+                <a:srgbClr val="00B050"/>
+              </a:solidFill>
+              <a:prstDash val="dash"/>
+              <a:tailEnd type="none"/>
+            </a:ln>
+          </p:spPr>
+          <p:style>
+            <a:lnRef idx="1">
+              <a:schemeClr val="accent1"/>
+            </a:lnRef>
+            <a:fillRef idx="0">
+              <a:schemeClr val="accent1"/>
+            </a:fillRef>
+            <a:effectRef idx="0">
+              <a:schemeClr val="accent1"/>
+            </a:effectRef>
+            <a:fontRef idx="minor">
+              <a:schemeClr val="tx1"/>
+            </a:fontRef>
+          </p:style>
+        </p:cxnSp>
+        <p:cxnSp>
+          <p:nvCxnSpPr>
+            <p:cNvPr id="62" name="直接箭头连接符 101">
+              <a:extLst>
+                <a:ext uri="{FF2B5EF4-FFF2-40B4-BE49-F238E27FC236}">
+                  <a16:creationId xmlns:a16="http://schemas.microsoft.com/office/drawing/2014/main" id="{4C8B1E33-A367-CC48-BDBC-1BA28D7A3CAC}"/>
+                </a:ext>
+              </a:extLst>
+            </p:cNvPr>
+            <p:cNvCxnSpPr>
+              <a:cxnSpLocks/>
+            </p:cNvCxnSpPr>
+            <p:nvPr/>
+          </p:nvCxnSpPr>
+          <p:spPr>
+            <a:xfrm>
+              <a:off x="2190058" y="3334952"/>
+              <a:ext cx="616229" cy="1616565"/>
+            </a:xfrm>
+            <a:prstGeom prst="straightConnector1">
+              <a:avLst/>
+            </a:prstGeom>
+            <a:ln w="12700">
+              <a:solidFill>
+                <a:srgbClr val="00B050"/>
+              </a:solidFill>
+              <a:prstDash val="dash"/>
+              <a:tailEnd type="none"/>
+            </a:ln>
+          </p:spPr>
+          <p:style>
+            <a:lnRef idx="1">
+              <a:schemeClr val="accent1"/>
+            </a:lnRef>
+            <a:fillRef idx="0">
+              <a:schemeClr val="accent1"/>
+            </a:fillRef>
+            <a:effectRef idx="0">
+              <a:schemeClr val="accent1"/>
+            </a:effectRef>
+            <a:fontRef idx="minor">
+              <a:schemeClr val="tx1"/>
+            </a:fontRef>
+          </p:style>
+        </p:cxnSp>
+      </p:grpSp>
+      <p:sp>
+        <p:nvSpPr>
+          <p:cNvPr id="64" name="文本框 63">
+            <a:extLst>
+              <a:ext uri="{FF2B5EF4-FFF2-40B4-BE49-F238E27FC236}">
+                <a16:creationId xmlns:a16="http://schemas.microsoft.com/office/drawing/2014/main" id="{7624DC93-E052-B144-8B84-60B733C43A62}"/>
+              </a:ext>
+            </a:extLst>
+          </p:cNvPr>
+          <p:cNvSpPr txBox="1"/>
+          <p:nvPr/>
+        </p:nvSpPr>
+        <p:spPr>
+          <a:xfrm>
+            <a:off x="3863112" y="2308331"/>
+            <a:ext cx="1155805" cy="230832"/>
           </a:xfrm>
           <a:prstGeom prst="rect">
             <a:avLst/>
           </a:prstGeom>
           <a:noFill/>
-          <a:ln>
-            <a:solidFill>
-              <a:schemeClr val="tx1"/>
-            </a:solidFill>
-            <a:prstDash val="solid"/>
-          </a:ln>
+        </p:spPr>
+        <p:txBody>
+          <a:bodyPr wrap="square" rtlCol="0">
+            <a:spAutoFit/>
+          </a:bodyPr>
+          <a:lstStyle/>
+          <a:p>
+            <a:pPr algn="ctr"/>
+            <a:r>
+              <a:rPr lang="zh-CN" altLang="en-US" sz="900" b="1" dirty="0"/>
+              <a:t>训练数据外动作</a:t>
+            </a:r>
+          </a:p>
+        </p:txBody>
+      </p:sp>
+      <p:sp>
+        <p:nvSpPr>
+          <p:cNvPr id="65" name="文本框 64">
+            <a:extLst>
+              <a:ext uri="{FF2B5EF4-FFF2-40B4-BE49-F238E27FC236}">
+                <a16:creationId xmlns:a16="http://schemas.microsoft.com/office/drawing/2014/main" id="{C2FB9AB0-4D9F-4543-A90B-631814989508}"/>
+              </a:ext>
+            </a:extLst>
+          </p:cNvPr>
+          <p:cNvSpPr txBox="1"/>
+          <p:nvPr/>
+        </p:nvSpPr>
+        <p:spPr>
+          <a:xfrm>
+            <a:off x="2434650" y="2313802"/>
+            <a:ext cx="1529828" cy="230832"/>
+          </a:xfrm>
+          <a:prstGeom prst="rect">
+            <a:avLst/>
+          </a:prstGeom>
+          <a:noFill/>
+        </p:spPr>
+        <p:txBody>
+          <a:bodyPr wrap="square" rtlCol="0">
+            <a:spAutoFit/>
+          </a:bodyPr>
+          <a:lstStyle/>
+          <a:p>
+            <a:pPr algn="ctr"/>
+            <a:r>
+              <a:rPr lang="zh-CN" altLang="en-US" sz="900" b="1" dirty="0"/>
+              <a:t>训练数据动作</a:t>
+            </a:r>
+          </a:p>
+        </p:txBody>
+      </p:sp>
+      <p:sp>
+        <p:nvSpPr>
+          <p:cNvPr id="66" name="文本框 65">
+            <a:extLst>
+              <a:ext uri="{FF2B5EF4-FFF2-40B4-BE49-F238E27FC236}">
+                <a16:creationId xmlns:a16="http://schemas.microsoft.com/office/drawing/2014/main" id="{36136A6D-7CAA-6E4C-AEB5-363675CFC8E7}"/>
+              </a:ext>
+            </a:extLst>
+          </p:cNvPr>
+          <p:cNvSpPr txBox="1"/>
+          <p:nvPr/>
+        </p:nvSpPr>
+        <p:spPr>
+          <a:xfrm>
+            <a:off x="2487961" y="1293214"/>
+            <a:ext cx="2687033" cy="253916"/>
+          </a:xfrm>
+          <a:prstGeom prst="rect">
+            <a:avLst/>
+          </a:prstGeom>
+          <a:noFill/>
+        </p:spPr>
+        <p:txBody>
+          <a:bodyPr wrap="square" rtlCol="0">
+            <a:spAutoFit/>
+          </a:bodyPr>
+          <a:lstStyle/>
+          <a:p>
+            <a:pPr algn="ctr"/>
+            <a:r>
+              <a:rPr lang="zh-CN" altLang="en-US" sz="1050" b="1" dirty="0"/>
+              <a:t>重建人体</a:t>
+            </a:r>
+            <a:r>
+              <a:rPr lang="zh-CN" altLang="en-US" sz="1050" b="1" dirty="0">
+                <a:solidFill>
+                  <a:srgbClr val="0070C0"/>
+                </a:solidFill>
+              </a:rPr>
+              <a:t>驱动泛化性差</a:t>
+            </a:r>
+            <a:r>
+              <a:rPr lang="zh-CN" altLang="en-US" sz="1050" b="1" dirty="0"/>
+              <a:t>，存在</a:t>
+            </a:r>
+            <a:r>
+              <a:rPr lang="zh-CN" altLang="en-US" sz="1050" b="1" dirty="0">
+                <a:solidFill>
+                  <a:srgbClr val="0070C0"/>
+                </a:solidFill>
+              </a:rPr>
+              <a:t>几何失真</a:t>
+            </a:r>
+          </a:p>
+        </p:txBody>
+      </p:sp>
+      <p:pic>
+        <p:nvPicPr>
+          <p:cNvPr id="67" name="图片 66">
+            <a:extLst>
+              <a:ext uri="{FF2B5EF4-FFF2-40B4-BE49-F238E27FC236}">
+                <a16:creationId xmlns:a16="http://schemas.microsoft.com/office/drawing/2014/main" id="{488CCFDD-F82E-7647-A12A-1A5E92A73A6D}"/>
+              </a:ext>
+            </a:extLst>
+          </p:cNvPr>
+          <p:cNvPicPr>
+            <a:picLocks noChangeAspect="1"/>
+          </p:cNvPicPr>
+          <p:nvPr/>
+        </p:nvPicPr>
+        <p:blipFill>
+          <a:blip r:embed="rId6"/>
+          <a:stretch>
+            <a:fillRect/>
+          </a:stretch>
+        </p:blipFill>
+        <p:spPr>
+          <a:xfrm>
+            <a:off x="5236297" y="1536968"/>
+            <a:ext cx="659378" cy="944568"/>
+          </a:xfrm>
+          <a:prstGeom prst="rect">
+            <a:avLst/>
+          </a:prstGeom>
+        </p:spPr>
+      </p:pic>
+      <p:pic>
+        <p:nvPicPr>
+          <p:cNvPr id="68" name="图片 67">
+            <a:extLst>
+              <a:ext uri="{FF2B5EF4-FFF2-40B4-BE49-F238E27FC236}">
+                <a16:creationId xmlns:a16="http://schemas.microsoft.com/office/drawing/2014/main" id="{46A31CC4-28CA-634E-8FE5-7BF8498F49A7}"/>
+              </a:ext>
+            </a:extLst>
+          </p:cNvPr>
+          <p:cNvPicPr>
+            <a:picLocks noChangeAspect="1"/>
+          </p:cNvPicPr>
+          <p:nvPr/>
+        </p:nvPicPr>
+        <p:blipFill rotWithShape="1">
+          <a:blip r:embed="rId7"/>
+          <a:srcRect t="4256"/>
+          <a:stretch/>
+        </p:blipFill>
+        <p:spPr>
+          <a:xfrm>
+            <a:off x="6490490" y="1543649"/>
+            <a:ext cx="1202088" cy="919377"/>
+          </a:xfrm>
+          <a:prstGeom prst="rect">
+            <a:avLst/>
+          </a:prstGeom>
+        </p:spPr>
+      </p:pic>
+      <p:sp>
+        <p:nvSpPr>
+          <p:cNvPr id="69" name="文本框 68">
+            <a:extLst>
+              <a:ext uri="{FF2B5EF4-FFF2-40B4-BE49-F238E27FC236}">
+                <a16:creationId xmlns:a16="http://schemas.microsoft.com/office/drawing/2014/main" id="{195B64BB-1EA8-3440-B0FC-3A14A1618FBD}"/>
+              </a:ext>
+            </a:extLst>
+          </p:cNvPr>
+          <p:cNvSpPr txBox="1"/>
+          <p:nvPr/>
+        </p:nvSpPr>
+        <p:spPr>
+          <a:xfrm>
+            <a:off x="5905907" y="1738460"/>
+            <a:ext cx="549227" cy="369332"/>
+          </a:xfrm>
+          <a:prstGeom prst="rect">
+            <a:avLst/>
+          </a:prstGeom>
+          <a:noFill/>
+        </p:spPr>
+        <p:txBody>
+          <a:bodyPr wrap="square" rtlCol="0">
+            <a:spAutoFit/>
+          </a:bodyPr>
+          <a:lstStyle/>
+          <a:p>
+            <a:pPr algn="ctr"/>
+            <a:r>
+              <a:rPr kumimoji="1" lang="zh-CN" altLang="en-US" sz="900" b="1" dirty="0"/>
+              <a:t>参数化</a:t>
+            </a:r>
+            <a:endParaRPr kumimoji="1" lang="en-US" altLang="zh-CN" sz="900" b="1" dirty="0"/>
+          </a:p>
+          <a:p>
+            <a:pPr algn="ctr"/>
+            <a:r>
+              <a:rPr kumimoji="1" lang="zh-CN" altLang="en-US" sz="900" b="1" dirty="0"/>
+              <a:t>重建</a:t>
+            </a:r>
+          </a:p>
+        </p:txBody>
+      </p:sp>
+      <p:sp>
+        <p:nvSpPr>
+          <p:cNvPr id="70" name="下箭头 69">
+            <a:extLst>
+              <a:ext uri="{FF2B5EF4-FFF2-40B4-BE49-F238E27FC236}">
+                <a16:creationId xmlns:a16="http://schemas.microsoft.com/office/drawing/2014/main" id="{53485B54-9D04-EB4B-82DB-CC7AD7CE2F20}"/>
+              </a:ext>
+            </a:extLst>
+          </p:cNvPr>
+          <p:cNvSpPr/>
+          <p:nvPr/>
+        </p:nvSpPr>
+        <p:spPr>
+          <a:xfrm rot="16200000">
+            <a:off x="6104843" y="1864373"/>
+            <a:ext cx="144384" cy="508532"/>
+          </a:xfrm>
+          <a:prstGeom prst="downArrow">
+            <a:avLst/>
+          </a:prstGeom>
+          <a:solidFill>
+            <a:srgbClr val="0070C0"/>
+          </a:solidFill>
         </p:spPr>
         <p:style>
           <a:lnRef idx="2">
@@ -4321,23 +5005,72 @@
           <a:lstStyle/>
           <a:p>
             <a:pPr algn="ctr"/>
-            <a:r>
-              <a:rPr kumimoji="1" lang="zh-CN" altLang="en-US" sz="1200" dirty="0">
+            <a:endParaRPr kumimoji="1" lang="zh-CN" altLang="en-US" b="1"/>
+          </a:p>
+        </p:txBody>
+      </p:sp>
+      <p:sp>
+        <p:nvSpPr>
+          <p:cNvPr id="71" name="文本框 70">
+            <a:extLst>
+              <a:ext uri="{FF2B5EF4-FFF2-40B4-BE49-F238E27FC236}">
+                <a16:creationId xmlns:a16="http://schemas.microsoft.com/office/drawing/2014/main" id="{ED35A040-5217-A34D-AAF5-3B65A4BD815C}"/>
+              </a:ext>
+            </a:extLst>
+          </p:cNvPr>
+          <p:cNvSpPr txBox="1"/>
+          <p:nvPr/>
+        </p:nvSpPr>
+        <p:spPr>
+          <a:xfrm>
+            <a:off x="5237709" y="1301561"/>
+            <a:ext cx="2431989" cy="253916"/>
+          </a:xfrm>
+          <a:prstGeom prst="rect">
+            <a:avLst/>
+          </a:prstGeom>
+          <a:noFill/>
+        </p:spPr>
+        <p:txBody>
+          <a:bodyPr wrap="square" rtlCol="0">
+            <a:spAutoFit/>
+          </a:bodyPr>
+          <a:lstStyle/>
+          <a:p>
+            <a:pPr algn="ctr"/>
+            <a:r>
+              <a:rPr lang="zh-CN" altLang="en-US" sz="1050" b="1" dirty="0"/>
+              <a:t>生成服装</a:t>
+            </a:r>
+            <a:r>
+              <a:rPr lang="zh-CN" altLang="en-US" sz="1050" b="1" dirty="0">
                 <a:solidFill>
-                  <a:schemeClr val="tx1"/>
+                  <a:srgbClr val="0070C0"/>
                 </a:solidFill>
               </a:rPr>
-              <a:t>提高服装参数生成的准确度与效率</a:t>
-            </a:r>
-          </a:p>
-        </p:txBody>
-      </p:sp>
-      <p:sp>
-        <p:nvSpPr>
-          <p:cNvPr id="2" name="下箭头 1">
-            <a:extLst>
-              <a:ext uri="{FF2B5EF4-FFF2-40B4-BE49-F238E27FC236}">
-                <a16:creationId xmlns:a16="http://schemas.microsoft.com/office/drawing/2014/main" id="{B962EC26-32C1-FC42-8C36-D37DC5D8C4FF}"/>
+              <a:t>结构不一致</a:t>
+            </a:r>
+            <a:r>
+              <a:rPr lang="zh-CN" altLang="en-US" sz="1050" b="1" dirty="0"/>
+              <a:t>，与</a:t>
+            </a:r>
+            <a:r>
+              <a:rPr lang="zh-CN" altLang="en-US" sz="1050" b="1" dirty="0">
+                <a:solidFill>
+                  <a:srgbClr val="0070C0"/>
+                </a:solidFill>
+              </a:rPr>
+              <a:t>体型不适配</a:t>
+            </a:r>
+          </a:p>
+        </p:txBody>
+      </p:sp>
+      <p:sp>
+        <p:nvSpPr>
+          <p:cNvPr id="72" name="下箭头 71">
+            <a:extLst>
+              <a:ext uri="{FF2B5EF4-FFF2-40B4-BE49-F238E27FC236}">
+                <a16:creationId xmlns:a16="http://schemas.microsoft.com/office/drawing/2014/main" id="{9A376092-B53E-DC40-B6A3-17CAC7B5C9A8}"/>
               </a:ext>
             </a:extLst>
           </p:cNvPr>
@@ -4346,11 +5079,14 @@
         </p:nvSpPr>
         <p:spPr>
           <a:xfrm>
-            <a:off x="4019744" y="2294984"/>
-            <a:ext cx="259553" cy="269656"/>
+            <a:off x="3673838" y="3076461"/>
+            <a:ext cx="175767" cy="182722"/>
           </a:xfrm>
           <a:prstGeom prst="downArrow">
-            <a:avLst/>
+            <a:avLst>
+              <a:gd name="adj1" fmla="val 50000"/>
+              <a:gd name="adj2" fmla="val 47371"/>
+            </a:avLst>
           </a:prstGeom>
           <a:solidFill>
             <a:srgbClr val="0070C0"/>
@@ -4377,16 +5113,16 @@
           <a:lstStyle/>
           <a:p>
             <a:pPr algn="ctr"/>
-            <a:endParaRPr kumimoji="1" lang="zh-CN" altLang="en-US"/>
-          </a:p>
-        </p:txBody>
-      </p:sp>
-      <p:sp>
-        <p:nvSpPr>
-          <p:cNvPr id="29" name="下箭头 28">
-            <a:extLst>
-              <a:ext uri="{FF2B5EF4-FFF2-40B4-BE49-F238E27FC236}">
-                <a16:creationId xmlns:a16="http://schemas.microsoft.com/office/drawing/2014/main" id="{DEB98004-A16A-BC49-A85C-3E19B2EDB0AC}"/>
+            <a:endParaRPr kumimoji="1" lang="zh-CN" altLang="en-US" b="1"/>
+          </a:p>
+        </p:txBody>
+      </p:sp>
+      <p:sp>
+        <p:nvSpPr>
+          <p:cNvPr id="73" name="下箭头 72">
+            <a:extLst>
+              <a:ext uri="{FF2B5EF4-FFF2-40B4-BE49-F238E27FC236}">
+                <a16:creationId xmlns:a16="http://schemas.microsoft.com/office/drawing/2014/main" id="{6074CDF8-E927-BD47-A4B3-403B8CBA072C}"/>
               </a:ext>
             </a:extLst>
           </p:cNvPr>
@@ -4395,8 +5131,8 @@
         </p:nvSpPr>
         <p:spPr>
           <a:xfrm>
-            <a:off x="7589089" y="2313339"/>
-            <a:ext cx="259553" cy="269656"/>
+            <a:off x="6287556" y="3079470"/>
+            <a:ext cx="178412" cy="181325"/>
           </a:xfrm>
           <a:prstGeom prst="downArrow">
             <a:avLst/>
@@ -4426,16 +5162,16 @@
           <a:lstStyle/>
           <a:p>
             <a:pPr algn="ctr"/>
-            <a:endParaRPr kumimoji="1" lang="zh-CN" altLang="en-US"/>
-          </a:p>
-        </p:txBody>
-      </p:sp>
-      <p:sp>
-        <p:nvSpPr>
-          <p:cNvPr id="31" name="下箭头 30">
-            <a:extLst>
-              <a:ext uri="{FF2B5EF4-FFF2-40B4-BE49-F238E27FC236}">
-                <a16:creationId xmlns:a16="http://schemas.microsoft.com/office/drawing/2014/main" id="{03EC22AE-378E-BD4E-8021-160D8A59F64E}"/>
+            <a:endParaRPr kumimoji="1" lang="zh-CN" altLang="en-US" b="1"/>
+          </a:p>
+        </p:txBody>
+      </p:sp>
+      <p:sp>
+        <p:nvSpPr>
+          <p:cNvPr id="74" name="下箭头 73">
+            <a:extLst>
+              <a:ext uri="{FF2B5EF4-FFF2-40B4-BE49-F238E27FC236}">
+                <a16:creationId xmlns:a16="http://schemas.microsoft.com/office/drawing/2014/main" id="{1D3C13F8-AF39-2244-9678-917DAB605FBA}"/>
               </a:ext>
             </a:extLst>
           </p:cNvPr>
@@ -4444,11 +5180,14 @@
         </p:nvSpPr>
         <p:spPr>
           <a:xfrm>
-            <a:off x="4014718" y="2997717"/>
-            <a:ext cx="259553" cy="180790"/>
+            <a:off x="3673838" y="4625736"/>
+            <a:ext cx="175767" cy="182722"/>
           </a:xfrm>
           <a:prstGeom prst="downArrow">
-            <a:avLst/>
+            <a:avLst>
+              <a:gd name="adj1" fmla="val 50000"/>
+              <a:gd name="adj2" fmla="val 47371"/>
+            </a:avLst>
           </a:prstGeom>
           <a:solidFill>
             <a:srgbClr val="0070C0"/>
@@ -4475,16 +5214,16 @@
           <a:lstStyle/>
           <a:p>
             <a:pPr algn="ctr"/>
-            <a:endParaRPr kumimoji="1" lang="zh-CN" altLang="en-US"/>
-          </a:p>
-        </p:txBody>
-      </p:sp>
-      <p:sp>
-        <p:nvSpPr>
-          <p:cNvPr id="32" name="下箭头 31">
-            <a:extLst>
-              <a:ext uri="{FF2B5EF4-FFF2-40B4-BE49-F238E27FC236}">
-                <a16:creationId xmlns:a16="http://schemas.microsoft.com/office/drawing/2014/main" id="{CB211465-BE7A-694E-9FCC-CCED075A0606}"/>
+            <a:endParaRPr kumimoji="1" lang="zh-CN" altLang="en-US" b="1"/>
+          </a:p>
+        </p:txBody>
+      </p:sp>
+      <p:sp>
+        <p:nvSpPr>
+          <p:cNvPr id="75" name="下箭头 74">
+            <a:extLst>
+              <a:ext uri="{FF2B5EF4-FFF2-40B4-BE49-F238E27FC236}">
+                <a16:creationId xmlns:a16="http://schemas.microsoft.com/office/drawing/2014/main" id="{D0026BFE-B252-EF47-9E7F-2038DAE419E0}"/>
               </a:ext>
             </a:extLst>
           </p:cNvPr>
@@ -4493,8 +5232,8 @@
         </p:nvSpPr>
         <p:spPr>
           <a:xfrm>
-            <a:off x="7592450" y="2997717"/>
-            <a:ext cx="259553" cy="180790"/>
+            <a:off x="6287556" y="4623706"/>
+            <a:ext cx="178412" cy="181325"/>
           </a:xfrm>
           <a:prstGeom prst="downArrow">
             <a:avLst/>
@@ -4524,16 +5263,16 @@
           <a:lstStyle/>
           <a:p>
             <a:pPr algn="ctr"/>
-            <a:endParaRPr kumimoji="1" lang="zh-CN" altLang="en-US"/>
-          </a:p>
-        </p:txBody>
-      </p:sp>
-      <p:sp>
-        <p:nvSpPr>
-          <p:cNvPr id="33" name="矩形 32">
-            <a:extLst>
-              <a:ext uri="{FF2B5EF4-FFF2-40B4-BE49-F238E27FC236}">
-                <a16:creationId xmlns:a16="http://schemas.microsoft.com/office/drawing/2014/main" id="{F479F3E2-E958-3D4D-93EE-923E1DEF5168}"/>
+            <a:endParaRPr kumimoji="1" lang="zh-CN" altLang="en-US" b="1"/>
+          </a:p>
+        </p:txBody>
+      </p:sp>
+      <p:sp>
+        <p:nvSpPr>
+          <p:cNvPr id="7" name="矩形 6">
+            <a:extLst>
+              <a:ext uri="{FF2B5EF4-FFF2-40B4-BE49-F238E27FC236}">
+                <a16:creationId xmlns:a16="http://schemas.microsoft.com/office/drawing/2014/main" id="{DD7208A9-1A74-CF43-AD09-DA0307701D2F}"/>
               </a:ext>
             </a:extLst>
           </p:cNvPr>
@@ -4542,8 +5281,8 @@
         </p:nvSpPr>
         <p:spPr>
           <a:xfrm>
-            <a:off x="2513239" y="2595432"/>
-            <a:ext cx="3349413" cy="363849"/>
+            <a:off x="2577241" y="3795612"/>
+            <a:ext cx="902376" cy="288000"/>
           </a:xfrm>
           <a:prstGeom prst="rect">
             <a:avLst/>
@@ -4578,22 +5317,22 @@
           <a:p>
             <a:pPr algn="ctr"/>
             <a:r>
-              <a:rPr kumimoji="1" lang="zh-CN" altLang="en-US" sz="1200" dirty="0">
+              <a:rPr kumimoji="1" lang="zh-CN" altLang="en-US" sz="800" b="1" dirty="0">
                 <a:solidFill>
                   <a:schemeClr val="tx1"/>
                 </a:solidFill>
               </a:rPr>
-              <a:t>人体几何提供拓扑结构约束</a:t>
-            </a:r>
-          </a:p>
-        </p:txBody>
-      </p:sp>
-      <p:sp>
-        <p:nvSpPr>
-          <p:cNvPr id="36" name="矩形 35">
-            <a:extLst>
-              <a:ext uri="{FF2B5EF4-FFF2-40B4-BE49-F238E27FC236}">
-                <a16:creationId xmlns:a16="http://schemas.microsoft.com/office/drawing/2014/main" id="{15DAFCAF-6247-3C4F-8EA7-DBECB725F6D7}"/>
+              <a:t>动态变化难建模</a:t>
+            </a:r>
+          </a:p>
+        </p:txBody>
+      </p:sp>
+      <p:sp>
+        <p:nvSpPr>
+          <p:cNvPr id="78" name="矩形 77">
+            <a:extLst>
+              <a:ext uri="{FF2B5EF4-FFF2-40B4-BE49-F238E27FC236}">
+                <a16:creationId xmlns:a16="http://schemas.microsoft.com/office/drawing/2014/main" id="{979E7011-013C-AE4F-984C-33A798566EF5}"/>
               </a:ext>
             </a:extLst>
           </p:cNvPr>
@@ -4602,8 +5341,8 @@
         </p:nvSpPr>
         <p:spPr>
           <a:xfrm>
-            <a:off x="6015789" y="2592244"/>
-            <a:ext cx="3249949" cy="363849"/>
+            <a:off x="2577241" y="4147664"/>
+            <a:ext cx="902376" cy="288000"/>
           </a:xfrm>
           <a:prstGeom prst="rect">
             <a:avLst/>
@@ -4638,62 +5377,22 @@
           <a:p>
             <a:pPr algn="ctr"/>
             <a:r>
-              <a:rPr kumimoji="1" lang="zh-CN" altLang="en-US" sz="1200" dirty="0">
+              <a:rPr kumimoji="1" lang="zh-CN" altLang="en-US" sz="800" b="1" dirty="0">
                 <a:solidFill>
                   <a:schemeClr val="tx1"/>
                 </a:solidFill>
               </a:rPr>
-              <a:t>人体几何提供测量信息先验</a:t>
-            </a:r>
-          </a:p>
-        </p:txBody>
-      </p:sp>
-      <p:sp>
-        <p:nvSpPr>
-          <p:cNvPr id="39" name="文本框 38">
-            <a:extLst>
-              <a:ext uri="{FF2B5EF4-FFF2-40B4-BE49-F238E27FC236}">
-                <a16:creationId xmlns:a16="http://schemas.microsoft.com/office/drawing/2014/main" id="{C40A0DA6-A11F-5345-B458-6A425514CD44}"/>
-              </a:ext>
-            </a:extLst>
-          </p:cNvPr>
-          <p:cNvSpPr txBox="1"/>
-          <p:nvPr/>
-        </p:nvSpPr>
-        <p:spPr>
-          <a:xfrm>
-            <a:off x="4515903" y="2301244"/>
-            <a:ext cx="2675894" cy="276999"/>
-          </a:xfrm>
-          <a:prstGeom prst="rect">
-            <a:avLst/>
-          </a:prstGeom>
-          <a:noFill/>
-        </p:spPr>
-        <p:txBody>
-          <a:bodyPr wrap="square">
-            <a:spAutoFit/>
-          </a:bodyPr>
-          <a:lstStyle/>
-          <a:p>
-            <a:pPr algn="ctr"/>
-            <a:r>
-              <a:rPr kumimoji="1" lang="zh-CN" altLang="en-US" sz="1200" dirty="0">
-                <a:solidFill>
-                  <a:schemeClr val="tx1"/>
-                </a:solidFill>
-              </a:rPr>
-              <a:t>引入参数化人体几何先验</a:t>
-            </a:r>
-          </a:p>
-        </p:txBody>
-      </p:sp>
-      <p:sp>
-        <p:nvSpPr>
-          <p:cNvPr id="43" name="矩形 42">
-            <a:extLst>
-              <a:ext uri="{FF2B5EF4-FFF2-40B4-BE49-F238E27FC236}">
-                <a16:creationId xmlns:a16="http://schemas.microsoft.com/office/drawing/2014/main" id="{9BE688C9-CB83-F447-BD34-8337B465A7E3}"/>
+              <a:t>拓扑网格易退化</a:t>
+            </a:r>
+          </a:p>
+        </p:txBody>
+      </p:sp>
+      <p:sp>
+        <p:nvSpPr>
+          <p:cNvPr id="79" name="矩形 78">
+            <a:extLst>
+              <a:ext uri="{FF2B5EF4-FFF2-40B4-BE49-F238E27FC236}">
+                <a16:creationId xmlns:a16="http://schemas.microsoft.com/office/drawing/2014/main" id="{FF86F938-1854-1E4B-840C-ECE860216C14}"/>
               </a:ext>
             </a:extLst>
           </p:cNvPr>
@@ -4702,15 +5401,17 @@
         </p:nvSpPr>
         <p:spPr>
           <a:xfrm>
-            <a:off x="2610908" y="3640342"/>
-            <a:ext cx="3090107" cy="288300"/>
+            <a:off x="3793634" y="3798700"/>
+            <a:ext cx="1209169" cy="288000"/>
           </a:xfrm>
           <a:prstGeom prst="rect">
             <a:avLst/>
           </a:prstGeom>
           <a:noFill/>
           <a:ln>
-            <a:noFill/>
+            <a:solidFill>
+              <a:schemeClr val="tx1"/>
+            </a:solidFill>
             <a:prstDash val="solid"/>
           </a:ln>
         </p:spPr>
@@ -4736,22 +5437,38 @@
           <a:p>
             <a:pPr algn="ctr"/>
             <a:r>
-              <a:rPr kumimoji="1" lang="zh-CN" altLang="en-US" sz="1100" dirty="0">
+              <a:rPr kumimoji="1" lang="zh-CN" altLang="en-US" sz="800" b="1" dirty="0">
                 <a:solidFill>
                   <a:schemeClr val="tx1"/>
                 </a:solidFill>
               </a:rPr>
-              <a:t>可变形穿衣人网格表示</a:t>
-            </a:r>
-          </a:p>
-        </p:txBody>
-      </p:sp>
-      <p:sp>
-        <p:nvSpPr>
-          <p:cNvPr id="45" name="矩形 44">
-            <a:extLst>
-              <a:ext uri="{FF2B5EF4-FFF2-40B4-BE49-F238E27FC236}">
-                <a16:creationId xmlns:a16="http://schemas.microsoft.com/office/drawing/2014/main" id="{826EB1D6-45D7-AD4A-BA39-71A097F42B91}"/>
+              <a:t>解析式三维高斯</a:t>
+            </a:r>
+            <a:endParaRPr kumimoji="1" lang="en-US" altLang="zh-CN" sz="800" b="1" dirty="0">
+              <a:solidFill>
+                <a:schemeClr val="tx1"/>
+              </a:solidFill>
+            </a:endParaRPr>
+          </a:p>
+          <a:p>
+            <a:pPr algn="ctr"/>
+            <a:r>
+              <a:rPr kumimoji="1" lang="zh-CN" altLang="en-US" sz="800" b="1" dirty="0">
+                <a:solidFill>
+                  <a:schemeClr val="tx1"/>
+                </a:solidFill>
+              </a:rPr>
+              <a:t>绑定策略</a:t>
+            </a:r>
+          </a:p>
+        </p:txBody>
+      </p:sp>
+      <p:sp>
+        <p:nvSpPr>
+          <p:cNvPr id="80" name="矩形 79">
+            <a:extLst>
+              <a:ext uri="{FF2B5EF4-FFF2-40B4-BE49-F238E27FC236}">
+                <a16:creationId xmlns:a16="http://schemas.microsoft.com/office/drawing/2014/main" id="{2511AF8B-EEAB-DF43-B410-88177D1480D1}"/>
               </a:ext>
             </a:extLst>
           </p:cNvPr>
@@ -4760,15 +5477,17 @@
         </p:nvSpPr>
         <p:spPr>
           <a:xfrm>
-            <a:off x="6122394" y="3595644"/>
-            <a:ext cx="3090107" cy="288300"/>
+            <a:off x="3793634" y="4162897"/>
+            <a:ext cx="1209169" cy="288000"/>
           </a:xfrm>
           <a:prstGeom prst="rect">
             <a:avLst/>
           </a:prstGeom>
           <a:noFill/>
           <a:ln>
-            <a:noFill/>
+            <a:solidFill>
+              <a:schemeClr val="tx1"/>
+            </a:solidFill>
             <a:prstDash val="solid"/>
           </a:ln>
         </p:spPr>
@@ -4794,22 +5513,38 @@
           <a:p>
             <a:pPr algn="ctr"/>
             <a:r>
-              <a:rPr kumimoji="1" lang="zh-CN" altLang="en-US" sz="1100" dirty="0">
+              <a:rPr kumimoji="1" lang="zh-CN" altLang="en-US" sz="800" b="1" dirty="0">
                 <a:solidFill>
                   <a:schemeClr val="tx1"/>
                 </a:solidFill>
               </a:rPr>
-              <a:t>人体测量先验自动化提取</a:t>
-            </a:r>
-          </a:p>
-        </p:txBody>
-      </p:sp>
-      <p:sp>
-        <p:nvSpPr>
-          <p:cNvPr id="46" name="矩形 45">
-            <a:extLst>
-              <a:ext uri="{FF2B5EF4-FFF2-40B4-BE49-F238E27FC236}">
-                <a16:creationId xmlns:a16="http://schemas.microsoft.com/office/drawing/2014/main" id="{6324C99D-4B2D-8A4F-A578-76E120F84167}"/>
+              <a:t>三角等边正则</a:t>
+            </a:r>
+            <a:endParaRPr kumimoji="1" lang="en-US" altLang="zh-CN" sz="800" b="1" dirty="0">
+              <a:solidFill>
+                <a:schemeClr val="tx1"/>
+              </a:solidFill>
+            </a:endParaRPr>
+          </a:p>
+          <a:p>
+            <a:pPr algn="ctr"/>
+            <a:r>
+              <a:rPr kumimoji="1" lang="zh-CN" altLang="en-US" sz="800" b="1" dirty="0">
+                <a:solidFill>
+                  <a:schemeClr val="tx1"/>
+                </a:solidFill>
+              </a:rPr>
+              <a:t>约束项</a:t>
+            </a:r>
+          </a:p>
+        </p:txBody>
+      </p:sp>
+      <p:sp>
+        <p:nvSpPr>
+          <p:cNvPr id="81" name="下箭头 80">
+            <a:extLst>
+              <a:ext uri="{FF2B5EF4-FFF2-40B4-BE49-F238E27FC236}">
+                <a16:creationId xmlns:a16="http://schemas.microsoft.com/office/drawing/2014/main" id="{2B863901-6E17-A043-B86D-675F213AD44E}"/>
               </a:ext>
             </a:extLst>
           </p:cNvPr>
@@ -4817,18 +5552,19 @@
           <p:nvPr/>
         </p:nvSpPr>
         <p:spPr>
-          <a:xfrm>
-            <a:off x="6122394" y="3893193"/>
-            <a:ext cx="3090107" cy="288300"/>
-          </a:xfrm>
-          <a:prstGeom prst="rect">
-            <a:avLst/>
+          <a:xfrm rot="16200000">
+            <a:off x="3571833" y="3835028"/>
+            <a:ext cx="129390" cy="234366"/>
+          </a:xfrm>
+          <a:prstGeom prst="downArrow">
+            <a:avLst>
+              <a:gd name="adj1" fmla="val 50000"/>
+              <a:gd name="adj2" fmla="val 47371"/>
+            </a:avLst>
           </a:prstGeom>
-          <a:noFill/>
-          <a:ln>
-            <a:noFill/>
-            <a:prstDash val="solid"/>
-          </a:ln>
+          <a:solidFill>
+            <a:srgbClr val="0070C0"/>
+          </a:solidFill>
         </p:spPr>
         <p:style>
           <a:lnRef idx="2">
@@ -4851,23 +5587,16 @@
           <a:lstStyle/>
           <a:p>
             <a:pPr algn="ctr"/>
-            <a:r>
-              <a:rPr kumimoji="1" lang="zh-CN" altLang="en-US" sz="1100" dirty="0">
-                <a:solidFill>
-                  <a:schemeClr val="tx1"/>
-                </a:solidFill>
-              </a:rPr>
-              <a:t>服装设计参数重表示</a:t>
-            </a:r>
-          </a:p>
-        </p:txBody>
-      </p:sp>
-      <p:sp>
-        <p:nvSpPr>
-          <p:cNvPr id="47" name="矩形 46">
-            <a:extLst>
-              <a:ext uri="{FF2B5EF4-FFF2-40B4-BE49-F238E27FC236}">
-                <a16:creationId xmlns:a16="http://schemas.microsoft.com/office/drawing/2014/main" id="{5AD9FF3D-7151-544F-A5F6-33508FBBABF4}"/>
+            <a:endParaRPr kumimoji="1" lang="zh-CN" altLang="en-US" b="1"/>
+          </a:p>
+        </p:txBody>
+      </p:sp>
+      <p:sp>
+        <p:nvSpPr>
+          <p:cNvPr id="82" name="下箭头 81">
+            <a:extLst>
+              <a:ext uri="{FF2B5EF4-FFF2-40B4-BE49-F238E27FC236}">
+                <a16:creationId xmlns:a16="http://schemas.microsoft.com/office/drawing/2014/main" id="{E97E1BC8-273A-EE4A-BDB0-567BB1DA236B}"/>
               </a:ext>
             </a:extLst>
           </p:cNvPr>
@@ -4875,18 +5604,19 @@
           <p:nvPr/>
         </p:nvSpPr>
         <p:spPr>
-          <a:xfrm>
-            <a:off x="6122394" y="4221644"/>
-            <a:ext cx="3090107" cy="288300"/>
-          </a:xfrm>
-          <a:prstGeom prst="rect">
-            <a:avLst/>
+          <a:xfrm rot="16200000">
+            <a:off x="3575772" y="4173542"/>
+            <a:ext cx="123711" cy="232162"/>
+          </a:xfrm>
+          <a:prstGeom prst="downArrow">
+            <a:avLst>
+              <a:gd name="adj1" fmla="val 50000"/>
+              <a:gd name="adj2" fmla="val 47371"/>
+            </a:avLst>
           </a:prstGeom>
-          <a:noFill/>
-          <a:ln>
-            <a:noFill/>
-            <a:prstDash val="solid"/>
-          </a:ln>
+          <a:solidFill>
+            <a:srgbClr val="0070C0"/>
+          </a:solidFill>
         </p:spPr>
         <p:style>
           <a:lnRef idx="2">
@@ -4909,42 +5639,119 @@
           <a:lstStyle/>
           <a:p>
             <a:pPr algn="ctr"/>
-            <a:r>
-              <a:rPr kumimoji="1" lang="zh-CN" altLang="en-US" sz="1100" dirty="0">
-                <a:solidFill>
-                  <a:schemeClr val="tx1"/>
-                </a:solidFill>
-              </a:rPr>
-              <a:t>几何先验驱动多模态推理</a:t>
-            </a:r>
-          </a:p>
-        </p:txBody>
-      </p:sp>
-      <p:sp>
-        <p:nvSpPr>
-          <p:cNvPr id="48" name="矩形 47">
-            <a:extLst>
-              <a:ext uri="{FF2B5EF4-FFF2-40B4-BE49-F238E27FC236}">
-                <a16:creationId xmlns:a16="http://schemas.microsoft.com/office/drawing/2014/main" id="{03804F8B-075A-9440-AC49-21C41680CC31}"/>
-              </a:ext>
-            </a:extLst>
-          </p:cNvPr>
-          <p:cNvSpPr/>
+            <a:endParaRPr kumimoji="1" lang="zh-CN" altLang="en-US" b="1"/>
+          </a:p>
+        </p:txBody>
+      </p:sp>
+      <p:sp>
+        <p:nvSpPr>
+          <p:cNvPr id="83" name="文本框 82">
+            <a:extLst>
+              <a:ext uri="{FF2B5EF4-FFF2-40B4-BE49-F238E27FC236}">
+                <a16:creationId xmlns:a16="http://schemas.microsoft.com/office/drawing/2014/main" id="{546EC99B-426C-E348-ACFE-349B84A5936D}"/>
+              </a:ext>
+            </a:extLst>
+          </p:cNvPr>
+          <p:cNvSpPr txBox="1"/>
           <p:nvPr/>
         </p:nvSpPr>
         <p:spPr>
           <a:xfrm>
-            <a:off x="2487582" y="5370230"/>
-            <a:ext cx="6785768" cy="363849"/>
+            <a:off x="2747856" y="4414366"/>
+            <a:ext cx="483110" cy="230832"/>
           </a:xfrm>
           <a:prstGeom prst="rect">
             <a:avLst/>
           </a:prstGeom>
-          <a:solidFill>
-            <a:schemeClr val="accent5">
-              <a:lumMod val="50000"/>
-            </a:schemeClr>
-          </a:solidFill>
+          <a:noFill/>
+        </p:spPr>
+        <p:txBody>
+          <a:bodyPr wrap="square">
+            <a:spAutoFit/>
+          </a:bodyPr>
+          <a:lstStyle/>
+          <a:p>
+            <a:pPr algn="ctr"/>
+            <a:r>
+              <a:rPr kumimoji="1" lang="zh-CN" altLang="en-US" sz="900" b="1" dirty="0">
+                <a:solidFill>
+                  <a:srgbClr val="0070C0"/>
+                </a:solidFill>
+              </a:rPr>
+              <a:t>难点</a:t>
+            </a:r>
+            <a:endParaRPr lang="zh-CN" altLang="en-US" sz="900" dirty="0"/>
+          </a:p>
+        </p:txBody>
+      </p:sp>
+      <p:sp>
+        <p:nvSpPr>
+          <p:cNvPr id="84" name="文本框 83">
+            <a:extLst>
+              <a:ext uri="{FF2B5EF4-FFF2-40B4-BE49-F238E27FC236}">
+                <a16:creationId xmlns:a16="http://schemas.microsoft.com/office/drawing/2014/main" id="{BD0836B4-0C73-814D-9EE3-22D92728B19B}"/>
+              </a:ext>
+            </a:extLst>
+          </p:cNvPr>
+          <p:cNvSpPr txBox="1"/>
+          <p:nvPr/>
+        </p:nvSpPr>
+        <p:spPr>
+          <a:xfrm>
+            <a:off x="4133189" y="4414366"/>
+            <a:ext cx="483110" cy="230832"/>
+          </a:xfrm>
+          <a:prstGeom prst="rect">
+            <a:avLst/>
+          </a:prstGeom>
+          <a:noFill/>
+        </p:spPr>
+        <p:txBody>
+          <a:bodyPr wrap="square">
+            <a:spAutoFit/>
+          </a:bodyPr>
+          <a:lstStyle/>
+          <a:p>
+            <a:pPr algn="ctr"/>
+            <a:r>
+              <a:rPr kumimoji="1" lang="zh-CN" altLang="en-US" sz="900" b="1" dirty="0">
+                <a:solidFill>
+                  <a:srgbClr val="0070C0"/>
+                </a:solidFill>
+              </a:rPr>
+              <a:t>方案</a:t>
+            </a:r>
+            <a:endParaRPr lang="zh-CN" altLang="en-US" sz="900" dirty="0"/>
+          </a:p>
+        </p:txBody>
+      </p:sp>
+      <p:sp>
+        <p:nvSpPr>
+          <p:cNvPr id="95" name="矩形 94">
+            <a:extLst>
+              <a:ext uri="{FF2B5EF4-FFF2-40B4-BE49-F238E27FC236}">
+                <a16:creationId xmlns:a16="http://schemas.microsoft.com/office/drawing/2014/main" id="{F839E27A-1384-754D-A9F0-312138D948E2}"/>
+              </a:ext>
+            </a:extLst>
+          </p:cNvPr>
+          <p:cNvSpPr/>
+          <p:nvPr/>
+        </p:nvSpPr>
+        <p:spPr>
+          <a:xfrm>
+            <a:off x="5270659" y="3800061"/>
+            <a:ext cx="897241" cy="288000"/>
+          </a:xfrm>
+          <a:prstGeom prst="rect">
+            <a:avLst/>
+          </a:prstGeom>
+          <a:noFill/>
+          <a:ln>
+            <a:solidFill>
+              <a:schemeClr val="tx1"/>
+            </a:solidFill>
+            <a:prstDash val="solid"/>
+          </a:ln>
         </p:spPr>
         <p:style>
           <a:lnRef idx="2">
@@ -4968,18 +5775,22 @@
           <a:p>
             <a:pPr algn="ctr"/>
             <a:r>
-              <a:rPr kumimoji="1" lang="zh-CN" altLang="en-US" sz="1400" dirty="0"/>
-              <a:t>构建高保真、可驱动的虚拟数字人体化身</a:t>
-            </a:r>
-          </a:p>
-        </p:txBody>
-      </p:sp>
-      <p:sp>
-        <p:nvSpPr>
-          <p:cNvPr id="49" name="下箭头 48">
-            <a:extLst>
-              <a:ext uri="{FF2B5EF4-FFF2-40B4-BE49-F238E27FC236}">
-                <a16:creationId xmlns:a16="http://schemas.microsoft.com/office/drawing/2014/main" id="{CB99CAA4-603A-604D-BBEB-7494B44D7157}"/>
+              <a:rPr kumimoji="1" lang="zh-CN" altLang="en-US" sz="800" b="1" dirty="0">
+                <a:solidFill>
+                  <a:schemeClr val="tx1"/>
+                </a:solidFill>
+              </a:rPr>
+              <a:t>服装尺寸难适配</a:t>
+            </a:r>
+          </a:p>
+        </p:txBody>
+      </p:sp>
+      <p:sp>
+        <p:nvSpPr>
+          <p:cNvPr id="96" name="矩形 95">
+            <a:extLst>
+              <a:ext uri="{FF2B5EF4-FFF2-40B4-BE49-F238E27FC236}">
+                <a16:creationId xmlns:a16="http://schemas.microsoft.com/office/drawing/2014/main" id="{D8ECF57E-8AC7-5D42-B0A0-6E56E8C724CD}"/>
               </a:ext>
             </a:extLst>
           </p:cNvPr>
@@ -4988,15 +5799,19 @@
         </p:nvSpPr>
         <p:spPr>
           <a:xfrm>
-            <a:off x="3954342" y="4577021"/>
-            <a:ext cx="259553" cy="180790"/>
-          </a:xfrm>
-          <a:prstGeom prst="downArrow">
+            <a:off x="5275410" y="4154012"/>
+            <a:ext cx="904465" cy="288000"/>
+          </a:xfrm>
+          <a:prstGeom prst="rect">
             <a:avLst/>
           </a:prstGeom>
-          <a:solidFill>
-            <a:srgbClr val="0070C0"/>
-          </a:solidFill>
+          <a:noFill/>
+          <a:ln>
+            <a:solidFill>
+              <a:schemeClr val="tx1"/>
+            </a:solidFill>
+            <a:prstDash val="solid"/>
+          </a:ln>
         </p:spPr>
         <p:style>
           <a:lnRef idx="2">
@@ -5019,16 +5834,23 @@
           <a:lstStyle/>
           <a:p>
             <a:pPr algn="ctr"/>
-            <a:endParaRPr kumimoji="1" lang="zh-CN" altLang="en-US"/>
-          </a:p>
-        </p:txBody>
-      </p:sp>
-      <p:sp>
-        <p:nvSpPr>
-          <p:cNvPr id="50" name="下箭头 49">
-            <a:extLst>
-              <a:ext uri="{FF2B5EF4-FFF2-40B4-BE49-F238E27FC236}">
-                <a16:creationId xmlns:a16="http://schemas.microsoft.com/office/drawing/2014/main" id="{9ACFCC82-2543-ED46-9198-5CD1B6ED7CD4}"/>
+            <a:r>
+              <a:rPr kumimoji="1" lang="zh-CN" altLang="en-US" sz="800" b="1" dirty="0">
+                <a:solidFill>
+                  <a:schemeClr val="tx1"/>
+                </a:solidFill>
+              </a:rPr>
+              <a:t>参数推理效率低</a:t>
+            </a:r>
+          </a:p>
+        </p:txBody>
+      </p:sp>
+      <p:sp>
+        <p:nvSpPr>
+          <p:cNvPr id="97" name="矩形 96">
+            <a:extLst>
+              <a:ext uri="{FF2B5EF4-FFF2-40B4-BE49-F238E27FC236}">
+                <a16:creationId xmlns:a16="http://schemas.microsoft.com/office/drawing/2014/main" id="{1DE815C7-11B0-2648-B0BB-7779B2EC895B}"/>
               </a:ext>
             </a:extLst>
           </p:cNvPr>
@@ -5037,15 +5859,19 @@
         </p:nvSpPr>
         <p:spPr>
           <a:xfrm>
-            <a:off x="7589088" y="4580349"/>
-            <a:ext cx="259553" cy="180790"/>
-          </a:xfrm>
-          <a:prstGeom prst="downArrow">
+            <a:off x="6525779" y="3808694"/>
+            <a:ext cx="1154090" cy="288000"/>
+          </a:xfrm>
+          <a:prstGeom prst="rect">
             <a:avLst/>
           </a:prstGeom>
-          <a:solidFill>
-            <a:srgbClr val="0070C0"/>
-          </a:solidFill>
+          <a:noFill/>
+          <a:ln>
+            <a:solidFill>
+              <a:schemeClr val="tx1"/>
+            </a:solidFill>
+            <a:prstDash val="solid"/>
+          </a:ln>
         </p:spPr>
         <p:style>
           <a:lnRef idx="2">
@@ -5068,16 +5894,55 @@
           <a:lstStyle/>
           <a:p>
             <a:pPr algn="ctr"/>
-            <a:endParaRPr kumimoji="1" lang="zh-CN" altLang="en-US"/>
-          </a:p>
-        </p:txBody>
-      </p:sp>
-      <p:sp>
-        <p:nvSpPr>
-          <p:cNvPr id="51" name="下箭头 50">
-            <a:extLst>
-              <a:ext uri="{FF2B5EF4-FFF2-40B4-BE49-F238E27FC236}">
-                <a16:creationId xmlns:a16="http://schemas.microsoft.com/office/drawing/2014/main" id="{D2DBD368-CF9A-2A40-9C72-9C7428E2A52E}"/>
+            <a:r>
+              <a:rPr kumimoji="1" lang="zh-CN" altLang="en-US" sz="800" b="1" dirty="0">
+                <a:solidFill>
+                  <a:schemeClr val="tx1"/>
+                </a:solidFill>
+              </a:rPr>
+              <a:t>融合</a:t>
+            </a:r>
+            <a:r>
+              <a:rPr kumimoji="1" lang="en-US" altLang="zh-CN" sz="800" b="1" dirty="0">
+                <a:solidFill>
+                  <a:schemeClr val="tx1"/>
+                </a:solidFill>
+              </a:rPr>
+              <a:t>SMPL</a:t>
+            </a:r>
+            <a:r>
+              <a:rPr kumimoji="1" lang="zh-CN" altLang="en-US" sz="800" b="1" dirty="0">
+                <a:solidFill>
+                  <a:schemeClr val="tx1"/>
+                </a:solidFill>
+              </a:rPr>
+              <a:t>拓扑的</a:t>
+            </a:r>
+            <a:endParaRPr kumimoji="1" lang="en-US" altLang="zh-CN" sz="800" b="1" dirty="0">
+              <a:solidFill>
+                <a:schemeClr val="tx1"/>
+              </a:solidFill>
+            </a:endParaRPr>
+          </a:p>
+          <a:p>
+            <a:pPr algn="ctr"/>
+            <a:r>
+              <a:rPr kumimoji="1" lang="zh-CN" altLang="en-US" sz="800" b="1" dirty="0">
+                <a:solidFill>
+                  <a:schemeClr val="tx1"/>
+                </a:solidFill>
+              </a:rPr>
+              <a:t>测量先验</a:t>
+            </a:r>
+          </a:p>
+        </p:txBody>
+      </p:sp>
+      <p:sp>
+        <p:nvSpPr>
+          <p:cNvPr id="98" name="矩形 97">
+            <a:extLst>
+              <a:ext uri="{FF2B5EF4-FFF2-40B4-BE49-F238E27FC236}">
+                <a16:creationId xmlns:a16="http://schemas.microsoft.com/office/drawing/2014/main" id="{9BC6D0C2-E940-BA47-8247-3D682E830307}"/>
               </a:ext>
             </a:extLst>
           </p:cNvPr>
@@ -5086,15 +5951,19 @@
         </p:nvSpPr>
         <p:spPr>
           <a:xfrm>
-            <a:off x="7589088" y="5172160"/>
-            <a:ext cx="259553" cy="180790"/>
-          </a:xfrm>
-          <a:prstGeom prst="downArrow">
+            <a:off x="6525779" y="4160797"/>
+            <a:ext cx="1154090" cy="288000"/>
+          </a:xfrm>
+          <a:prstGeom prst="rect">
             <a:avLst/>
           </a:prstGeom>
-          <a:solidFill>
-            <a:srgbClr val="0070C0"/>
-          </a:solidFill>
+          <a:noFill/>
+          <a:ln>
+            <a:solidFill>
+              <a:schemeClr val="tx1"/>
+            </a:solidFill>
+            <a:prstDash val="solid"/>
+          </a:ln>
         </p:spPr>
         <p:style>
           <a:lnRef idx="2">
@@ -5117,16 +5986,39 @@
           <a:lstStyle/>
           <a:p>
             <a:pPr algn="ctr"/>
-            <a:endParaRPr kumimoji="1" lang="zh-CN" altLang="en-US"/>
-          </a:p>
-        </p:txBody>
-      </p:sp>
-      <p:sp>
-        <p:nvSpPr>
-          <p:cNvPr id="52" name="下箭头 51">
-            <a:extLst>
-              <a:ext uri="{FF2B5EF4-FFF2-40B4-BE49-F238E27FC236}">
-                <a16:creationId xmlns:a16="http://schemas.microsoft.com/office/drawing/2014/main" id="{A5C10013-B906-AC45-8FC9-739175F77079}"/>
+            <a:r>
+              <a:rPr kumimoji="1" lang="zh-CN" altLang="en-US" sz="800" b="1" dirty="0">
+                <a:solidFill>
+                  <a:schemeClr val="tx1"/>
+                </a:solidFill>
+              </a:rPr>
+              <a:t>服装设计参数</a:t>
+            </a:r>
+            <a:endParaRPr kumimoji="1" lang="en-US" altLang="zh-CN" sz="800" b="1" dirty="0">
+              <a:solidFill>
+                <a:schemeClr val="tx1"/>
+              </a:solidFill>
+            </a:endParaRPr>
+          </a:p>
+          <a:p>
+            <a:pPr algn="ctr"/>
+            <a:r>
+              <a:rPr kumimoji="1" lang="zh-CN" altLang="en-US" sz="800" b="1" dirty="0">
+                <a:solidFill>
+                  <a:schemeClr val="tx1"/>
+                </a:solidFill>
+              </a:rPr>
+              <a:t>紧凑重表示</a:t>
+            </a:r>
+          </a:p>
+        </p:txBody>
+      </p:sp>
+      <p:sp>
+        <p:nvSpPr>
+          <p:cNvPr id="99" name="下箭头 98">
+            <a:extLst>
+              <a:ext uri="{FF2B5EF4-FFF2-40B4-BE49-F238E27FC236}">
+                <a16:creationId xmlns:a16="http://schemas.microsoft.com/office/drawing/2014/main" id="{6D1FF03A-0899-3E48-94D0-78EBCB2FF4F5}"/>
               </a:ext>
             </a:extLst>
           </p:cNvPr>
@@ -5134,12 +6026,15 @@
           <p:nvPr/>
         </p:nvSpPr>
         <p:spPr>
-          <a:xfrm>
-            <a:off x="3954341" y="5172160"/>
-            <a:ext cx="259553" cy="180790"/>
+          <a:xfrm rot="16200000">
+            <a:off x="6285935" y="3826157"/>
+            <a:ext cx="129390" cy="237501"/>
           </a:xfrm>
           <a:prstGeom prst="downArrow">
-            <a:avLst/>
+            <a:avLst>
+              <a:gd name="adj1" fmla="val 50000"/>
+              <a:gd name="adj2" fmla="val 47371"/>
+            </a:avLst>
           </a:prstGeom>
           <a:solidFill>
             <a:srgbClr val="0070C0"/>
@@ -5166,14 +6061,148 @@
           <a:lstStyle/>
           <a:p>
             <a:pPr algn="ctr"/>
-            <a:endParaRPr kumimoji="1" lang="zh-CN" altLang="en-US"/>
+            <a:endParaRPr kumimoji="1" lang="zh-CN" altLang="en-US" b="1"/>
+          </a:p>
+        </p:txBody>
+      </p:sp>
+      <p:sp>
+        <p:nvSpPr>
+          <p:cNvPr id="100" name="下箭头 99">
+            <a:extLst>
+              <a:ext uri="{FF2B5EF4-FFF2-40B4-BE49-F238E27FC236}">
+                <a16:creationId xmlns:a16="http://schemas.microsoft.com/office/drawing/2014/main" id="{F7BE6879-AE2C-2C46-92AA-204F3536547A}"/>
+              </a:ext>
+            </a:extLst>
+          </p:cNvPr>
+          <p:cNvSpPr/>
+          <p:nvPr/>
+        </p:nvSpPr>
+        <p:spPr>
+          <a:xfrm rot="16200000">
+            <a:off x="6290971" y="4174385"/>
+            <a:ext cx="123711" cy="237498"/>
+          </a:xfrm>
+          <a:prstGeom prst="downArrow">
+            <a:avLst>
+              <a:gd name="adj1" fmla="val 50000"/>
+              <a:gd name="adj2" fmla="val 47371"/>
+            </a:avLst>
+          </a:prstGeom>
+          <a:solidFill>
+            <a:srgbClr val="0070C0"/>
+          </a:solidFill>
+        </p:spPr>
+        <p:style>
+          <a:lnRef idx="2">
+            <a:schemeClr val="accent1">
+              <a:shade val="50000"/>
+            </a:schemeClr>
+          </a:lnRef>
+          <a:fillRef idx="1">
+            <a:schemeClr val="accent1"/>
+          </a:fillRef>
+          <a:effectRef idx="0">
+            <a:schemeClr val="accent1"/>
+          </a:effectRef>
+          <a:fontRef idx="minor">
+            <a:schemeClr val="lt1"/>
+          </a:fontRef>
+        </p:style>
+        <p:txBody>
+          <a:bodyPr rtlCol="0" anchor="ctr"/>
+          <a:lstStyle/>
+          <a:p>
+            <a:pPr algn="ctr"/>
+            <a:endParaRPr kumimoji="1" lang="zh-CN" altLang="en-US" b="1"/>
+          </a:p>
+        </p:txBody>
+      </p:sp>
+      <p:sp>
+        <p:nvSpPr>
+          <p:cNvPr id="101" name="文本框 100">
+            <a:extLst>
+              <a:ext uri="{FF2B5EF4-FFF2-40B4-BE49-F238E27FC236}">
+                <a16:creationId xmlns:a16="http://schemas.microsoft.com/office/drawing/2014/main" id="{0027C667-133C-0F4E-B08A-D9401D083F70}"/>
+              </a:ext>
+            </a:extLst>
+          </p:cNvPr>
+          <p:cNvSpPr txBox="1"/>
+          <p:nvPr/>
+        </p:nvSpPr>
+        <p:spPr>
+          <a:xfrm>
+            <a:off x="5471629" y="4414366"/>
+            <a:ext cx="483110" cy="230832"/>
+          </a:xfrm>
+          <a:prstGeom prst="rect">
+            <a:avLst/>
+          </a:prstGeom>
+          <a:noFill/>
+        </p:spPr>
+        <p:txBody>
+          <a:bodyPr wrap="square">
+            <a:spAutoFit/>
+          </a:bodyPr>
+          <a:lstStyle/>
+          <a:p>
+            <a:pPr algn="ctr"/>
+            <a:r>
+              <a:rPr kumimoji="1" lang="zh-CN" altLang="en-US" sz="900" b="1" dirty="0">
+                <a:solidFill>
+                  <a:srgbClr val="0070C0"/>
+                </a:solidFill>
+              </a:rPr>
+              <a:t>难点</a:t>
+            </a:r>
+            <a:endParaRPr lang="zh-CN" altLang="en-US" sz="900" dirty="0"/>
+          </a:p>
+        </p:txBody>
+      </p:sp>
+      <p:sp>
+        <p:nvSpPr>
+          <p:cNvPr id="102" name="文本框 101">
+            <a:extLst>
+              <a:ext uri="{FF2B5EF4-FFF2-40B4-BE49-F238E27FC236}">
+                <a16:creationId xmlns:a16="http://schemas.microsoft.com/office/drawing/2014/main" id="{4BDD6749-1472-F241-AE10-90C6B2E1E722}"/>
+              </a:ext>
+            </a:extLst>
+          </p:cNvPr>
+          <p:cNvSpPr txBox="1"/>
+          <p:nvPr/>
+        </p:nvSpPr>
+        <p:spPr>
+          <a:xfrm>
+            <a:off x="6809859" y="4414366"/>
+            <a:ext cx="483110" cy="230832"/>
+          </a:xfrm>
+          <a:prstGeom prst="rect">
+            <a:avLst/>
+          </a:prstGeom>
+          <a:noFill/>
+        </p:spPr>
+        <p:txBody>
+          <a:bodyPr wrap="square">
+            <a:spAutoFit/>
+          </a:bodyPr>
+          <a:lstStyle/>
+          <a:p>
+            <a:pPr algn="ctr"/>
+            <a:r>
+              <a:rPr kumimoji="1" lang="zh-CN" altLang="en-US" sz="900" b="1" dirty="0">
+                <a:solidFill>
+                  <a:srgbClr val="0070C0"/>
+                </a:solidFill>
+              </a:rPr>
+              <a:t>方案</a:t>
+            </a:r>
+            <a:endParaRPr lang="zh-CN" altLang="en-US" sz="900" dirty="0"/>
           </a:p>
         </p:txBody>
       </p:sp>
     </p:spTree>
     <p:extLst>
       <p:ext uri="{BB962C8B-B14F-4D97-AF65-F5344CB8AC3E}">
-        <p14:creationId xmlns:p14="http://schemas.microsoft.com/office/powerpoint/2010/main" val="3281288336"/>
+        <p14:creationId xmlns:p14="http://schemas.microsoft.com/office/powerpoint/2010/main" val="3241803489"/>
       </p:ext>
     </p:extLst>
   </p:cSld>
